--- a/assets/结构图/并列能力卡片-001/example.pptx
+++ b/assets/结构图/并列能力卡片-001/example.pptx
@@ -2,13 +2,17 @@
 <file path=ppt/presentation.xml><?xml version="1.0" encoding="utf-8"?>
 <p:presentation xmlns:p="http://schemas.openxmlformats.org/presentationml/2006/main">
   <p:sldMasterIdLst>
-    <p:sldMasterId xmlns:r="http://schemas.openxmlformats.org/officeDocument/2006/relationships" id="2147483648" r:id="R17c30eee8ba34995"/>
+    <p:sldMasterId xmlns:r="http://schemas.openxmlformats.org/officeDocument/2006/relationships" id="2147483648" r:id="Ra3f1a0dca0f94252"/>
   </p:sldMasterIdLst>
   <p:notesMasterIdLst>
-    <p:notesMasterId xmlns:r="http://schemas.openxmlformats.org/officeDocument/2006/relationships" r:id="Rb3d0c8a057284b82"/>
+    <p:notesMasterId xmlns:r="http://schemas.openxmlformats.org/officeDocument/2006/relationships" r:id="R4ae3159a2af74740"/>
   </p:notesMasterIdLst>
   <p:sldIdLst>
-    <p:sldId xmlns:r="http://schemas.openxmlformats.org/officeDocument/2006/relationships" id="256" r:id="R23866f6e07a84e3c"/>
+    <p:sldId xmlns:r="http://schemas.openxmlformats.org/officeDocument/2006/relationships" id="256" r:id="R431f9dab46944086"/>
+    <p:sldId xmlns:r="http://schemas.openxmlformats.org/officeDocument/2006/relationships" id="257" r:id="R93b4fdc771374013"/>
+    <p:sldId xmlns:r="http://schemas.openxmlformats.org/officeDocument/2006/relationships" id="258" r:id="R89c1f50b143943de"/>
+    <p:sldId xmlns:r="http://schemas.openxmlformats.org/officeDocument/2006/relationships" id="259" r:id="Rd96c2787899d447a"/>
+    <p:sldId xmlns:r="http://schemas.openxmlformats.org/officeDocument/2006/relationships" id="260" r:id="Re38baa0094864397"/>
   </p:sldIdLst>
   <p:sldSz cx="12192000" cy="6858000"/>
   <p:notesSz cx="6858000" cy="9144000"/>
@@ -468,6 +472,270 @@
 </p:notes>
 </file>
 
+<file path=ppt/notesSlides/notesSlide2.xml><?xml version="1.0" encoding="utf-8"?>
+<p:notes xmlns:p="http://schemas.openxmlformats.org/presentationml/2006/main">
+  <p:cSld>
+    <p:spTree>
+      <p:nvGrpSpPr>
+        <p:cNvPr id="1" name=""/>
+        <p:cNvGrpSpPr/>
+        <p:nvPr/>
+      </p:nvGrpSpPr>
+      <p:grpSpPr>
+        <a:xfrm xmlns:a="http://schemas.openxmlformats.org/drawingml/2006/main"/>
+      </p:grpSpPr>
+      <p:sp>
+        <p:nvSpPr>
+          <p:cNvPr id="2" name="Slide Image Placeholder 1"/>
+          <p:cNvSpPr>
+            <a:spLocks xmlns:a="http://schemas.openxmlformats.org/drawingml/2006/main" noGrp="1"/>
+          </p:cNvSpPr>
+          <p:nvPr>
+            <p:ph type="sldImg" idx="0"/>
+          </p:nvPr>
+        </p:nvSpPr>
+        <p:spPr/>
+      </p:sp>
+      <p:sp>
+        <p:nvSpPr>
+          <p:cNvPr id="3" name="Notes Placeholder 2"/>
+          <p:cNvSpPr>
+            <a:spLocks xmlns:a="http://schemas.openxmlformats.org/drawingml/2006/main" noGrp="1"/>
+          </p:cNvSpPr>
+          <p:nvPr>
+            <p:ph type="body" idx="1"/>
+          </p:nvPr>
+        </p:nvSpPr>
+        <p:spPr/>
+        <p:txBody>
+          <a:bodyPr xmlns:a="http://schemas.openxmlformats.org/drawingml/2006/main"/>
+          <a:lstStyle xmlns:a="http://schemas.openxmlformats.org/drawingml/2006/main"/>
+          <a:p xmlns:a="http://schemas.openxmlformats.org/drawingml/2006/main"/>
+        </p:txBody>
+      </p:sp>
+      <p:sp>
+        <p:nvSpPr>
+          <p:cNvPr id="4" name="Slide Number Placeholder 3"/>
+          <p:cNvSpPr>
+            <a:spLocks xmlns:a="http://schemas.openxmlformats.org/drawingml/2006/main" noGrp="1"/>
+          </p:cNvSpPr>
+          <p:nvPr>
+            <p:ph type="sldNum" idx="5"/>
+          </p:nvPr>
+        </p:nvSpPr>
+        <p:spPr/>
+        <p:txBody>
+          <a:bodyPr xmlns:a="http://schemas.openxmlformats.org/drawingml/2006/main"/>
+          <a:lstStyle xmlns:a="http://schemas.openxmlformats.org/drawingml/2006/main"/>
+          <a:p xmlns:a="http://schemas.openxmlformats.org/drawingml/2006/main"/>
+        </p:txBody>
+      </p:sp>
+    </p:spTree>
+  </p:cSld>
+  <p:clrMapOvr>
+    <a:masterClrMapping xmlns:a="http://schemas.openxmlformats.org/drawingml/2006/main"/>
+  </p:clrMapOvr>
+</p:notes>
+</file>
+
+<file path=ppt/notesSlides/notesSlide3.xml><?xml version="1.0" encoding="utf-8"?>
+<p:notes xmlns:p="http://schemas.openxmlformats.org/presentationml/2006/main">
+  <p:cSld>
+    <p:spTree>
+      <p:nvGrpSpPr>
+        <p:cNvPr id="1" name=""/>
+        <p:cNvGrpSpPr/>
+        <p:nvPr/>
+      </p:nvGrpSpPr>
+      <p:grpSpPr>
+        <a:xfrm xmlns:a="http://schemas.openxmlformats.org/drawingml/2006/main"/>
+      </p:grpSpPr>
+      <p:sp>
+        <p:nvSpPr>
+          <p:cNvPr id="2" name="Slide Image Placeholder 1"/>
+          <p:cNvSpPr>
+            <a:spLocks xmlns:a="http://schemas.openxmlformats.org/drawingml/2006/main" noGrp="1"/>
+          </p:cNvSpPr>
+          <p:nvPr>
+            <p:ph type="sldImg" idx="0"/>
+          </p:nvPr>
+        </p:nvSpPr>
+        <p:spPr/>
+      </p:sp>
+      <p:sp>
+        <p:nvSpPr>
+          <p:cNvPr id="3" name="Notes Placeholder 2"/>
+          <p:cNvSpPr>
+            <a:spLocks xmlns:a="http://schemas.openxmlformats.org/drawingml/2006/main" noGrp="1"/>
+          </p:cNvSpPr>
+          <p:nvPr>
+            <p:ph type="body" idx="1"/>
+          </p:nvPr>
+        </p:nvSpPr>
+        <p:spPr/>
+        <p:txBody>
+          <a:bodyPr xmlns:a="http://schemas.openxmlformats.org/drawingml/2006/main"/>
+          <a:lstStyle xmlns:a="http://schemas.openxmlformats.org/drawingml/2006/main"/>
+          <a:p xmlns:a="http://schemas.openxmlformats.org/drawingml/2006/main"/>
+        </p:txBody>
+      </p:sp>
+      <p:sp>
+        <p:nvSpPr>
+          <p:cNvPr id="4" name="Slide Number Placeholder 3"/>
+          <p:cNvSpPr>
+            <a:spLocks xmlns:a="http://schemas.openxmlformats.org/drawingml/2006/main" noGrp="1"/>
+          </p:cNvSpPr>
+          <p:nvPr>
+            <p:ph type="sldNum" idx="5"/>
+          </p:nvPr>
+        </p:nvSpPr>
+        <p:spPr/>
+        <p:txBody>
+          <a:bodyPr xmlns:a="http://schemas.openxmlformats.org/drawingml/2006/main"/>
+          <a:lstStyle xmlns:a="http://schemas.openxmlformats.org/drawingml/2006/main"/>
+          <a:p xmlns:a="http://schemas.openxmlformats.org/drawingml/2006/main"/>
+        </p:txBody>
+      </p:sp>
+    </p:spTree>
+  </p:cSld>
+  <p:clrMapOvr>
+    <a:masterClrMapping xmlns:a="http://schemas.openxmlformats.org/drawingml/2006/main"/>
+  </p:clrMapOvr>
+</p:notes>
+</file>
+
+<file path=ppt/notesSlides/notesSlide4.xml><?xml version="1.0" encoding="utf-8"?>
+<p:notes xmlns:p="http://schemas.openxmlformats.org/presentationml/2006/main">
+  <p:cSld>
+    <p:spTree>
+      <p:nvGrpSpPr>
+        <p:cNvPr id="1" name=""/>
+        <p:cNvGrpSpPr/>
+        <p:nvPr/>
+      </p:nvGrpSpPr>
+      <p:grpSpPr>
+        <a:xfrm xmlns:a="http://schemas.openxmlformats.org/drawingml/2006/main"/>
+      </p:grpSpPr>
+      <p:sp>
+        <p:nvSpPr>
+          <p:cNvPr id="2" name="Slide Image Placeholder 1"/>
+          <p:cNvSpPr>
+            <a:spLocks xmlns:a="http://schemas.openxmlformats.org/drawingml/2006/main" noGrp="1"/>
+          </p:cNvSpPr>
+          <p:nvPr>
+            <p:ph type="sldImg" idx="0"/>
+          </p:nvPr>
+        </p:nvSpPr>
+        <p:spPr/>
+      </p:sp>
+      <p:sp>
+        <p:nvSpPr>
+          <p:cNvPr id="3" name="Notes Placeholder 2"/>
+          <p:cNvSpPr>
+            <a:spLocks xmlns:a="http://schemas.openxmlformats.org/drawingml/2006/main" noGrp="1"/>
+          </p:cNvSpPr>
+          <p:nvPr>
+            <p:ph type="body" idx="1"/>
+          </p:nvPr>
+        </p:nvSpPr>
+        <p:spPr/>
+        <p:txBody>
+          <a:bodyPr xmlns:a="http://schemas.openxmlformats.org/drawingml/2006/main"/>
+          <a:lstStyle xmlns:a="http://schemas.openxmlformats.org/drawingml/2006/main"/>
+          <a:p xmlns:a="http://schemas.openxmlformats.org/drawingml/2006/main"/>
+        </p:txBody>
+      </p:sp>
+      <p:sp>
+        <p:nvSpPr>
+          <p:cNvPr id="4" name="Slide Number Placeholder 3"/>
+          <p:cNvSpPr>
+            <a:spLocks xmlns:a="http://schemas.openxmlformats.org/drawingml/2006/main" noGrp="1"/>
+          </p:cNvSpPr>
+          <p:nvPr>
+            <p:ph type="sldNum" idx="5"/>
+          </p:nvPr>
+        </p:nvSpPr>
+        <p:spPr/>
+        <p:txBody>
+          <a:bodyPr xmlns:a="http://schemas.openxmlformats.org/drawingml/2006/main"/>
+          <a:lstStyle xmlns:a="http://schemas.openxmlformats.org/drawingml/2006/main"/>
+          <a:p xmlns:a="http://schemas.openxmlformats.org/drawingml/2006/main"/>
+        </p:txBody>
+      </p:sp>
+    </p:spTree>
+  </p:cSld>
+  <p:clrMapOvr>
+    <a:masterClrMapping xmlns:a="http://schemas.openxmlformats.org/drawingml/2006/main"/>
+  </p:clrMapOvr>
+</p:notes>
+</file>
+
+<file path=ppt/notesSlides/notesSlide5.xml><?xml version="1.0" encoding="utf-8"?>
+<p:notes xmlns:p="http://schemas.openxmlformats.org/presentationml/2006/main">
+  <p:cSld>
+    <p:spTree>
+      <p:nvGrpSpPr>
+        <p:cNvPr id="1" name=""/>
+        <p:cNvGrpSpPr/>
+        <p:nvPr/>
+      </p:nvGrpSpPr>
+      <p:grpSpPr>
+        <a:xfrm xmlns:a="http://schemas.openxmlformats.org/drawingml/2006/main"/>
+      </p:grpSpPr>
+      <p:sp>
+        <p:nvSpPr>
+          <p:cNvPr id="2" name="Slide Image Placeholder 1"/>
+          <p:cNvSpPr>
+            <a:spLocks xmlns:a="http://schemas.openxmlformats.org/drawingml/2006/main" noGrp="1"/>
+          </p:cNvSpPr>
+          <p:nvPr>
+            <p:ph type="sldImg" idx="0"/>
+          </p:nvPr>
+        </p:nvSpPr>
+        <p:spPr/>
+      </p:sp>
+      <p:sp>
+        <p:nvSpPr>
+          <p:cNvPr id="3" name="Notes Placeholder 2"/>
+          <p:cNvSpPr>
+            <a:spLocks xmlns:a="http://schemas.openxmlformats.org/drawingml/2006/main" noGrp="1"/>
+          </p:cNvSpPr>
+          <p:nvPr>
+            <p:ph type="body" idx="1"/>
+          </p:nvPr>
+        </p:nvSpPr>
+        <p:spPr/>
+        <p:txBody>
+          <a:bodyPr xmlns:a="http://schemas.openxmlformats.org/drawingml/2006/main"/>
+          <a:lstStyle xmlns:a="http://schemas.openxmlformats.org/drawingml/2006/main"/>
+          <a:p xmlns:a="http://schemas.openxmlformats.org/drawingml/2006/main"/>
+        </p:txBody>
+      </p:sp>
+      <p:sp>
+        <p:nvSpPr>
+          <p:cNvPr id="4" name="Slide Number Placeholder 3"/>
+          <p:cNvSpPr>
+            <a:spLocks xmlns:a="http://schemas.openxmlformats.org/drawingml/2006/main" noGrp="1"/>
+          </p:cNvSpPr>
+          <p:nvPr>
+            <p:ph type="sldNum" idx="5"/>
+          </p:nvPr>
+        </p:nvSpPr>
+        <p:spPr/>
+        <p:txBody>
+          <a:bodyPr xmlns:a="http://schemas.openxmlformats.org/drawingml/2006/main"/>
+          <a:lstStyle xmlns:a="http://schemas.openxmlformats.org/drawingml/2006/main"/>
+          <a:p xmlns:a="http://schemas.openxmlformats.org/drawingml/2006/main"/>
+        </p:txBody>
+      </p:sp>
+    </p:spTree>
+  </p:cSld>
+  <p:clrMapOvr>
+    <a:masterClrMapping xmlns:a="http://schemas.openxmlformats.org/drawingml/2006/main"/>
+  </p:clrMapOvr>
+</p:notes>
+</file>
+
 <file path=ppt/slideLayouts/slideLayout1.xml><?xml version="1.0" encoding="utf-8"?>
 <p:sldLayout xmlns:p="http://schemas.openxmlformats.org/presentationml/2006/main" type="title">
   <p:cSld name="Title Slide">
@@ -506,7 +774,7 @@
   </p:cSld>
   <p:clrMap bg1="lt1" tx1="dk1" bg2="lt2" tx2="dk2" accent1="accent1" accent2="accent2" accent3="accent3" accent4="accent4" accent5="accent5" accent6="accent6" hlink="hlink" folHlink="folHlink"/>
   <p:sldLayoutIdLst>
-    <p:sldLayoutId xmlns:r="http://schemas.openxmlformats.org/officeDocument/2006/relationships" id="2147483649" r:id="R89547421fa124b5b"/>
+    <p:sldLayoutId xmlns:r="http://schemas.openxmlformats.org/officeDocument/2006/relationships" id="2147483649" r:id="R3bd08b1e9d124c37"/>
   </p:sldLayoutIdLst>
   <p:txStyles>
     <p:titleStyle>
@@ -1054,10 +1322,10 @@
       </p:grpSpPr>
       <p:sp>
         <p:nvSpPr>
-          <p:cNvPr id="23" name="">
-            <a:extLst xmlns:a="http://schemas.openxmlformats.org/drawingml/2006/main">
-              <a:ext uri="{FF2B5EF4-FFF2-40B4-BE49-F238E27FC236}">
-                <a16:creationId xmlns:a16="http://schemas.microsoft.com/office/drawing/2014/main" id="{CB3495CB-F867-40CA-BA70-7BBC443EB4F9}"/>
+          <p:cNvPr id="18" name="">
+            <a:extLst xmlns:a="http://schemas.openxmlformats.org/drawingml/2006/main">
+              <a:ext uri="{FF2B5EF4-FFF2-40B4-BE49-F238E27FC236}">
+                <a16:creationId xmlns:a16="http://schemas.microsoft.com/office/drawing/2014/main" id="{1CA174D5-3073-4476-83C3-E3697AE2B81D}"/>
               </a:ext>
             </a:extLst>
           </p:cNvPr>
@@ -1115,7 +1383,7 @@
           <p:cNvPr id="2" name="">
             <a:extLst xmlns:a="http://schemas.openxmlformats.org/drawingml/2006/main">
               <a:ext uri="{FF2B5EF4-FFF2-40B4-BE49-F238E27FC236}">
-                <a16:creationId xmlns:a16="http://schemas.microsoft.com/office/drawing/2014/main" id="{9E9BC88D-2188-4D20-92D4-B7FF3BF730EB}"/>
+                <a16:creationId xmlns:a16="http://schemas.microsoft.com/office/drawing/2014/main" id="{F99D4E96-BF79-4B9D-A87A-57C30218569F}"/>
               </a:ext>
             </a:extLst>
           </p:cNvPr>
@@ -1173,7 +1441,7 @@
           <p:cNvPr id="3" name="PPAGENT_QA|parent=parallel-card-0|domains=parallel-card,parallel-content">
             <a:extLst xmlns:a="http://schemas.openxmlformats.org/drawingml/2006/main">
               <a:ext uri="{FF2B5EF4-FFF2-40B4-BE49-F238E27FC236}">
-                <a16:creationId xmlns:a16="http://schemas.microsoft.com/office/drawing/2014/main" id="{6D335748-C80A-49B5-80F5-8278E6CC8F27}"/>
+                <a16:creationId xmlns:a16="http://schemas.microsoft.com/office/drawing/2014/main" id="{A1BD9C37-827D-4A89-A975-0225C0672B1B}"/>
               </a:ext>
             </a:extLst>
           </p:cNvPr>
@@ -1185,11 +1453,11 @@
         <p:spPr>
           <a:xfrm xmlns:a="http://schemas.openxmlformats.org/drawingml/2006/main">
             <a:off x="742950" y="1809750"/>
-            <a:ext cx="2533650" cy="3714750"/>
+            <a:ext cx="3441700" cy="3714750"/>
           </a:xfrm>
           <a:prstGeom xmlns:a="http://schemas.openxmlformats.org/drawingml/2006/main" prst="roundRect">
             <a:avLst>
-              <a:gd name="adj" fmla="val 4511"/>
+              <a:gd name="adj" fmla="val 3321"/>
             </a:avLst>
           </a:prstGeom>
           <a:solidFill xmlns:a="http://schemas.openxmlformats.org/drawingml/2006/main">
@@ -1214,7 +1482,7 @@
           <p:cNvPr id="4" name="PPAGENT_QA|within=parallel-card-0|role=accent-rail">
             <a:extLst xmlns:a="http://schemas.openxmlformats.org/drawingml/2006/main">
               <a:ext uri="{FF2B5EF4-FFF2-40B4-BE49-F238E27FC236}">
-                <a16:creationId xmlns:a16="http://schemas.microsoft.com/office/drawing/2014/main" id="{13889A51-BFE8-4F7D-A289-2F133135577F}"/>
+                <a16:creationId xmlns:a16="http://schemas.microsoft.com/office/drawing/2014/main" id="{816F3168-1F41-4046-A40F-3ADB3D62E154}"/>
               </a:ext>
             </a:extLst>
           </p:cNvPr>
@@ -1226,7 +1494,7 @@
         <p:spPr>
           <a:xfrm xmlns:a="http://schemas.openxmlformats.org/drawingml/2006/main">
             <a:off x="742950" y="1809750"/>
-            <a:ext cx="2533650" cy="76200"/>
+            <a:ext cx="3441700" cy="76200"/>
           </a:xfrm>
           <a:prstGeom xmlns:a="http://schemas.openxmlformats.org/drawingml/2006/main" prst="rect">
             <a:avLst/>
@@ -1245,7 +1513,7 @@
           <p:cNvPr id="5" name="PPAGENT_QA|within=parallel-card-0|role=index">
             <a:extLst xmlns:a="http://schemas.openxmlformats.org/drawingml/2006/main">
               <a:ext uri="{FF2B5EF4-FFF2-40B4-BE49-F238E27FC236}">
-                <a16:creationId xmlns:a16="http://schemas.microsoft.com/office/drawing/2014/main" id="{FBA9DC3B-6438-459C-9A11-257A17B42EA7}"/>
+                <a16:creationId xmlns:a16="http://schemas.microsoft.com/office/drawing/2014/main" id="{1A7FDF84-BA04-4A12-9590-EBADEEAA208B}"/>
               </a:ext>
             </a:extLst>
           </p:cNvPr>
@@ -1307,7 +1575,7 @@
           <p:cNvPr id="6" name="PPAGENT_QA|within=parallel-card-0|role=title">
             <a:extLst xmlns:a="http://schemas.openxmlformats.org/drawingml/2006/main">
               <a:ext uri="{FF2B5EF4-FFF2-40B4-BE49-F238E27FC236}">
-                <a16:creationId xmlns:a16="http://schemas.microsoft.com/office/drawing/2014/main" id="{F568D579-0A7E-48B1-8AA1-9427DE2F470C}"/>
+                <a16:creationId xmlns:a16="http://schemas.microsoft.com/office/drawing/2014/main" id="{5AEC67D7-5A84-4BFC-AB58-14E49BF19C61}"/>
               </a:ext>
             </a:extLst>
           </p:cNvPr>
@@ -1319,7 +1587,7 @@
         <p:spPr>
           <a:xfrm xmlns:a="http://schemas.openxmlformats.org/drawingml/2006/main">
             <a:off x="933450" y="2952750"/>
-            <a:ext cx="2152650" cy="523875"/>
+            <a:ext cx="3060700" cy="523875"/>
           </a:xfrm>
           <a:prstGeom xmlns:a="http://schemas.openxmlformats.org/drawingml/2006/main" prst="rect">
             <a:avLst/>
@@ -1365,7 +1633,7 @@
           <p:cNvPr id="7" name="PPAGENT_QA|within=parallel-card-0|role=body">
             <a:extLst xmlns:a="http://schemas.openxmlformats.org/drawingml/2006/main">
               <a:ext uri="{FF2B5EF4-FFF2-40B4-BE49-F238E27FC236}">
-                <a16:creationId xmlns:a16="http://schemas.microsoft.com/office/drawing/2014/main" id="{E8A35F1E-8D77-482A-9245-907CF4C93D27}"/>
+                <a16:creationId xmlns:a16="http://schemas.microsoft.com/office/drawing/2014/main" id="{B7664D0E-AEBC-40E7-B412-CB2D45715305}"/>
               </a:ext>
             </a:extLst>
           </p:cNvPr>
@@ -1377,7 +1645,7 @@
         <p:spPr>
           <a:xfrm xmlns:a="http://schemas.openxmlformats.org/drawingml/2006/main">
             <a:off x="952500" y="3638550"/>
-            <a:ext cx="2114550" cy="952500"/>
+            <a:ext cx="3022600" cy="952500"/>
           </a:xfrm>
           <a:prstGeom xmlns:a="http://schemas.openxmlformats.org/drawingml/2006/main" prst="rect">
             <a:avLst/>
@@ -1423,23 +1691,23 @@
           <p:cNvPr id="8" name="PPAGENT_QA|parent=parallel-card-1|domains=parallel-card,parallel-content">
             <a:extLst xmlns:a="http://schemas.openxmlformats.org/drawingml/2006/main">
               <a:ext uri="{FF2B5EF4-FFF2-40B4-BE49-F238E27FC236}">
-                <a16:creationId xmlns:a16="http://schemas.microsoft.com/office/drawing/2014/main" id="{1E4B49A0-80B6-4FF2-AAAB-C4B53172A818}"/>
-              </a:ext>
-            </a:extLst>
-          </p:cNvPr>
-          <p:cNvSpPr>
-            <a:spLocks xmlns:a="http://schemas.openxmlformats.org/drawingml/2006/main" noGrp="1"/>
-          </p:cNvSpPr>
-          <p:nvPr/>
-        </p:nvSpPr>
-        <p:spPr>
-          <a:xfrm xmlns:a="http://schemas.openxmlformats.org/drawingml/2006/main">
-            <a:off x="3467100" y="1809750"/>
-            <a:ext cx="2533650" cy="3714750"/>
+                <a16:creationId xmlns:a16="http://schemas.microsoft.com/office/drawing/2014/main" id="{1CA73E0F-4420-4885-939B-0D25AC7EBF84}"/>
+              </a:ext>
+            </a:extLst>
+          </p:cNvPr>
+          <p:cNvSpPr>
+            <a:spLocks xmlns:a="http://schemas.openxmlformats.org/drawingml/2006/main" noGrp="1"/>
+          </p:cNvSpPr>
+          <p:nvPr/>
+        </p:nvSpPr>
+        <p:spPr>
+          <a:xfrm xmlns:a="http://schemas.openxmlformats.org/drawingml/2006/main">
+            <a:off x="4375150" y="1809750"/>
+            <a:ext cx="3441700" cy="3714750"/>
           </a:xfrm>
           <a:prstGeom xmlns:a="http://schemas.openxmlformats.org/drawingml/2006/main" prst="roundRect">
             <a:avLst>
-              <a:gd name="adj" fmla="val 4511"/>
+              <a:gd name="adj" fmla="val 3321"/>
             </a:avLst>
           </a:prstGeom>
           <a:solidFill xmlns:a="http://schemas.openxmlformats.org/drawingml/2006/main">
@@ -1464,19 +1732,19 @@
           <p:cNvPr id="9" name="PPAGENT_QA|within=parallel-card-1|role=accent-rail">
             <a:extLst xmlns:a="http://schemas.openxmlformats.org/drawingml/2006/main">
               <a:ext uri="{FF2B5EF4-FFF2-40B4-BE49-F238E27FC236}">
-                <a16:creationId xmlns:a16="http://schemas.microsoft.com/office/drawing/2014/main" id="{57D040C3-B463-43C1-A1DC-D2FDBC492D0D}"/>
-              </a:ext>
-            </a:extLst>
-          </p:cNvPr>
-          <p:cNvSpPr>
-            <a:spLocks xmlns:a="http://schemas.openxmlformats.org/drawingml/2006/main" noGrp="1"/>
-          </p:cNvSpPr>
-          <p:nvPr/>
-        </p:nvSpPr>
-        <p:spPr>
-          <a:xfrm xmlns:a="http://schemas.openxmlformats.org/drawingml/2006/main">
-            <a:off x="3467100" y="1809750"/>
-            <a:ext cx="2533650" cy="76200"/>
+                <a16:creationId xmlns:a16="http://schemas.microsoft.com/office/drawing/2014/main" id="{E0D3D3AA-10BF-4417-BE8C-C96331A45E9A}"/>
+              </a:ext>
+            </a:extLst>
+          </p:cNvPr>
+          <p:cNvSpPr>
+            <a:spLocks xmlns:a="http://schemas.openxmlformats.org/drawingml/2006/main" noGrp="1"/>
+          </p:cNvSpPr>
+          <p:nvPr/>
+        </p:nvSpPr>
+        <p:spPr>
+          <a:xfrm xmlns:a="http://schemas.openxmlformats.org/drawingml/2006/main">
+            <a:off x="4375150" y="1809750"/>
+            <a:ext cx="3441700" cy="76200"/>
           </a:xfrm>
           <a:prstGeom xmlns:a="http://schemas.openxmlformats.org/drawingml/2006/main" prst="rect">
             <a:avLst/>
@@ -1495,18 +1763,18 @@
           <p:cNvPr id="10" name="PPAGENT_QA|within=parallel-card-1|role=index">
             <a:extLst xmlns:a="http://schemas.openxmlformats.org/drawingml/2006/main">
               <a:ext uri="{FF2B5EF4-FFF2-40B4-BE49-F238E27FC236}">
-                <a16:creationId xmlns:a16="http://schemas.microsoft.com/office/drawing/2014/main" id="{B6825B11-BA89-40E3-A843-BC5E0D33DCC6}"/>
-              </a:ext>
-            </a:extLst>
-          </p:cNvPr>
-          <p:cNvSpPr>
-            <a:spLocks xmlns:a="http://schemas.openxmlformats.org/drawingml/2006/main" noGrp="1"/>
-          </p:cNvSpPr>
-          <p:nvPr/>
-        </p:nvSpPr>
-        <p:spPr>
-          <a:xfrm xmlns:a="http://schemas.openxmlformats.org/drawingml/2006/main">
-            <a:off x="3657600" y="2114550"/>
+                <a16:creationId xmlns:a16="http://schemas.microsoft.com/office/drawing/2014/main" id="{83585B4A-67A7-40FF-9F19-292304FA53FC}"/>
+              </a:ext>
+            </a:extLst>
+          </p:cNvPr>
+          <p:cNvSpPr>
+            <a:spLocks xmlns:a="http://schemas.openxmlformats.org/drawingml/2006/main" noGrp="1"/>
+          </p:cNvSpPr>
+          <p:nvPr/>
+        </p:nvSpPr>
+        <p:spPr>
+          <a:xfrm xmlns:a="http://schemas.openxmlformats.org/drawingml/2006/main">
+            <a:off x="4565650" y="2114550"/>
             <a:ext cx="514350" cy="514350"/>
           </a:xfrm>
           <a:prstGeom xmlns:a="http://schemas.openxmlformats.org/drawingml/2006/main" prst="ellipse">
@@ -1557,19 +1825,19 @@
           <p:cNvPr id="11" name="PPAGENT_QA|within=parallel-card-1|role=title">
             <a:extLst xmlns:a="http://schemas.openxmlformats.org/drawingml/2006/main">
               <a:ext uri="{FF2B5EF4-FFF2-40B4-BE49-F238E27FC236}">
-                <a16:creationId xmlns:a16="http://schemas.microsoft.com/office/drawing/2014/main" id="{E0383467-A2A2-477F-8344-AA3F25B7554D}"/>
-              </a:ext>
-            </a:extLst>
-          </p:cNvPr>
-          <p:cNvSpPr>
-            <a:spLocks xmlns:a="http://schemas.openxmlformats.org/drawingml/2006/main" noGrp="1"/>
-          </p:cNvSpPr>
-          <p:nvPr/>
-        </p:nvSpPr>
-        <p:spPr>
-          <a:xfrm xmlns:a="http://schemas.openxmlformats.org/drawingml/2006/main">
-            <a:off x="3657600" y="2952750"/>
-            <a:ext cx="2152650" cy="523875"/>
+                <a16:creationId xmlns:a16="http://schemas.microsoft.com/office/drawing/2014/main" id="{9147FDB9-FDF4-4D12-920D-CE5529BA7634}"/>
+              </a:ext>
+            </a:extLst>
+          </p:cNvPr>
+          <p:cNvSpPr>
+            <a:spLocks xmlns:a="http://schemas.openxmlformats.org/drawingml/2006/main" noGrp="1"/>
+          </p:cNvSpPr>
+          <p:nvPr/>
+        </p:nvSpPr>
+        <p:spPr>
+          <a:xfrm xmlns:a="http://schemas.openxmlformats.org/drawingml/2006/main">
+            <a:off x="4565650" y="2952750"/>
+            <a:ext cx="3060700" cy="523875"/>
           </a:xfrm>
           <a:prstGeom xmlns:a="http://schemas.openxmlformats.org/drawingml/2006/main" prst="rect">
             <a:avLst/>
@@ -1615,19 +1883,19 @@
           <p:cNvPr id="12" name="PPAGENT_QA|within=parallel-card-1|role=body">
             <a:extLst xmlns:a="http://schemas.openxmlformats.org/drawingml/2006/main">
               <a:ext uri="{FF2B5EF4-FFF2-40B4-BE49-F238E27FC236}">
-                <a16:creationId xmlns:a16="http://schemas.microsoft.com/office/drawing/2014/main" id="{84D846FC-1049-42BE-B947-E6D9FBE64687}"/>
-              </a:ext>
-            </a:extLst>
-          </p:cNvPr>
-          <p:cNvSpPr>
-            <a:spLocks xmlns:a="http://schemas.openxmlformats.org/drawingml/2006/main" noGrp="1"/>
-          </p:cNvSpPr>
-          <p:nvPr/>
-        </p:nvSpPr>
-        <p:spPr>
-          <a:xfrm xmlns:a="http://schemas.openxmlformats.org/drawingml/2006/main">
-            <a:off x="3676650" y="3638550"/>
-            <a:ext cx="2114550" cy="952500"/>
+                <a16:creationId xmlns:a16="http://schemas.microsoft.com/office/drawing/2014/main" id="{9F592BC5-57CB-49E7-9E09-90E55B6839B0}"/>
+              </a:ext>
+            </a:extLst>
+          </p:cNvPr>
+          <p:cNvSpPr>
+            <a:spLocks xmlns:a="http://schemas.openxmlformats.org/drawingml/2006/main" noGrp="1"/>
+          </p:cNvSpPr>
+          <p:nvPr/>
+        </p:nvSpPr>
+        <p:spPr>
+          <a:xfrm xmlns:a="http://schemas.openxmlformats.org/drawingml/2006/main">
+            <a:off x="4584700" y="3638550"/>
+            <a:ext cx="3022600" cy="952500"/>
           </a:xfrm>
           <a:prstGeom xmlns:a="http://schemas.openxmlformats.org/drawingml/2006/main" prst="rect">
             <a:avLst/>
@@ -1673,23 +1941,23 @@
           <p:cNvPr id="13" name="PPAGENT_QA|parent=parallel-card-2|domains=parallel-card,parallel-content">
             <a:extLst xmlns:a="http://schemas.openxmlformats.org/drawingml/2006/main">
               <a:ext uri="{FF2B5EF4-FFF2-40B4-BE49-F238E27FC236}">
-                <a16:creationId xmlns:a16="http://schemas.microsoft.com/office/drawing/2014/main" id="{C5623156-6BF8-4D1D-9679-5A4791FB0483}"/>
-              </a:ext>
-            </a:extLst>
-          </p:cNvPr>
-          <p:cNvSpPr>
-            <a:spLocks xmlns:a="http://schemas.openxmlformats.org/drawingml/2006/main" noGrp="1"/>
-          </p:cNvSpPr>
-          <p:nvPr/>
-        </p:nvSpPr>
-        <p:spPr>
-          <a:xfrm xmlns:a="http://schemas.openxmlformats.org/drawingml/2006/main">
-            <a:off x="6191250" y="1809750"/>
-            <a:ext cx="2533650" cy="3714750"/>
+                <a16:creationId xmlns:a16="http://schemas.microsoft.com/office/drawing/2014/main" id="{E5145B38-9360-44EC-A9CC-F8E423FDDB75}"/>
+              </a:ext>
+            </a:extLst>
+          </p:cNvPr>
+          <p:cNvSpPr>
+            <a:spLocks xmlns:a="http://schemas.openxmlformats.org/drawingml/2006/main" noGrp="1"/>
+          </p:cNvSpPr>
+          <p:nvPr/>
+        </p:nvSpPr>
+        <p:spPr>
+          <a:xfrm xmlns:a="http://schemas.openxmlformats.org/drawingml/2006/main">
+            <a:off x="8007350" y="1809750"/>
+            <a:ext cx="3441700" cy="3714750"/>
           </a:xfrm>
           <a:prstGeom xmlns:a="http://schemas.openxmlformats.org/drawingml/2006/main" prst="roundRect">
             <a:avLst>
-              <a:gd name="adj" fmla="val 4511"/>
+              <a:gd name="adj" fmla="val 3321"/>
             </a:avLst>
           </a:prstGeom>
           <a:solidFill xmlns:a="http://schemas.openxmlformats.org/drawingml/2006/main">
@@ -1714,19 +1982,19 @@
           <p:cNvPr id="14" name="PPAGENT_QA|within=parallel-card-2|role=accent-rail">
             <a:extLst xmlns:a="http://schemas.openxmlformats.org/drawingml/2006/main">
               <a:ext uri="{FF2B5EF4-FFF2-40B4-BE49-F238E27FC236}">
-                <a16:creationId xmlns:a16="http://schemas.microsoft.com/office/drawing/2014/main" id="{70509181-EB1F-4EB4-B97F-0CFCD7E2FFD5}"/>
-              </a:ext>
-            </a:extLst>
-          </p:cNvPr>
-          <p:cNvSpPr>
-            <a:spLocks xmlns:a="http://schemas.openxmlformats.org/drawingml/2006/main" noGrp="1"/>
-          </p:cNvSpPr>
-          <p:nvPr/>
-        </p:nvSpPr>
-        <p:spPr>
-          <a:xfrm xmlns:a="http://schemas.openxmlformats.org/drawingml/2006/main">
-            <a:off x="6191250" y="1809750"/>
-            <a:ext cx="2533650" cy="76200"/>
+                <a16:creationId xmlns:a16="http://schemas.microsoft.com/office/drawing/2014/main" id="{3B3306AC-9DEB-4B2F-A5BF-B0570772B808}"/>
+              </a:ext>
+            </a:extLst>
+          </p:cNvPr>
+          <p:cNvSpPr>
+            <a:spLocks xmlns:a="http://schemas.openxmlformats.org/drawingml/2006/main" noGrp="1"/>
+          </p:cNvSpPr>
+          <p:nvPr/>
+        </p:nvSpPr>
+        <p:spPr>
+          <a:xfrm xmlns:a="http://schemas.openxmlformats.org/drawingml/2006/main">
+            <a:off x="8007350" y="1809750"/>
+            <a:ext cx="3441700" cy="76200"/>
           </a:xfrm>
           <a:prstGeom xmlns:a="http://schemas.openxmlformats.org/drawingml/2006/main" prst="rect">
             <a:avLst/>
@@ -1745,18 +2013,18 @@
           <p:cNvPr id="15" name="PPAGENT_QA|within=parallel-card-2|role=index">
             <a:extLst xmlns:a="http://schemas.openxmlformats.org/drawingml/2006/main">
               <a:ext uri="{FF2B5EF4-FFF2-40B4-BE49-F238E27FC236}">
-                <a16:creationId xmlns:a16="http://schemas.microsoft.com/office/drawing/2014/main" id="{348D03ED-90BF-41E2-A3FF-DA6D8F3EE6B5}"/>
-              </a:ext>
-            </a:extLst>
-          </p:cNvPr>
-          <p:cNvSpPr>
-            <a:spLocks xmlns:a="http://schemas.openxmlformats.org/drawingml/2006/main" noGrp="1"/>
-          </p:cNvSpPr>
-          <p:nvPr/>
-        </p:nvSpPr>
-        <p:spPr>
-          <a:xfrm xmlns:a="http://schemas.openxmlformats.org/drawingml/2006/main">
-            <a:off x="6381750" y="2114550"/>
+                <a16:creationId xmlns:a16="http://schemas.microsoft.com/office/drawing/2014/main" id="{E6726662-3445-4401-889B-427BB940DF42}"/>
+              </a:ext>
+            </a:extLst>
+          </p:cNvPr>
+          <p:cNvSpPr>
+            <a:spLocks xmlns:a="http://schemas.openxmlformats.org/drawingml/2006/main" noGrp="1"/>
+          </p:cNvSpPr>
+          <p:nvPr/>
+        </p:nvSpPr>
+        <p:spPr>
+          <a:xfrm xmlns:a="http://schemas.openxmlformats.org/drawingml/2006/main">
+            <a:off x="8197850" y="2114550"/>
             <a:ext cx="514350" cy="514350"/>
           </a:xfrm>
           <a:prstGeom xmlns:a="http://schemas.openxmlformats.org/drawingml/2006/main" prst="ellipse">
@@ -1807,19 +2075,19 @@
           <p:cNvPr id="16" name="PPAGENT_QA|within=parallel-card-2|role=title">
             <a:extLst xmlns:a="http://schemas.openxmlformats.org/drawingml/2006/main">
               <a:ext uri="{FF2B5EF4-FFF2-40B4-BE49-F238E27FC236}">
-                <a16:creationId xmlns:a16="http://schemas.microsoft.com/office/drawing/2014/main" id="{D3842683-2A0B-4550-AF53-6D759C6A2130}"/>
-              </a:ext>
-            </a:extLst>
-          </p:cNvPr>
-          <p:cNvSpPr>
-            <a:spLocks xmlns:a="http://schemas.openxmlformats.org/drawingml/2006/main" noGrp="1"/>
-          </p:cNvSpPr>
-          <p:nvPr/>
-        </p:nvSpPr>
-        <p:spPr>
-          <a:xfrm xmlns:a="http://schemas.openxmlformats.org/drawingml/2006/main">
-            <a:off x="6381750" y="2952750"/>
-            <a:ext cx="2152650" cy="523875"/>
+                <a16:creationId xmlns:a16="http://schemas.microsoft.com/office/drawing/2014/main" id="{3757D2EA-D531-4565-A8DA-E2F8F17549A1}"/>
+              </a:ext>
+            </a:extLst>
+          </p:cNvPr>
+          <p:cNvSpPr>
+            <a:spLocks xmlns:a="http://schemas.openxmlformats.org/drawingml/2006/main" noGrp="1"/>
+          </p:cNvSpPr>
+          <p:nvPr/>
+        </p:nvSpPr>
+        <p:spPr>
+          <a:xfrm xmlns:a="http://schemas.openxmlformats.org/drawingml/2006/main">
+            <a:off x="8197850" y="2952750"/>
+            <a:ext cx="3060700" cy="523875"/>
           </a:xfrm>
           <a:prstGeom xmlns:a="http://schemas.openxmlformats.org/drawingml/2006/main" prst="rect">
             <a:avLst/>
@@ -1865,19 +2133,19 @@
           <p:cNvPr id="17" name="PPAGENT_QA|within=parallel-card-2|role=body">
             <a:extLst xmlns:a="http://schemas.openxmlformats.org/drawingml/2006/main">
               <a:ext uri="{FF2B5EF4-FFF2-40B4-BE49-F238E27FC236}">
-                <a16:creationId xmlns:a16="http://schemas.microsoft.com/office/drawing/2014/main" id="{5524CBE5-2966-4D62-81B1-60C9BAAD439B}"/>
-              </a:ext>
-            </a:extLst>
-          </p:cNvPr>
-          <p:cNvSpPr>
-            <a:spLocks xmlns:a="http://schemas.openxmlformats.org/drawingml/2006/main" noGrp="1"/>
-          </p:cNvSpPr>
-          <p:nvPr/>
-        </p:nvSpPr>
-        <p:spPr>
-          <a:xfrm xmlns:a="http://schemas.openxmlformats.org/drawingml/2006/main">
-            <a:off x="6400800" y="3638550"/>
-            <a:ext cx="2114550" cy="952500"/>
+                <a16:creationId xmlns:a16="http://schemas.microsoft.com/office/drawing/2014/main" id="{C0DC5EB3-27CB-430A-8E3C-A14D148B34DA}"/>
+              </a:ext>
+            </a:extLst>
+          </p:cNvPr>
+          <p:cNvSpPr>
+            <a:spLocks xmlns:a="http://schemas.openxmlformats.org/drawingml/2006/main" noGrp="1"/>
+          </p:cNvSpPr>
+          <p:nvPr/>
+        </p:nvSpPr>
+        <p:spPr>
+          <a:xfrm xmlns:a="http://schemas.openxmlformats.org/drawingml/2006/main">
+            <a:off x="8216900" y="3638550"/>
+            <a:ext cx="3022600" cy="952500"/>
           </a:xfrm>
           <a:prstGeom xmlns:a="http://schemas.openxmlformats.org/drawingml/2006/main" prst="rect">
             <a:avLst/>
@@ -1918,23 +2186,168 @@
           </a:p>
         </p:txBody>
       </p:sp>
-      <p:sp>
-        <p:nvSpPr>
-          <p:cNvPr id="18" name="PPAGENT_QA|parent=parallel-card-3|domains=parallel-card,parallel-content">
-            <a:extLst xmlns:a="http://schemas.openxmlformats.org/drawingml/2006/main">
-              <a:ext uri="{FF2B5EF4-FFF2-40B4-BE49-F238E27FC236}">
-                <a16:creationId xmlns:a16="http://schemas.microsoft.com/office/drawing/2014/main" id="{33CBAA75-3FA2-4D3E-AE26-099CBC0C13AD}"/>
-              </a:ext>
-            </a:extLst>
-          </p:cNvPr>
-          <p:cNvSpPr>
-            <a:spLocks xmlns:a="http://schemas.openxmlformats.org/drawingml/2006/main" noGrp="1"/>
-          </p:cNvSpPr>
-          <p:nvPr/>
-        </p:nvSpPr>
-        <p:spPr>
-          <a:xfrm xmlns:a="http://schemas.openxmlformats.org/drawingml/2006/main">
-            <a:off x="8915400" y="1809750"/>
+    </p:spTree>
+    <p:extLst>
+      <p:ext uri="{BB962C8B-B14F-4D97-AF65-F5344CB8AC3E}">
+        <p14:creationId xmlns:p14="http://schemas.microsoft.com/office/powerpoint/2010/main" val="1968522860"/>
+      </p:ext>
+    </p:extLst>
+  </p:cSld>
+</p:sld>
+</file>
+
+<file path=ppt/slides/slide2.xml><?xml version="1.0" encoding="utf-8"?>
+<p:sld xmlns:p="http://schemas.openxmlformats.org/presentationml/2006/main">
+  <p:cSld>
+    <p:bg>
+      <p:bgPr>
+        <a:solidFill xmlns:a="http://schemas.openxmlformats.org/drawingml/2006/main">
+          <a:srgbClr val="F7FAFC"/>
+        </a:solidFill>
+      </p:bgPr>
+    </p:bg>
+    <p:spTree>
+      <p:nvGrpSpPr>
+        <p:cNvPr id="1" name=""/>
+        <p:cNvGrpSpPr/>
+        <p:nvPr/>
+      </p:nvGrpSpPr>
+      <p:grpSpPr>
+        <a:xfrm xmlns:a="http://schemas.openxmlformats.org/drawingml/2006/main"/>
+      </p:grpSpPr>
+      <p:sp>
+        <p:nvSpPr>
+          <p:cNvPr id="23" name="">
+            <a:extLst xmlns:a="http://schemas.openxmlformats.org/drawingml/2006/main">
+              <a:ext uri="{FF2B5EF4-FFF2-40B4-BE49-F238E27FC236}">
+                <a16:creationId xmlns:a16="http://schemas.microsoft.com/office/drawing/2014/main" id="{D8D72160-ED00-4174-BFE1-22CB0BB921C4}"/>
+              </a:ext>
+            </a:extLst>
+          </p:cNvPr>
+          <p:cNvSpPr>
+            <a:spLocks xmlns:a="http://schemas.openxmlformats.org/drawingml/2006/main" noGrp="1"/>
+          </p:cNvSpPr>
+          <p:nvPr/>
+        </p:nvSpPr>
+        <p:spPr>
+          <a:xfrm xmlns:a="http://schemas.openxmlformats.org/drawingml/2006/main">
+            <a:off x="685800" y="400050"/>
+            <a:ext cx="8382000" cy="457200"/>
+          </a:xfrm>
+          <a:prstGeom xmlns:a="http://schemas.openxmlformats.org/drawingml/2006/main" prst="rect">
+            <a:avLst/>
+          </a:prstGeom>
+          <a:noFill xmlns:a="http://schemas.openxmlformats.org/drawingml/2006/main"/>
+          <a:ln xmlns:a="http://schemas.openxmlformats.org/drawingml/2006/main" w="0">
+            <a:noFill/>
+            <a:prstDash val="solid"/>
+          </a:ln>
+        </p:spPr>
+        <p:txBody>
+          <a:bodyPr xmlns:a="http://schemas.openxmlformats.org/drawingml/2006/main" lIns="0" tIns="0" rIns="0" bIns="0" anchor="ctr">
+            <a:normAutofit fontScale="100000"/>
+          </a:bodyPr>
+          <a:lstStyle xmlns:a="http://schemas.openxmlformats.org/drawingml/2006/main"/>
+          <a:p xmlns:a="http://schemas.openxmlformats.org/drawingml/2006/main">
+            <a:pPr algn="l">
+              <a:defRPr sz="2700" b="1">
+                <a:solidFill>
+                  <a:srgbClr val="1677C8"/>
+                </a:solidFill>
+                <a:latin typeface="Microsoft YaHei"/>
+                <a:ea typeface="Microsoft YaHei"/>
+                <a:cs typeface="Microsoft YaHei"/>
+              </a:defRPr>
+            </a:pPr>
+            <a:r>
+              <a:rPr sz="2700" b="1">
+                <a:solidFill>
+                  <a:srgbClr val="1677C8"/>
+                </a:solidFill>
+                <a:latin typeface="Microsoft YaHei"/>
+                <a:ea typeface="Microsoft YaHei"/>
+                <a:cs typeface="Microsoft YaHei"/>
+              </a:rPr>
+              <a:t>同级能力建设</a:t>
+            </a:r>
+          </a:p>
+        </p:txBody>
+      </p:sp>
+      <p:sp>
+        <p:nvSpPr>
+          <p:cNvPr id="2" name="">
+            <a:extLst xmlns:a="http://schemas.openxmlformats.org/drawingml/2006/main">
+              <a:ext uri="{FF2B5EF4-FFF2-40B4-BE49-F238E27FC236}">
+                <a16:creationId xmlns:a16="http://schemas.microsoft.com/office/drawing/2014/main" id="{BAD7E7D8-98C3-4F75-9340-0C906C39545F}"/>
+              </a:ext>
+            </a:extLst>
+          </p:cNvPr>
+          <p:cNvSpPr>
+            <a:spLocks xmlns:a="http://schemas.openxmlformats.org/drawingml/2006/main" noGrp="1"/>
+          </p:cNvSpPr>
+          <p:nvPr/>
+        </p:nvSpPr>
+        <p:spPr>
+          <a:xfrm xmlns:a="http://schemas.openxmlformats.org/drawingml/2006/main">
+            <a:off x="704850" y="876300"/>
+            <a:ext cx="4953000" cy="247650"/>
+          </a:xfrm>
+          <a:prstGeom xmlns:a="http://schemas.openxmlformats.org/drawingml/2006/main" prst="rect">
+            <a:avLst/>
+          </a:prstGeom>
+          <a:noFill xmlns:a="http://schemas.openxmlformats.org/drawingml/2006/main"/>
+          <a:ln xmlns:a="http://schemas.openxmlformats.org/drawingml/2006/main" w="0">
+            <a:noFill/>
+            <a:prstDash val="solid"/>
+          </a:ln>
+        </p:spPr>
+        <p:txBody>
+          <a:bodyPr xmlns:a="http://schemas.openxmlformats.org/drawingml/2006/main" lIns="0" tIns="0" rIns="0" bIns="0" anchor="ctr">
+            <a:normAutofit fontScale="100000"/>
+          </a:bodyPr>
+          <a:lstStyle xmlns:a="http://schemas.openxmlformats.org/drawingml/2006/main"/>
+          <a:p xmlns:a="http://schemas.openxmlformats.org/drawingml/2006/main">
+            <a:pPr algn="l">
+              <a:defRPr sz="1200" b="0">
+                <a:solidFill>
+                  <a:srgbClr val="7C8A9A"/>
+                </a:solidFill>
+                <a:latin typeface="Microsoft YaHei"/>
+                <a:ea typeface="Microsoft YaHei"/>
+                <a:cs typeface="Microsoft YaHei"/>
+              </a:defRPr>
+            </a:pPr>
+            <a:r>
+              <a:rPr sz="1200" b="0">
+                <a:solidFill>
+                  <a:srgbClr val="7C8A9A"/>
+                </a:solidFill>
+                <a:latin typeface="Microsoft YaHei"/>
+                <a:ea typeface="Microsoft YaHei"/>
+                <a:cs typeface="Microsoft YaHei"/>
+              </a:rPr>
+              <a:t>并列关系 · 同级能力</a:t>
+            </a:r>
+          </a:p>
+        </p:txBody>
+      </p:sp>
+      <p:sp>
+        <p:nvSpPr>
+          <p:cNvPr id="3" name="PPAGENT_QA|parent=parallel-card-0|domains=parallel-card,parallel-content">
+            <a:extLst xmlns:a="http://schemas.openxmlformats.org/drawingml/2006/main">
+              <a:ext uri="{FF2B5EF4-FFF2-40B4-BE49-F238E27FC236}">
+                <a16:creationId xmlns:a16="http://schemas.microsoft.com/office/drawing/2014/main" id="{1B0CDFB2-B469-42B1-8602-67803D96BA45}"/>
+              </a:ext>
+            </a:extLst>
+          </p:cNvPr>
+          <p:cNvSpPr>
+            <a:spLocks xmlns:a="http://schemas.openxmlformats.org/drawingml/2006/main" noGrp="1"/>
+          </p:cNvSpPr>
+          <p:nvPr/>
+        </p:nvSpPr>
+        <p:spPr>
+          <a:xfrm xmlns:a="http://schemas.openxmlformats.org/drawingml/2006/main">
+            <a:off x="742950" y="1809750"/>
             <a:ext cx="2533650" cy="3714750"/>
           </a:xfrm>
           <a:prstGeom xmlns:a="http://schemas.openxmlformats.org/drawingml/2006/main" prst="roundRect">
@@ -1943,11 +2356,11 @@
             </a:avLst>
           </a:prstGeom>
           <a:solidFill xmlns:a="http://schemas.openxmlformats.org/drawingml/2006/main">
-            <a:srgbClr val="F1F8FF"/>
+            <a:srgbClr val="F7FBFF"/>
           </a:solidFill>
           <a:ln xmlns:a="http://schemas.openxmlformats.org/drawingml/2006/main" w="13335">
             <a:solidFill>
-              <a:srgbClr val="7EB7ED"/>
+              <a:srgbClr val="A8CBEA"/>
             </a:solidFill>
             <a:prstDash val="solid"/>
           </a:ln>
@@ -1961,28 +2374,28 @@
       </p:sp>
       <p:sp>
         <p:nvSpPr>
-          <p:cNvPr id="19" name="PPAGENT_QA|within=parallel-card-3|role=accent-rail">
-            <a:extLst xmlns:a="http://schemas.openxmlformats.org/drawingml/2006/main">
-              <a:ext uri="{FF2B5EF4-FFF2-40B4-BE49-F238E27FC236}">
-                <a16:creationId xmlns:a16="http://schemas.microsoft.com/office/drawing/2014/main" id="{7D8CE2BA-3D7F-4A0C-8CF2-664C87615E12}"/>
-              </a:ext>
-            </a:extLst>
-          </p:cNvPr>
-          <p:cNvSpPr>
-            <a:spLocks xmlns:a="http://schemas.openxmlformats.org/drawingml/2006/main" noGrp="1"/>
-          </p:cNvSpPr>
-          <p:nvPr/>
-        </p:nvSpPr>
-        <p:spPr>
-          <a:xfrm xmlns:a="http://schemas.openxmlformats.org/drawingml/2006/main">
-            <a:off x="8915400" y="1809750"/>
+          <p:cNvPr id="4" name="PPAGENT_QA|within=parallel-card-0|role=accent-rail">
+            <a:extLst xmlns:a="http://schemas.openxmlformats.org/drawingml/2006/main">
+              <a:ext uri="{FF2B5EF4-FFF2-40B4-BE49-F238E27FC236}">
+                <a16:creationId xmlns:a16="http://schemas.microsoft.com/office/drawing/2014/main" id="{0A02CA45-96FA-410A-B45D-4439A4037989}"/>
+              </a:ext>
+            </a:extLst>
+          </p:cNvPr>
+          <p:cNvSpPr>
+            <a:spLocks xmlns:a="http://schemas.openxmlformats.org/drawingml/2006/main" noGrp="1"/>
+          </p:cNvSpPr>
+          <p:nvPr/>
+        </p:nvSpPr>
+        <p:spPr>
+          <a:xfrm xmlns:a="http://schemas.openxmlformats.org/drawingml/2006/main">
+            <a:off x="742950" y="1809750"/>
             <a:ext cx="2533650" cy="76200"/>
           </a:xfrm>
           <a:prstGeom xmlns:a="http://schemas.openxmlformats.org/drawingml/2006/main" prst="rect">
             <a:avLst/>
           </a:prstGeom>
           <a:solidFill xmlns:a="http://schemas.openxmlformats.org/drawingml/2006/main">
-            <a:srgbClr val="4C88E8"/>
+            <a:srgbClr val="2F5EA8"/>
           </a:solidFill>
           <a:ln xmlns:a="http://schemas.openxmlformats.org/drawingml/2006/main" w="0">
             <a:noFill/>
@@ -1992,28 +2405,28 @@
       </p:sp>
       <p:sp>
         <p:nvSpPr>
-          <p:cNvPr id="20" name="PPAGENT_QA|within=parallel-card-3|role=index">
-            <a:extLst xmlns:a="http://schemas.openxmlformats.org/drawingml/2006/main">
-              <a:ext uri="{FF2B5EF4-FFF2-40B4-BE49-F238E27FC236}">
-                <a16:creationId xmlns:a16="http://schemas.microsoft.com/office/drawing/2014/main" id="{1D0A8463-485F-463B-BCCF-3771EAB26299}"/>
-              </a:ext>
-            </a:extLst>
-          </p:cNvPr>
-          <p:cNvSpPr>
-            <a:spLocks xmlns:a="http://schemas.openxmlformats.org/drawingml/2006/main" noGrp="1"/>
-          </p:cNvSpPr>
-          <p:nvPr/>
-        </p:nvSpPr>
-        <p:spPr>
-          <a:xfrm xmlns:a="http://schemas.openxmlformats.org/drawingml/2006/main">
-            <a:off x="9105900" y="2114550"/>
+          <p:cNvPr id="5" name="PPAGENT_QA|within=parallel-card-0|role=index">
+            <a:extLst xmlns:a="http://schemas.openxmlformats.org/drawingml/2006/main">
+              <a:ext uri="{FF2B5EF4-FFF2-40B4-BE49-F238E27FC236}">
+                <a16:creationId xmlns:a16="http://schemas.microsoft.com/office/drawing/2014/main" id="{0B5D2A6A-C1FB-40A9-B45B-CCB6FD6D3114}"/>
+              </a:ext>
+            </a:extLst>
+          </p:cNvPr>
+          <p:cNvSpPr>
+            <a:spLocks xmlns:a="http://schemas.openxmlformats.org/drawingml/2006/main" noGrp="1"/>
+          </p:cNvSpPr>
+          <p:nvPr/>
+        </p:nvSpPr>
+        <p:spPr>
+          <a:xfrm xmlns:a="http://schemas.openxmlformats.org/drawingml/2006/main">
+            <a:off x="933450" y="2114550"/>
             <a:ext cx="514350" cy="514350"/>
           </a:xfrm>
           <a:prstGeom xmlns:a="http://schemas.openxmlformats.org/drawingml/2006/main" prst="ellipse">
             <a:avLst/>
           </a:prstGeom>
           <a:solidFill xmlns:a="http://schemas.openxmlformats.org/drawingml/2006/main">
-            <a:srgbClr val="4C88E8"/>
+            <a:srgbClr val="2F5EA8"/>
           </a:solidFill>
           <a:ln xmlns:a="http://schemas.openxmlformats.org/drawingml/2006/main" w="19050">
             <a:solidFill>
@@ -2047,28 +2460,28 @@
                 <a:ea typeface="Microsoft YaHei"/>
                 <a:cs typeface="Microsoft YaHei"/>
               </a:rPr>
-              <a:t>04</a:t>
+              <a:t>01</a:t>
             </a:r>
           </a:p>
         </p:txBody>
       </p:sp>
       <p:sp>
         <p:nvSpPr>
-          <p:cNvPr id="21" name="PPAGENT_QA|within=parallel-card-3|role=title">
-            <a:extLst xmlns:a="http://schemas.openxmlformats.org/drawingml/2006/main">
-              <a:ext uri="{FF2B5EF4-FFF2-40B4-BE49-F238E27FC236}">
-                <a16:creationId xmlns:a16="http://schemas.microsoft.com/office/drawing/2014/main" id="{CCE9230D-E0EC-4891-91B5-D7FC6D0B444A}"/>
-              </a:ext>
-            </a:extLst>
-          </p:cNvPr>
-          <p:cNvSpPr>
-            <a:spLocks xmlns:a="http://schemas.openxmlformats.org/drawingml/2006/main" noGrp="1"/>
-          </p:cNvSpPr>
-          <p:nvPr/>
-        </p:nvSpPr>
-        <p:spPr>
-          <a:xfrm xmlns:a="http://schemas.openxmlformats.org/drawingml/2006/main">
-            <a:off x="9105900" y="2952750"/>
+          <p:cNvPr id="6" name="PPAGENT_QA|within=parallel-card-0|role=title">
+            <a:extLst xmlns:a="http://schemas.openxmlformats.org/drawingml/2006/main">
+              <a:ext uri="{FF2B5EF4-FFF2-40B4-BE49-F238E27FC236}">
+                <a16:creationId xmlns:a16="http://schemas.microsoft.com/office/drawing/2014/main" id="{0A31507A-91D1-4DED-A2C1-E15B99546593}"/>
+              </a:ext>
+            </a:extLst>
+          </p:cNvPr>
+          <p:cNvSpPr>
+            <a:spLocks xmlns:a="http://schemas.openxmlformats.org/drawingml/2006/main" noGrp="1"/>
+          </p:cNvSpPr>
+          <p:nvPr/>
+        </p:nvSpPr>
+        <p:spPr>
+          <a:xfrm xmlns:a="http://schemas.openxmlformats.org/drawingml/2006/main">
+            <a:off x="933450" y="2952750"/>
             <a:ext cx="2152650" cy="523875"/>
           </a:xfrm>
           <a:prstGeom xmlns:a="http://schemas.openxmlformats.org/drawingml/2006/main" prst="rect">
@@ -2105,28 +2518,28 @@
                 <a:ea typeface="Microsoft YaHei"/>
                 <a:cs typeface="Microsoft YaHei"/>
               </a:rPr>
-              <a:t>工程交付</a:t>
+              <a:t>数据基础</a:t>
             </a:r>
           </a:p>
         </p:txBody>
       </p:sp>
       <p:sp>
         <p:nvSpPr>
-          <p:cNvPr id="22" name="PPAGENT_QA|within=parallel-card-3|role=body">
-            <a:extLst xmlns:a="http://schemas.openxmlformats.org/drawingml/2006/main">
-              <a:ext uri="{FF2B5EF4-FFF2-40B4-BE49-F238E27FC236}">
-                <a16:creationId xmlns:a16="http://schemas.microsoft.com/office/drawing/2014/main" id="{5CAC4021-9B30-42D1-8612-C73CA7C23317}"/>
-              </a:ext>
-            </a:extLst>
-          </p:cNvPr>
-          <p:cNvSpPr>
-            <a:spLocks xmlns:a="http://schemas.openxmlformats.org/drawingml/2006/main" noGrp="1"/>
-          </p:cNvSpPr>
-          <p:nvPr/>
-        </p:nvSpPr>
-        <p:spPr>
-          <a:xfrm xmlns:a="http://schemas.openxmlformats.org/drawingml/2006/main">
-            <a:off x="9124950" y="3638550"/>
+          <p:cNvPr id="7" name="PPAGENT_QA|within=parallel-card-0|role=body">
+            <a:extLst xmlns:a="http://schemas.openxmlformats.org/drawingml/2006/main">
+              <a:ext uri="{FF2B5EF4-FFF2-40B4-BE49-F238E27FC236}">
+                <a16:creationId xmlns:a16="http://schemas.microsoft.com/office/drawing/2014/main" id="{DFEAD2C5-A27D-4073-8376-5E2250363861}"/>
+              </a:ext>
+            </a:extLst>
+          </p:cNvPr>
+          <p:cNvSpPr>
+            <a:spLocks xmlns:a="http://schemas.openxmlformats.org/drawingml/2006/main" noGrp="1"/>
+          </p:cNvSpPr>
+          <p:nvPr/>
+        </p:nvSpPr>
+        <p:spPr>
+          <a:xfrm xmlns:a="http://schemas.openxmlformats.org/drawingml/2006/main">
+            <a:off x="952500" y="3638550"/>
             <a:ext cx="2114550" cy="952500"/>
           </a:xfrm>
           <a:prstGeom xmlns:a="http://schemas.openxmlformats.org/drawingml/2006/main" prst="rect">
@@ -2163,6 +2576,756 @@
                 <a:ea typeface="Microsoft YaHei"/>
                 <a:cs typeface="Microsoft YaHei"/>
               </a:rPr>
+              <a:t>统一数据标准与治理口径</a:t>
+            </a:r>
+          </a:p>
+        </p:txBody>
+      </p:sp>
+      <p:sp>
+        <p:nvSpPr>
+          <p:cNvPr id="8" name="PPAGENT_QA|parent=parallel-card-1|domains=parallel-card,parallel-content">
+            <a:extLst xmlns:a="http://schemas.openxmlformats.org/drawingml/2006/main">
+              <a:ext uri="{FF2B5EF4-FFF2-40B4-BE49-F238E27FC236}">
+                <a16:creationId xmlns:a16="http://schemas.microsoft.com/office/drawing/2014/main" id="{4AD08D46-9D6F-4404-AB2F-1B649CBFB0DA}"/>
+              </a:ext>
+            </a:extLst>
+          </p:cNvPr>
+          <p:cNvSpPr>
+            <a:spLocks xmlns:a="http://schemas.openxmlformats.org/drawingml/2006/main" noGrp="1"/>
+          </p:cNvSpPr>
+          <p:nvPr/>
+        </p:nvSpPr>
+        <p:spPr>
+          <a:xfrm xmlns:a="http://schemas.openxmlformats.org/drawingml/2006/main">
+            <a:off x="3467100" y="1809750"/>
+            <a:ext cx="2533650" cy="3714750"/>
+          </a:xfrm>
+          <a:prstGeom xmlns:a="http://schemas.openxmlformats.org/drawingml/2006/main" prst="roundRect">
+            <a:avLst>
+              <a:gd name="adj" fmla="val 4511"/>
+            </a:avLst>
+          </a:prstGeom>
+          <a:solidFill xmlns:a="http://schemas.openxmlformats.org/drawingml/2006/main">
+            <a:srgbClr val="F1F8FF"/>
+          </a:solidFill>
+          <a:ln xmlns:a="http://schemas.openxmlformats.org/drawingml/2006/main" w="13335">
+            <a:solidFill>
+              <a:srgbClr val="7EB7ED"/>
+            </a:solidFill>
+            <a:prstDash val="solid"/>
+          </a:ln>
+        </p:spPr>
+        <p:style>
+          <a:lnRef xmlns:a="http://schemas.openxmlformats.org/drawingml/2006/main" idx="0"/>
+          <a:fillRef xmlns:a="http://schemas.openxmlformats.org/drawingml/2006/main" idx="0"/>
+          <a:effectRef xmlns:a="http://schemas.openxmlformats.org/drawingml/2006/main" idx="4"/>
+          <a:fontRef xmlns:a="http://schemas.openxmlformats.org/drawingml/2006/main" idx="major"/>
+        </p:style>
+      </p:sp>
+      <p:sp>
+        <p:nvSpPr>
+          <p:cNvPr id="9" name="PPAGENT_QA|within=parallel-card-1|role=accent-rail">
+            <a:extLst xmlns:a="http://schemas.openxmlformats.org/drawingml/2006/main">
+              <a:ext uri="{FF2B5EF4-FFF2-40B4-BE49-F238E27FC236}">
+                <a16:creationId xmlns:a16="http://schemas.microsoft.com/office/drawing/2014/main" id="{0CAC8063-EA45-4FB8-BC64-1549B360384C}"/>
+              </a:ext>
+            </a:extLst>
+          </p:cNvPr>
+          <p:cNvSpPr>
+            <a:spLocks xmlns:a="http://schemas.openxmlformats.org/drawingml/2006/main" noGrp="1"/>
+          </p:cNvSpPr>
+          <p:nvPr/>
+        </p:nvSpPr>
+        <p:spPr>
+          <a:xfrm xmlns:a="http://schemas.openxmlformats.org/drawingml/2006/main">
+            <a:off x="3467100" y="1809750"/>
+            <a:ext cx="2533650" cy="76200"/>
+          </a:xfrm>
+          <a:prstGeom xmlns:a="http://schemas.openxmlformats.org/drawingml/2006/main" prst="rect">
+            <a:avLst/>
+          </a:prstGeom>
+          <a:solidFill xmlns:a="http://schemas.openxmlformats.org/drawingml/2006/main">
+            <a:srgbClr val="4C88E8"/>
+          </a:solidFill>
+          <a:ln xmlns:a="http://schemas.openxmlformats.org/drawingml/2006/main" w="0">
+            <a:noFill/>
+            <a:prstDash val="solid"/>
+          </a:ln>
+        </p:spPr>
+      </p:sp>
+      <p:sp>
+        <p:nvSpPr>
+          <p:cNvPr id="10" name="PPAGENT_QA|within=parallel-card-1|role=index">
+            <a:extLst xmlns:a="http://schemas.openxmlformats.org/drawingml/2006/main">
+              <a:ext uri="{FF2B5EF4-FFF2-40B4-BE49-F238E27FC236}">
+                <a16:creationId xmlns:a16="http://schemas.microsoft.com/office/drawing/2014/main" id="{36C33FC0-5F9E-46BF-ACD7-EF8C6DB5FA0A}"/>
+              </a:ext>
+            </a:extLst>
+          </p:cNvPr>
+          <p:cNvSpPr>
+            <a:spLocks xmlns:a="http://schemas.openxmlformats.org/drawingml/2006/main" noGrp="1"/>
+          </p:cNvSpPr>
+          <p:nvPr/>
+        </p:nvSpPr>
+        <p:spPr>
+          <a:xfrm xmlns:a="http://schemas.openxmlformats.org/drawingml/2006/main">
+            <a:off x="3657600" y="2114550"/>
+            <a:ext cx="514350" cy="514350"/>
+          </a:xfrm>
+          <a:prstGeom xmlns:a="http://schemas.openxmlformats.org/drawingml/2006/main" prst="ellipse">
+            <a:avLst/>
+          </a:prstGeom>
+          <a:solidFill xmlns:a="http://schemas.openxmlformats.org/drawingml/2006/main">
+            <a:srgbClr val="4C88E8"/>
+          </a:solidFill>
+          <a:ln xmlns:a="http://schemas.openxmlformats.org/drawingml/2006/main" w="19050">
+            <a:solidFill>
+              <a:srgbClr val="FFFFFF"/>
+            </a:solidFill>
+            <a:prstDash val="solid"/>
+          </a:ln>
+        </p:spPr>
+        <p:txBody>
+          <a:bodyPr xmlns:a="http://schemas.openxmlformats.org/drawingml/2006/main" lIns="0" tIns="0" rIns="0" bIns="0" anchor="ctr">
+            <a:normAutofit fontScale="100000"/>
+          </a:bodyPr>
+          <a:lstStyle xmlns:a="http://schemas.openxmlformats.org/drawingml/2006/main"/>
+          <a:p xmlns:a="http://schemas.openxmlformats.org/drawingml/2006/main">
+            <a:pPr algn="ctr">
+              <a:defRPr sz="1275" b="1">
+                <a:solidFill>
+                  <a:srgbClr val="FFFFFF"/>
+                </a:solidFill>
+                <a:latin typeface="Microsoft YaHei"/>
+                <a:ea typeface="Microsoft YaHei"/>
+                <a:cs typeface="Microsoft YaHei"/>
+              </a:defRPr>
+            </a:pPr>
+            <a:r>
+              <a:rPr sz="1275" b="1">
+                <a:solidFill>
+                  <a:srgbClr val="FFFFFF"/>
+                </a:solidFill>
+                <a:latin typeface="Microsoft YaHei"/>
+                <a:ea typeface="Microsoft YaHei"/>
+                <a:cs typeface="Microsoft YaHei"/>
+              </a:rPr>
+              <a:t>02</a:t>
+            </a:r>
+          </a:p>
+        </p:txBody>
+      </p:sp>
+      <p:sp>
+        <p:nvSpPr>
+          <p:cNvPr id="11" name="PPAGENT_QA|within=parallel-card-1|role=title">
+            <a:extLst xmlns:a="http://schemas.openxmlformats.org/drawingml/2006/main">
+              <a:ext uri="{FF2B5EF4-FFF2-40B4-BE49-F238E27FC236}">
+                <a16:creationId xmlns:a16="http://schemas.microsoft.com/office/drawing/2014/main" id="{5694C271-380B-458B-9108-02C6D677491A}"/>
+              </a:ext>
+            </a:extLst>
+          </p:cNvPr>
+          <p:cNvSpPr>
+            <a:spLocks xmlns:a="http://schemas.openxmlformats.org/drawingml/2006/main" noGrp="1"/>
+          </p:cNvSpPr>
+          <p:nvPr/>
+        </p:nvSpPr>
+        <p:spPr>
+          <a:xfrm xmlns:a="http://schemas.openxmlformats.org/drawingml/2006/main">
+            <a:off x="3657600" y="2952750"/>
+            <a:ext cx="2152650" cy="523875"/>
+          </a:xfrm>
+          <a:prstGeom xmlns:a="http://schemas.openxmlformats.org/drawingml/2006/main" prst="rect">
+            <a:avLst/>
+          </a:prstGeom>
+          <a:noFill xmlns:a="http://schemas.openxmlformats.org/drawingml/2006/main"/>
+          <a:ln xmlns:a="http://schemas.openxmlformats.org/drawingml/2006/main" w="0">
+            <a:noFill/>
+            <a:prstDash val="solid"/>
+          </a:ln>
+        </p:spPr>
+        <p:txBody>
+          <a:bodyPr xmlns:a="http://schemas.openxmlformats.org/drawingml/2006/main" lIns="0" tIns="0" rIns="0" bIns="0" anchor="ctr">
+            <a:normAutofit fontScale="100000"/>
+          </a:bodyPr>
+          <a:lstStyle xmlns:a="http://schemas.openxmlformats.org/drawingml/2006/main"/>
+          <a:p xmlns:a="http://schemas.openxmlformats.org/drawingml/2006/main">
+            <a:pPr algn="ctr">
+              <a:defRPr sz="1650" b="1">
+                <a:solidFill>
+                  <a:srgbClr val="174D87"/>
+                </a:solidFill>
+                <a:latin typeface="Microsoft YaHei"/>
+                <a:ea typeface="Microsoft YaHei"/>
+                <a:cs typeface="Microsoft YaHei"/>
+              </a:defRPr>
+            </a:pPr>
+            <a:r>
+              <a:rPr sz="1650" b="1">
+                <a:solidFill>
+                  <a:srgbClr val="174D87"/>
+                </a:solidFill>
+                <a:latin typeface="Microsoft YaHei"/>
+                <a:ea typeface="Microsoft YaHei"/>
+                <a:cs typeface="Microsoft YaHei"/>
+              </a:rPr>
+              <a:t>模型能力</a:t>
+            </a:r>
+          </a:p>
+        </p:txBody>
+      </p:sp>
+      <p:sp>
+        <p:nvSpPr>
+          <p:cNvPr id="12" name="PPAGENT_QA|within=parallel-card-1|role=body">
+            <a:extLst xmlns:a="http://schemas.openxmlformats.org/drawingml/2006/main">
+              <a:ext uri="{FF2B5EF4-FFF2-40B4-BE49-F238E27FC236}">
+                <a16:creationId xmlns:a16="http://schemas.microsoft.com/office/drawing/2014/main" id="{47560F89-E269-4FE6-953F-3421F571E5CD}"/>
+              </a:ext>
+            </a:extLst>
+          </p:cNvPr>
+          <p:cNvSpPr>
+            <a:spLocks xmlns:a="http://schemas.openxmlformats.org/drawingml/2006/main" noGrp="1"/>
+          </p:cNvSpPr>
+          <p:nvPr/>
+        </p:nvSpPr>
+        <p:spPr>
+          <a:xfrm xmlns:a="http://schemas.openxmlformats.org/drawingml/2006/main">
+            <a:off x="3676650" y="3638550"/>
+            <a:ext cx="2114550" cy="952500"/>
+          </a:xfrm>
+          <a:prstGeom xmlns:a="http://schemas.openxmlformats.org/drawingml/2006/main" prst="rect">
+            <a:avLst/>
+          </a:prstGeom>
+          <a:noFill xmlns:a="http://schemas.openxmlformats.org/drawingml/2006/main"/>
+          <a:ln xmlns:a="http://schemas.openxmlformats.org/drawingml/2006/main" w="0">
+            <a:noFill/>
+            <a:prstDash val="solid"/>
+          </a:ln>
+        </p:spPr>
+        <p:txBody>
+          <a:bodyPr xmlns:a="http://schemas.openxmlformats.org/drawingml/2006/main" lIns="0" tIns="0" rIns="0" bIns="0" anchor="t">
+            <a:normAutofit fontScale="100000"/>
+          </a:bodyPr>
+          <a:lstStyle xmlns:a="http://schemas.openxmlformats.org/drawingml/2006/main"/>
+          <a:p xmlns:a="http://schemas.openxmlformats.org/drawingml/2006/main">
+            <a:pPr algn="ctr">
+              <a:defRPr sz="1275" b="0">
+                <a:solidFill>
+                  <a:srgbClr val="607895"/>
+                </a:solidFill>
+                <a:latin typeface="Microsoft YaHei"/>
+                <a:ea typeface="Microsoft YaHei"/>
+                <a:cs typeface="Microsoft YaHei"/>
+              </a:defRPr>
+            </a:pPr>
+            <a:r>
+              <a:rPr sz="1275" b="0">
+                <a:solidFill>
+                  <a:srgbClr val="607895"/>
+                </a:solidFill>
+                <a:latin typeface="Microsoft YaHei"/>
+                <a:ea typeface="Microsoft YaHei"/>
+                <a:cs typeface="Microsoft YaHei"/>
+              </a:rPr>
+              <a:t>沉淀可复用的建模方法</a:t>
+            </a:r>
+          </a:p>
+        </p:txBody>
+      </p:sp>
+      <p:sp>
+        <p:nvSpPr>
+          <p:cNvPr id="13" name="PPAGENT_QA|parent=parallel-card-2|domains=parallel-card,parallel-content">
+            <a:extLst xmlns:a="http://schemas.openxmlformats.org/drawingml/2006/main">
+              <a:ext uri="{FF2B5EF4-FFF2-40B4-BE49-F238E27FC236}">
+                <a16:creationId xmlns:a16="http://schemas.microsoft.com/office/drawing/2014/main" id="{A8021AA6-F2EC-4070-9075-6509BC20244D}"/>
+              </a:ext>
+            </a:extLst>
+          </p:cNvPr>
+          <p:cNvSpPr>
+            <a:spLocks xmlns:a="http://schemas.openxmlformats.org/drawingml/2006/main" noGrp="1"/>
+          </p:cNvSpPr>
+          <p:nvPr/>
+        </p:nvSpPr>
+        <p:spPr>
+          <a:xfrm xmlns:a="http://schemas.openxmlformats.org/drawingml/2006/main">
+            <a:off x="6191250" y="1809750"/>
+            <a:ext cx="2533650" cy="3714750"/>
+          </a:xfrm>
+          <a:prstGeom xmlns:a="http://schemas.openxmlformats.org/drawingml/2006/main" prst="roundRect">
+            <a:avLst>
+              <a:gd name="adj" fmla="val 4511"/>
+            </a:avLst>
+          </a:prstGeom>
+          <a:solidFill xmlns:a="http://schemas.openxmlformats.org/drawingml/2006/main">
+            <a:srgbClr val="F7FBFF"/>
+          </a:solidFill>
+          <a:ln xmlns:a="http://schemas.openxmlformats.org/drawingml/2006/main" w="13335">
+            <a:solidFill>
+              <a:srgbClr val="A8CBEA"/>
+            </a:solidFill>
+            <a:prstDash val="solid"/>
+          </a:ln>
+        </p:spPr>
+        <p:style>
+          <a:lnRef xmlns:a="http://schemas.openxmlformats.org/drawingml/2006/main" idx="0"/>
+          <a:fillRef xmlns:a="http://schemas.openxmlformats.org/drawingml/2006/main" idx="0"/>
+          <a:effectRef xmlns:a="http://schemas.openxmlformats.org/drawingml/2006/main" idx="4"/>
+          <a:fontRef xmlns:a="http://schemas.openxmlformats.org/drawingml/2006/main" idx="major"/>
+        </p:style>
+      </p:sp>
+      <p:sp>
+        <p:nvSpPr>
+          <p:cNvPr id="14" name="PPAGENT_QA|within=parallel-card-2|role=accent-rail">
+            <a:extLst xmlns:a="http://schemas.openxmlformats.org/drawingml/2006/main">
+              <a:ext uri="{FF2B5EF4-FFF2-40B4-BE49-F238E27FC236}">
+                <a16:creationId xmlns:a16="http://schemas.microsoft.com/office/drawing/2014/main" id="{AAD7CED4-4AE3-4D54-8E64-E0702A20CCE5}"/>
+              </a:ext>
+            </a:extLst>
+          </p:cNvPr>
+          <p:cNvSpPr>
+            <a:spLocks xmlns:a="http://schemas.openxmlformats.org/drawingml/2006/main" noGrp="1"/>
+          </p:cNvSpPr>
+          <p:nvPr/>
+        </p:nvSpPr>
+        <p:spPr>
+          <a:xfrm xmlns:a="http://schemas.openxmlformats.org/drawingml/2006/main">
+            <a:off x="6191250" y="1809750"/>
+            <a:ext cx="2533650" cy="76200"/>
+          </a:xfrm>
+          <a:prstGeom xmlns:a="http://schemas.openxmlformats.org/drawingml/2006/main" prst="rect">
+            <a:avLst/>
+          </a:prstGeom>
+          <a:solidFill xmlns:a="http://schemas.openxmlformats.org/drawingml/2006/main">
+            <a:srgbClr val="2F5EA8"/>
+          </a:solidFill>
+          <a:ln xmlns:a="http://schemas.openxmlformats.org/drawingml/2006/main" w="0">
+            <a:noFill/>
+            <a:prstDash val="solid"/>
+          </a:ln>
+        </p:spPr>
+      </p:sp>
+      <p:sp>
+        <p:nvSpPr>
+          <p:cNvPr id="15" name="PPAGENT_QA|within=parallel-card-2|role=index">
+            <a:extLst xmlns:a="http://schemas.openxmlformats.org/drawingml/2006/main">
+              <a:ext uri="{FF2B5EF4-FFF2-40B4-BE49-F238E27FC236}">
+                <a16:creationId xmlns:a16="http://schemas.microsoft.com/office/drawing/2014/main" id="{6EE2EFF8-BE88-4D24-9EAC-F9FAB82312D9}"/>
+              </a:ext>
+            </a:extLst>
+          </p:cNvPr>
+          <p:cNvSpPr>
+            <a:spLocks xmlns:a="http://schemas.openxmlformats.org/drawingml/2006/main" noGrp="1"/>
+          </p:cNvSpPr>
+          <p:nvPr/>
+        </p:nvSpPr>
+        <p:spPr>
+          <a:xfrm xmlns:a="http://schemas.openxmlformats.org/drawingml/2006/main">
+            <a:off x="6381750" y="2114550"/>
+            <a:ext cx="514350" cy="514350"/>
+          </a:xfrm>
+          <a:prstGeom xmlns:a="http://schemas.openxmlformats.org/drawingml/2006/main" prst="ellipse">
+            <a:avLst/>
+          </a:prstGeom>
+          <a:solidFill xmlns:a="http://schemas.openxmlformats.org/drawingml/2006/main">
+            <a:srgbClr val="2F5EA8"/>
+          </a:solidFill>
+          <a:ln xmlns:a="http://schemas.openxmlformats.org/drawingml/2006/main" w="19050">
+            <a:solidFill>
+              <a:srgbClr val="FFFFFF"/>
+            </a:solidFill>
+            <a:prstDash val="solid"/>
+          </a:ln>
+        </p:spPr>
+        <p:txBody>
+          <a:bodyPr xmlns:a="http://schemas.openxmlformats.org/drawingml/2006/main" lIns="0" tIns="0" rIns="0" bIns="0" anchor="ctr">
+            <a:normAutofit fontScale="100000"/>
+          </a:bodyPr>
+          <a:lstStyle xmlns:a="http://schemas.openxmlformats.org/drawingml/2006/main"/>
+          <a:p xmlns:a="http://schemas.openxmlformats.org/drawingml/2006/main">
+            <a:pPr algn="ctr">
+              <a:defRPr sz="1275" b="1">
+                <a:solidFill>
+                  <a:srgbClr val="FFFFFF"/>
+                </a:solidFill>
+                <a:latin typeface="Microsoft YaHei"/>
+                <a:ea typeface="Microsoft YaHei"/>
+                <a:cs typeface="Microsoft YaHei"/>
+              </a:defRPr>
+            </a:pPr>
+            <a:r>
+              <a:rPr sz="1275" b="1">
+                <a:solidFill>
+                  <a:srgbClr val="FFFFFF"/>
+                </a:solidFill>
+                <a:latin typeface="Microsoft YaHei"/>
+                <a:ea typeface="Microsoft YaHei"/>
+                <a:cs typeface="Microsoft YaHei"/>
+              </a:rPr>
+              <a:t>03</a:t>
+            </a:r>
+          </a:p>
+        </p:txBody>
+      </p:sp>
+      <p:sp>
+        <p:nvSpPr>
+          <p:cNvPr id="16" name="PPAGENT_QA|within=parallel-card-2|role=title">
+            <a:extLst xmlns:a="http://schemas.openxmlformats.org/drawingml/2006/main">
+              <a:ext uri="{FF2B5EF4-FFF2-40B4-BE49-F238E27FC236}">
+                <a16:creationId xmlns:a16="http://schemas.microsoft.com/office/drawing/2014/main" id="{E730FD63-9C19-4CAE-BA19-9145D91A97B5}"/>
+              </a:ext>
+            </a:extLst>
+          </p:cNvPr>
+          <p:cNvSpPr>
+            <a:spLocks xmlns:a="http://schemas.openxmlformats.org/drawingml/2006/main" noGrp="1"/>
+          </p:cNvSpPr>
+          <p:nvPr/>
+        </p:nvSpPr>
+        <p:spPr>
+          <a:xfrm xmlns:a="http://schemas.openxmlformats.org/drawingml/2006/main">
+            <a:off x="6381750" y="2952750"/>
+            <a:ext cx="2152650" cy="523875"/>
+          </a:xfrm>
+          <a:prstGeom xmlns:a="http://schemas.openxmlformats.org/drawingml/2006/main" prst="rect">
+            <a:avLst/>
+          </a:prstGeom>
+          <a:noFill xmlns:a="http://schemas.openxmlformats.org/drawingml/2006/main"/>
+          <a:ln xmlns:a="http://schemas.openxmlformats.org/drawingml/2006/main" w="0">
+            <a:noFill/>
+            <a:prstDash val="solid"/>
+          </a:ln>
+        </p:spPr>
+        <p:txBody>
+          <a:bodyPr xmlns:a="http://schemas.openxmlformats.org/drawingml/2006/main" lIns="0" tIns="0" rIns="0" bIns="0" anchor="ctr">
+            <a:normAutofit fontScale="100000"/>
+          </a:bodyPr>
+          <a:lstStyle xmlns:a="http://schemas.openxmlformats.org/drawingml/2006/main"/>
+          <a:p xmlns:a="http://schemas.openxmlformats.org/drawingml/2006/main">
+            <a:pPr algn="ctr">
+              <a:defRPr sz="1650" b="1">
+                <a:solidFill>
+                  <a:srgbClr val="174D87"/>
+                </a:solidFill>
+                <a:latin typeface="Microsoft YaHei"/>
+                <a:ea typeface="Microsoft YaHei"/>
+                <a:cs typeface="Microsoft YaHei"/>
+              </a:defRPr>
+            </a:pPr>
+            <a:r>
+              <a:rPr sz="1650" b="1">
+                <a:solidFill>
+                  <a:srgbClr val="174D87"/>
+                </a:solidFill>
+                <a:latin typeface="Microsoft YaHei"/>
+                <a:ea typeface="Microsoft YaHei"/>
+                <a:cs typeface="Microsoft YaHei"/>
+              </a:rPr>
+              <a:t>验证体系</a:t>
+            </a:r>
+          </a:p>
+        </p:txBody>
+      </p:sp>
+      <p:sp>
+        <p:nvSpPr>
+          <p:cNvPr id="17" name="PPAGENT_QA|within=parallel-card-2|role=body">
+            <a:extLst xmlns:a="http://schemas.openxmlformats.org/drawingml/2006/main">
+              <a:ext uri="{FF2B5EF4-FFF2-40B4-BE49-F238E27FC236}">
+                <a16:creationId xmlns:a16="http://schemas.microsoft.com/office/drawing/2014/main" id="{B36355DB-BA9D-4537-A50B-6D086C4EFBD9}"/>
+              </a:ext>
+            </a:extLst>
+          </p:cNvPr>
+          <p:cNvSpPr>
+            <a:spLocks xmlns:a="http://schemas.openxmlformats.org/drawingml/2006/main" noGrp="1"/>
+          </p:cNvSpPr>
+          <p:nvPr/>
+        </p:nvSpPr>
+        <p:spPr>
+          <a:xfrm xmlns:a="http://schemas.openxmlformats.org/drawingml/2006/main">
+            <a:off x="6400800" y="3638550"/>
+            <a:ext cx="2114550" cy="952500"/>
+          </a:xfrm>
+          <a:prstGeom xmlns:a="http://schemas.openxmlformats.org/drawingml/2006/main" prst="rect">
+            <a:avLst/>
+          </a:prstGeom>
+          <a:noFill xmlns:a="http://schemas.openxmlformats.org/drawingml/2006/main"/>
+          <a:ln xmlns:a="http://schemas.openxmlformats.org/drawingml/2006/main" w="0">
+            <a:noFill/>
+            <a:prstDash val="solid"/>
+          </a:ln>
+        </p:spPr>
+        <p:txBody>
+          <a:bodyPr xmlns:a="http://schemas.openxmlformats.org/drawingml/2006/main" lIns="0" tIns="0" rIns="0" bIns="0" anchor="t">
+            <a:normAutofit fontScale="100000"/>
+          </a:bodyPr>
+          <a:lstStyle xmlns:a="http://schemas.openxmlformats.org/drawingml/2006/main"/>
+          <a:p xmlns:a="http://schemas.openxmlformats.org/drawingml/2006/main">
+            <a:pPr algn="ctr">
+              <a:defRPr sz="1275" b="0">
+                <a:solidFill>
+                  <a:srgbClr val="607895"/>
+                </a:solidFill>
+                <a:latin typeface="Microsoft YaHei"/>
+                <a:ea typeface="Microsoft YaHei"/>
+                <a:cs typeface="Microsoft YaHei"/>
+              </a:defRPr>
+            </a:pPr>
+            <a:r>
+              <a:rPr sz="1275" b="0">
+                <a:solidFill>
+                  <a:srgbClr val="607895"/>
+                </a:solidFill>
+                <a:latin typeface="Microsoft YaHei"/>
+                <a:ea typeface="Microsoft YaHei"/>
+                <a:cs typeface="Microsoft YaHei"/>
+              </a:rPr>
+              <a:t>形成稳定实验与评估流程</a:t>
+            </a:r>
+          </a:p>
+        </p:txBody>
+      </p:sp>
+      <p:sp>
+        <p:nvSpPr>
+          <p:cNvPr id="18" name="PPAGENT_QA|parent=parallel-card-3|domains=parallel-card,parallel-content">
+            <a:extLst xmlns:a="http://schemas.openxmlformats.org/drawingml/2006/main">
+              <a:ext uri="{FF2B5EF4-FFF2-40B4-BE49-F238E27FC236}">
+                <a16:creationId xmlns:a16="http://schemas.microsoft.com/office/drawing/2014/main" id="{37755627-24EC-4859-B635-3E08448CEEEB}"/>
+              </a:ext>
+            </a:extLst>
+          </p:cNvPr>
+          <p:cNvSpPr>
+            <a:spLocks xmlns:a="http://schemas.openxmlformats.org/drawingml/2006/main" noGrp="1"/>
+          </p:cNvSpPr>
+          <p:nvPr/>
+        </p:nvSpPr>
+        <p:spPr>
+          <a:xfrm xmlns:a="http://schemas.openxmlformats.org/drawingml/2006/main">
+            <a:off x="8915400" y="1809750"/>
+            <a:ext cx="2533650" cy="3714750"/>
+          </a:xfrm>
+          <a:prstGeom xmlns:a="http://schemas.openxmlformats.org/drawingml/2006/main" prst="roundRect">
+            <a:avLst>
+              <a:gd name="adj" fmla="val 4511"/>
+            </a:avLst>
+          </a:prstGeom>
+          <a:solidFill xmlns:a="http://schemas.openxmlformats.org/drawingml/2006/main">
+            <a:srgbClr val="F1F8FF"/>
+          </a:solidFill>
+          <a:ln xmlns:a="http://schemas.openxmlformats.org/drawingml/2006/main" w="13335">
+            <a:solidFill>
+              <a:srgbClr val="7EB7ED"/>
+            </a:solidFill>
+            <a:prstDash val="solid"/>
+          </a:ln>
+        </p:spPr>
+        <p:style>
+          <a:lnRef xmlns:a="http://schemas.openxmlformats.org/drawingml/2006/main" idx="0"/>
+          <a:fillRef xmlns:a="http://schemas.openxmlformats.org/drawingml/2006/main" idx="0"/>
+          <a:effectRef xmlns:a="http://schemas.openxmlformats.org/drawingml/2006/main" idx="4"/>
+          <a:fontRef xmlns:a="http://schemas.openxmlformats.org/drawingml/2006/main" idx="major"/>
+        </p:style>
+      </p:sp>
+      <p:sp>
+        <p:nvSpPr>
+          <p:cNvPr id="19" name="PPAGENT_QA|within=parallel-card-3|role=accent-rail">
+            <a:extLst xmlns:a="http://schemas.openxmlformats.org/drawingml/2006/main">
+              <a:ext uri="{FF2B5EF4-FFF2-40B4-BE49-F238E27FC236}">
+                <a16:creationId xmlns:a16="http://schemas.microsoft.com/office/drawing/2014/main" id="{24ED7FFE-86E5-495E-9FDC-D879F3727A46}"/>
+              </a:ext>
+            </a:extLst>
+          </p:cNvPr>
+          <p:cNvSpPr>
+            <a:spLocks xmlns:a="http://schemas.openxmlformats.org/drawingml/2006/main" noGrp="1"/>
+          </p:cNvSpPr>
+          <p:nvPr/>
+        </p:nvSpPr>
+        <p:spPr>
+          <a:xfrm xmlns:a="http://schemas.openxmlformats.org/drawingml/2006/main">
+            <a:off x="8915400" y="1809750"/>
+            <a:ext cx="2533650" cy="76200"/>
+          </a:xfrm>
+          <a:prstGeom xmlns:a="http://schemas.openxmlformats.org/drawingml/2006/main" prst="rect">
+            <a:avLst/>
+          </a:prstGeom>
+          <a:solidFill xmlns:a="http://schemas.openxmlformats.org/drawingml/2006/main">
+            <a:srgbClr val="4C88E8"/>
+          </a:solidFill>
+          <a:ln xmlns:a="http://schemas.openxmlformats.org/drawingml/2006/main" w="0">
+            <a:noFill/>
+            <a:prstDash val="solid"/>
+          </a:ln>
+        </p:spPr>
+      </p:sp>
+      <p:sp>
+        <p:nvSpPr>
+          <p:cNvPr id="20" name="PPAGENT_QA|within=parallel-card-3|role=index">
+            <a:extLst xmlns:a="http://schemas.openxmlformats.org/drawingml/2006/main">
+              <a:ext uri="{FF2B5EF4-FFF2-40B4-BE49-F238E27FC236}">
+                <a16:creationId xmlns:a16="http://schemas.microsoft.com/office/drawing/2014/main" id="{8D91ECB4-EA90-4D83-A7C6-95D1D5CC2E8A}"/>
+              </a:ext>
+            </a:extLst>
+          </p:cNvPr>
+          <p:cNvSpPr>
+            <a:spLocks xmlns:a="http://schemas.openxmlformats.org/drawingml/2006/main" noGrp="1"/>
+          </p:cNvSpPr>
+          <p:nvPr/>
+        </p:nvSpPr>
+        <p:spPr>
+          <a:xfrm xmlns:a="http://schemas.openxmlformats.org/drawingml/2006/main">
+            <a:off x="9105900" y="2114550"/>
+            <a:ext cx="514350" cy="514350"/>
+          </a:xfrm>
+          <a:prstGeom xmlns:a="http://schemas.openxmlformats.org/drawingml/2006/main" prst="ellipse">
+            <a:avLst/>
+          </a:prstGeom>
+          <a:solidFill xmlns:a="http://schemas.openxmlformats.org/drawingml/2006/main">
+            <a:srgbClr val="4C88E8"/>
+          </a:solidFill>
+          <a:ln xmlns:a="http://schemas.openxmlformats.org/drawingml/2006/main" w="19050">
+            <a:solidFill>
+              <a:srgbClr val="FFFFFF"/>
+            </a:solidFill>
+            <a:prstDash val="solid"/>
+          </a:ln>
+        </p:spPr>
+        <p:txBody>
+          <a:bodyPr xmlns:a="http://schemas.openxmlformats.org/drawingml/2006/main" lIns="0" tIns="0" rIns="0" bIns="0" anchor="ctr">
+            <a:normAutofit fontScale="100000"/>
+          </a:bodyPr>
+          <a:lstStyle xmlns:a="http://schemas.openxmlformats.org/drawingml/2006/main"/>
+          <a:p xmlns:a="http://schemas.openxmlformats.org/drawingml/2006/main">
+            <a:pPr algn="ctr">
+              <a:defRPr sz="1275" b="1">
+                <a:solidFill>
+                  <a:srgbClr val="FFFFFF"/>
+                </a:solidFill>
+                <a:latin typeface="Microsoft YaHei"/>
+                <a:ea typeface="Microsoft YaHei"/>
+                <a:cs typeface="Microsoft YaHei"/>
+              </a:defRPr>
+            </a:pPr>
+            <a:r>
+              <a:rPr sz="1275" b="1">
+                <a:solidFill>
+                  <a:srgbClr val="FFFFFF"/>
+                </a:solidFill>
+                <a:latin typeface="Microsoft YaHei"/>
+                <a:ea typeface="Microsoft YaHei"/>
+                <a:cs typeface="Microsoft YaHei"/>
+              </a:rPr>
+              <a:t>04</a:t>
+            </a:r>
+          </a:p>
+        </p:txBody>
+      </p:sp>
+      <p:sp>
+        <p:nvSpPr>
+          <p:cNvPr id="21" name="PPAGENT_QA|within=parallel-card-3|role=title">
+            <a:extLst xmlns:a="http://schemas.openxmlformats.org/drawingml/2006/main">
+              <a:ext uri="{FF2B5EF4-FFF2-40B4-BE49-F238E27FC236}">
+                <a16:creationId xmlns:a16="http://schemas.microsoft.com/office/drawing/2014/main" id="{2472FF8A-948B-437A-A729-0C2EAAAF22A0}"/>
+              </a:ext>
+            </a:extLst>
+          </p:cNvPr>
+          <p:cNvSpPr>
+            <a:spLocks xmlns:a="http://schemas.openxmlformats.org/drawingml/2006/main" noGrp="1"/>
+          </p:cNvSpPr>
+          <p:nvPr/>
+        </p:nvSpPr>
+        <p:spPr>
+          <a:xfrm xmlns:a="http://schemas.openxmlformats.org/drawingml/2006/main">
+            <a:off x="9105900" y="2952750"/>
+            <a:ext cx="2152650" cy="523875"/>
+          </a:xfrm>
+          <a:prstGeom xmlns:a="http://schemas.openxmlformats.org/drawingml/2006/main" prst="rect">
+            <a:avLst/>
+          </a:prstGeom>
+          <a:noFill xmlns:a="http://schemas.openxmlformats.org/drawingml/2006/main"/>
+          <a:ln xmlns:a="http://schemas.openxmlformats.org/drawingml/2006/main" w="0">
+            <a:noFill/>
+            <a:prstDash val="solid"/>
+          </a:ln>
+        </p:spPr>
+        <p:txBody>
+          <a:bodyPr xmlns:a="http://schemas.openxmlformats.org/drawingml/2006/main" lIns="0" tIns="0" rIns="0" bIns="0" anchor="ctr">
+            <a:normAutofit fontScale="100000"/>
+          </a:bodyPr>
+          <a:lstStyle xmlns:a="http://schemas.openxmlformats.org/drawingml/2006/main"/>
+          <a:p xmlns:a="http://schemas.openxmlformats.org/drawingml/2006/main">
+            <a:pPr algn="ctr">
+              <a:defRPr sz="1650" b="1">
+                <a:solidFill>
+                  <a:srgbClr val="174D87"/>
+                </a:solidFill>
+                <a:latin typeface="Microsoft YaHei"/>
+                <a:ea typeface="Microsoft YaHei"/>
+                <a:cs typeface="Microsoft YaHei"/>
+              </a:defRPr>
+            </a:pPr>
+            <a:r>
+              <a:rPr sz="1650" b="1">
+                <a:solidFill>
+                  <a:srgbClr val="174D87"/>
+                </a:solidFill>
+                <a:latin typeface="Microsoft YaHei"/>
+                <a:ea typeface="Microsoft YaHei"/>
+                <a:cs typeface="Microsoft YaHei"/>
+              </a:rPr>
+              <a:t>工程交付</a:t>
+            </a:r>
+          </a:p>
+        </p:txBody>
+      </p:sp>
+      <p:sp>
+        <p:nvSpPr>
+          <p:cNvPr id="22" name="PPAGENT_QA|within=parallel-card-3|role=body">
+            <a:extLst xmlns:a="http://schemas.openxmlformats.org/drawingml/2006/main">
+              <a:ext uri="{FF2B5EF4-FFF2-40B4-BE49-F238E27FC236}">
+                <a16:creationId xmlns:a16="http://schemas.microsoft.com/office/drawing/2014/main" id="{0D234B48-629F-41C4-A39F-2C26847A4814}"/>
+              </a:ext>
+            </a:extLst>
+          </p:cNvPr>
+          <p:cNvSpPr>
+            <a:spLocks xmlns:a="http://schemas.openxmlformats.org/drawingml/2006/main" noGrp="1"/>
+          </p:cNvSpPr>
+          <p:nvPr/>
+        </p:nvSpPr>
+        <p:spPr>
+          <a:xfrm xmlns:a="http://schemas.openxmlformats.org/drawingml/2006/main">
+            <a:off x="9124950" y="3638550"/>
+            <a:ext cx="2114550" cy="952500"/>
+          </a:xfrm>
+          <a:prstGeom xmlns:a="http://schemas.openxmlformats.org/drawingml/2006/main" prst="rect">
+            <a:avLst/>
+          </a:prstGeom>
+          <a:noFill xmlns:a="http://schemas.openxmlformats.org/drawingml/2006/main"/>
+          <a:ln xmlns:a="http://schemas.openxmlformats.org/drawingml/2006/main" w="0">
+            <a:noFill/>
+            <a:prstDash val="solid"/>
+          </a:ln>
+        </p:spPr>
+        <p:txBody>
+          <a:bodyPr xmlns:a="http://schemas.openxmlformats.org/drawingml/2006/main" lIns="0" tIns="0" rIns="0" bIns="0" anchor="t">
+            <a:normAutofit fontScale="100000"/>
+          </a:bodyPr>
+          <a:lstStyle xmlns:a="http://schemas.openxmlformats.org/drawingml/2006/main"/>
+          <a:p xmlns:a="http://schemas.openxmlformats.org/drawingml/2006/main">
+            <a:pPr algn="ctr">
+              <a:defRPr sz="1275" b="0">
+                <a:solidFill>
+                  <a:srgbClr val="607895"/>
+                </a:solidFill>
+                <a:latin typeface="Microsoft YaHei"/>
+                <a:ea typeface="Microsoft YaHei"/>
+                <a:cs typeface="Microsoft YaHei"/>
+              </a:defRPr>
+            </a:pPr>
+            <a:r>
+              <a:rPr sz="1275" b="0">
+                <a:solidFill>
+                  <a:srgbClr val="607895"/>
+                </a:solidFill>
+                <a:latin typeface="Microsoft YaHei"/>
+                <a:ea typeface="Microsoft YaHei"/>
+                <a:cs typeface="Microsoft YaHei"/>
+              </a:rPr>
               <a:t>把研究能力转化为可用系统</a:t>
             </a:r>
           </a:p>
@@ -2171,7 +3334,4942 @@
     </p:spTree>
     <p:extLst>
       <p:ext uri="{BB962C8B-B14F-4D97-AF65-F5344CB8AC3E}">
-        <p14:creationId xmlns:p14="http://schemas.microsoft.com/office/powerpoint/2010/main" val="1708834279"/>
+        <p14:creationId xmlns:p14="http://schemas.microsoft.com/office/powerpoint/2010/main" val="1764960531"/>
+      </p:ext>
+    </p:extLst>
+  </p:cSld>
+</p:sld>
+</file>
+
+<file path=ppt/slides/slide3.xml><?xml version="1.0" encoding="utf-8"?>
+<p:sld xmlns:p="http://schemas.openxmlformats.org/presentationml/2006/main">
+  <p:cSld>
+    <p:bg>
+      <p:bgPr>
+        <a:solidFill xmlns:a="http://schemas.openxmlformats.org/drawingml/2006/main">
+          <a:srgbClr val="F7FAFC"/>
+        </a:solidFill>
+      </p:bgPr>
+    </p:bg>
+    <p:spTree>
+      <p:nvGrpSpPr>
+        <p:cNvPr id="1" name=""/>
+        <p:cNvGrpSpPr/>
+        <p:nvPr/>
+      </p:nvGrpSpPr>
+      <p:grpSpPr>
+        <a:xfrm xmlns:a="http://schemas.openxmlformats.org/drawingml/2006/main"/>
+      </p:grpSpPr>
+      <p:sp>
+        <p:nvSpPr>
+          <p:cNvPr id="28" name="">
+            <a:extLst xmlns:a="http://schemas.openxmlformats.org/drawingml/2006/main">
+              <a:ext uri="{FF2B5EF4-FFF2-40B4-BE49-F238E27FC236}">
+                <a16:creationId xmlns:a16="http://schemas.microsoft.com/office/drawing/2014/main" id="{94017E25-45D8-45D6-B3AE-EE5336817AA3}"/>
+              </a:ext>
+            </a:extLst>
+          </p:cNvPr>
+          <p:cNvSpPr>
+            <a:spLocks xmlns:a="http://schemas.openxmlformats.org/drawingml/2006/main" noGrp="1"/>
+          </p:cNvSpPr>
+          <p:nvPr/>
+        </p:nvSpPr>
+        <p:spPr>
+          <a:xfrm xmlns:a="http://schemas.openxmlformats.org/drawingml/2006/main">
+            <a:off x="685800" y="400050"/>
+            <a:ext cx="8382000" cy="457200"/>
+          </a:xfrm>
+          <a:prstGeom xmlns:a="http://schemas.openxmlformats.org/drawingml/2006/main" prst="rect">
+            <a:avLst/>
+          </a:prstGeom>
+          <a:noFill xmlns:a="http://schemas.openxmlformats.org/drawingml/2006/main"/>
+          <a:ln xmlns:a="http://schemas.openxmlformats.org/drawingml/2006/main" w="0">
+            <a:noFill/>
+            <a:prstDash val="solid"/>
+          </a:ln>
+        </p:spPr>
+        <p:txBody>
+          <a:bodyPr xmlns:a="http://schemas.openxmlformats.org/drawingml/2006/main" lIns="0" tIns="0" rIns="0" bIns="0" anchor="ctr">
+            <a:normAutofit fontScale="100000"/>
+          </a:bodyPr>
+          <a:lstStyle xmlns:a="http://schemas.openxmlformats.org/drawingml/2006/main"/>
+          <a:p xmlns:a="http://schemas.openxmlformats.org/drawingml/2006/main">
+            <a:pPr algn="l">
+              <a:defRPr sz="2700" b="1">
+                <a:solidFill>
+                  <a:srgbClr val="1677C8"/>
+                </a:solidFill>
+                <a:latin typeface="Microsoft YaHei"/>
+                <a:ea typeface="Microsoft YaHei"/>
+                <a:cs typeface="Microsoft YaHei"/>
+              </a:defRPr>
+            </a:pPr>
+            <a:r>
+              <a:rPr sz="2700" b="1">
+                <a:solidFill>
+                  <a:srgbClr val="1677C8"/>
+                </a:solidFill>
+                <a:latin typeface="Microsoft YaHei"/>
+                <a:ea typeface="Microsoft YaHei"/>
+                <a:cs typeface="Microsoft YaHei"/>
+              </a:rPr>
+              <a:t>同级能力建设</a:t>
+            </a:r>
+          </a:p>
+        </p:txBody>
+      </p:sp>
+      <p:sp>
+        <p:nvSpPr>
+          <p:cNvPr id="2" name="">
+            <a:extLst xmlns:a="http://schemas.openxmlformats.org/drawingml/2006/main">
+              <a:ext uri="{FF2B5EF4-FFF2-40B4-BE49-F238E27FC236}">
+                <a16:creationId xmlns:a16="http://schemas.microsoft.com/office/drawing/2014/main" id="{5737FA6B-C617-4241-BD00-762EEAC32863}"/>
+              </a:ext>
+            </a:extLst>
+          </p:cNvPr>
+          <p:cNvSpPr>
+            <a:spLocks xmlns:a="http://schemas.openxmlformats.org/drawingml/2006/main" noGrp="1"/>
+          </p:cNvSpPr>
+          <p:nvPr/>
+        </p:nvSpPr>
+        <p:spPr>
+          <a:xfrm xmlns:a="http://schemas.openxmlformats.org/drawingml/2006/main">
+            <a:off x="704850" y="876300"/>
+            <a:ext cx="4953000" cy="247650"/>
+          </a:xfrm>
+          <a:prstGeom xmlns:a="http://schemas.openxmlformats.org/drawingml/2006/main" prst="rect">
+            <a:avLst/>
+          </a:prstGeom>
+          <a:noFill xmlns:a="http://schemas.openxmlformats.org/drawingml/2006/main"/>
+          <a:ln xmlns:a="http://schemas.openxmlformats.org/drawingml/2006/main" w="0">
+            <a:noFill/>
+            <a:prstDash val="solid"/>
+          </a:ln>
+        </p:spPr>
+        <p:txBody>
+          <a:bodyPr xmlns:a="http://schemas.openxmlformats.org/drawingml/2006/main" lIns="0" tIns="0" rIns="0" bIns="0" anchor="ctr">
+            <a:normAutofit fontScale="100000"/>
+          </a:bodyPr>
+          <a:lstStyle xmlns:a="http://schemas.openxmlformats.org/drawingml/2006/main"/>
+          <a:p xmlns:a="http://schemas.openxmlformats.org/drawingml/2006/main">
+            <a:pPr algn="l">
+              <a:defRPr sz="1200" b="0">
+                <a:solidFill>
+                  <a:srgbClr val="7C8A9A"/>
+                </a:solidFill>
+                <a:latin typeface="Microsoft YaHei"/>
+                <a:ea typeface="Microsoft YaHei"/>
+                <a:cs typeface="Microsoft YaHei"/>
+              </a:defRPr>
+            </a:pPr>
+            <a:r>
+              <a:rPr sz="1200" b="0">
+                <a:solidFill>
+                  <a:srgbClr val="7C8A9A"/>
+                </a:solidFill>
+                <a:latin typeface="Microsoft YaHei"/>
+                <a:ea typeface="Microsoft YaHei"/>
+                <a:cs typeface="Microsoft YaHei"/>
+              </a:rPr>
+              <a:t>并列关系 · 同级能力</a:t>
+            </a:r>
+          </a:p>
+        </p:txBody>
+      </p:sp>
+      <p:sp>
+        <p:nvSpPr>
+          <p:cNvPr id="3" name="PPAGENT_QA|parent=parallel-card-0|domains=parallel-card,parallel-content">
+            <a:extLst xmlns:a="http://schemas.openxmlformats.org/drawingml/2006/main">
+              <a:ext uri="{FF2B5EF4-FFF2-40B4-BE49-F238E27FC236}">
+                <a16:creationId xmlns:a16="http://schemas.microsoft.com/office/drawing/2014/main" id="{266E85F8-B847-4880-9892-1CB375D40979}"/>
+              </a:ext>
+            </a:extLst>
+          </p:cNvPr>
+          <p:cNvSpPr>
+            <a:spLocks xmlns:a="http://schemas.openxmlformats.org/drawingml/2006/main" noGrp="1"/>
+          </p:cNvSpPr>
+          <p:nvPr/>
+        </p:nvSpPr>
+        <p:spPr>
+          <a:xfrm xmlns:a="http://schemas.openxmlformats.org/drawingml/2006/main">
+            <a:off x="742950" y="1809750"/>
+            <a:ext cx="1988820" cy="3714750"/>
+          </a:xfrm>
+          <a:prstGeom xmlns:a="http://schemas.openxmlformats.org/drawingml/2006/main" prst="roundRect">
+            <a:avLst>
+              <a:gd name="adj" fmla="val 5747"/>
+            </a:avLst>
+          </a:prstGeom>
+          <a:solidFill xmlns:a="http://schemas.openxmlformats.org/drawingml/2006/main">
+            <a:srgbClr val="F7FBFF"/>
+          </a:solidFill>
+          <a:ln xmlns:a="http://schemas.openxmlformats.org/drawingml/2006/main" w="13335">
+            <a:solidFill>
+              <a:srgbClr val="A8CBEA"/>
+            </a:solidFill>
+            <a:prstDash val="solid"/>
+          </a:ln>
+        </p:spPr>
+        <p:style>
+          <a:lnRef xmlns:a="http://schemas.openxmlformats.org/drawingml/2006/main" idx="0"/>
+          <a:fillRef xmlns:a="http://schemas.openxmlformats.org/drawingml/2006/main" idx="0"/>
+          <a:effectRef xmlns:a="http://schemas.openxmlformats.org/drawingml/2006/main" idx="4"/>
+          <a:fontRef xmlns:a="http://schemas.openxmlformats.org/drawingml/2006/main" idx="major"/>
+        </p:style>
+      </p:sp>
+      <p:sp>
+        <p:nvSpPr>
+          <p:cNvPr id="4" name="PPAGENT_QA|within=parallel-card-0|role=accent-rail">
+            <a:extLst xmlns:a="http://schemas.openxmlformats.org/drawingml/2006/main">
+              <a:ext uri="{FF2B5EF4-FFF2-40B4-BE49-F238E27FC236}">
+                <a16:creationId xmlns:a16="http://schemas.microsoft.com/office/drawing/2014/main" id="{A513F7F1-411A-4E04-8FED-BDEB1EB6B498}"/>
+              </a:ext>
+            </a:extLst>
+          </p:cNvPr>
+          <p:cNvSpPr>
+            <a:spLocks xmlns:a="http://schemas.openxmlformats.org/drawingml/2006/main" noGrp="1"/>
+          </p:cNvSpPr>
+          <p:nvPr/>
+        </p:nvSpPr>
+        <p:spPr>
+          <a:xfrm xmlns:a="http://schemas.openxmlformats.org/drawingml/2006/main">
+            <a:off x="742950" y="1809750"/>
+            <a:ext cx="1988820" cy="76200"/>
+          </a:xfrm>
+          <a:prstGeom xmlns:a="http://schemas.openxmlformats.org/drawingml/2006/main" prst="rect">
+            <a:avLst/>
+          </a:prstGeom>
+          <a:solidFill xmlns:a="http://schemas.openxmlformats.org/drawingml/2006/main">
+            <a:srgbClr val="2F5EA8"/>
+          </a:solidFill>
+          <a:ln xmlns:a="http://schemas.openxmlformats.org/drawingml/2006/main" w="0">
+            <a:noFill/>
+            <a:prstDash val="solid"/>
+          </a:ln>
+        </p:spPr>
+      </p:sp>
+      <p:sp>
+        <p:nvSpPr>
+          <p:cNvPr id="5" name="PPAGENT_QA|within=parallel-card-0|role=index">
+            <a:extLst xmlns:a="http://schemas.openxmlformats.org/drawingml/2006/main">
+              <a:ext uri="{FF2B5EF4-FFF2-40B4-BE49-F238E27FC236}">
+                <a16:creationId xmlns:a16="http://schemas.microsoft.com/office/drawing/2014/main" id="{D94328C5-01B1-424E-B988-9A0A27B92F0A}"/>
+              </a:ext>
+            </a:extLst>
+          </p:cNvPr>
+          <p:cNvSpPr>
+            <a:spLocks xmlns:a="http://schemas.openxmlformats.org/drawingml/2006/main" noGrp="1"/>
+          </p:cNvSpPr>
+          <p:nvPr/>
+        </p:nvSpPr>
+        <p:spPr>
+          <a:xfrm xmlns:a="http://schemas.openxmlformats.org/drawingml/2006/main">
+            <a:off x="933450" y="2114550"/>
+            <a:ext cx="514350" cy="514350"/>
+          </a:xfrm>
+          <a:prstGeom xmlns:a="http://schemas.openxmlformats.org/drawingml/2006/main" prst="ellipse">
+            <a:avLst/>
+          </a:prstGeom>
+          <a:solidFill xmlns:a="http://schemas.openxmlformats.org/drawingml/2006/main">
+            <a:srgbClr val="2F5EA8"/>
+          </a:solidFill>
+          <a:ln xmlns:a="http://schemas.openxmlformats.org/drawingml/2006/main" w="19050">
+            <a:solidFill>
+              <a:srgbClr val="FFFFFF"/>
+            </a:solidFill>
+            <a:prstDash val="solid"/>
+          </a:ln>
+        </p:spPr>
+        <p:txBody>
+          <a:bodyPr xmlns:a="http://schemas.openxmlformats.org/drawingml/2006/main" lIns="0" tIns="0" rIns="0" bIns="0" anchor="ctr">
+            <a:normAutofit fontScale="100000"/>
+          </a:bodyPr>
+          <a:lstStyle xmlns:a="http://schemas.openxmlformats.org/drawingml/2006/main"/>
+          <a:p xmlns:a="http://schemas.openxmlformats.org/drawingml/2006/main">
+            <a:pPr algn="ctr">
+              <a:defRPr sz="1275" b="1">
+                <a:solidFill>
+                  <a:srgbClr val="FFFFFF"/>
+                </a:solidFill>
+                <a:latin typeface="Microsoft YaHei"/>
+                <a:ea typeface="Microsoft YaHei"/>
+                <a:cs typeface="Microsoft YaHei"/>
+              </a:defRPr>
+            </a:pPr>
+            <a:r>
+              <a:rPr sz="1275" b="1">
+                <a:solidFill>
+                  <a:srgbClr val="FFFFFF"/>
+                </a:solidFill>
+                <a:latin typeface="Microsoft YaHei"/>
+                <a:ea typeface="Microsoft YaHei"/>
+                <a:cs typeface="Microsoft YaHei"/>
+              </a:rPr>
+              <a:t>01</a:t>
+            </a:r>
+          </a:p>
+        </p:txBody>
+      </p:sp>
+      <p:sp>
+        <p:nvSpPr>
+          <p:cNvPr id="6" name="PPAGENT_QA|within=parallel-card-0|role=title">
+            <a:extLst xmlns:a="http://schemas.openxmlformats.org/drawingml/2006/main">
+              <a:ext uri="{FF2B5EF4-FFF2-40B4-BE49-F238E27FC236}">
+                <a16:creationId xmlns:a16="http://schemas.microsoft.com/office/drawing/2014/main" id="{E762150A-A033-4EA4-B9DF-745B6902B423}"/>
+              </a:ext>
+            </a:extLst>
+          </p:cNvPr>
+          <p:cNvSpPr>
+            <a:spLocks xmlns:a="http://schemas.openxmlformats.org/drawingml/2006/main" noGrp="1"/>
+          </p:cNvSpPr>
+          <p:nvPr/>
+        </p:nvSpPr>
+        <p:spPr>
+          <a:xfrm xmlns:a="http://schemas.openxmlformats.org/drawingml/2006/main">
+            <a:off x="933450" y="2952750"/>
+            <a:ext cx="1607820" cy="523875"/>
+          </a:xfrm>
+          <a:prstGeom xmlns:a="http://schemas.openxmlformats.org/drawingml/2006/main" prst="rect">
+            <a:avLst/>
+          </a:prstGeom>
+          <a:noFill xmlns:a="http://schemas.openxmlformats.org/drawingml/2006/main"/>
+          <a:ln xmlns:a="http://schemas.openxmlformats.org/drawingml/2006/main" w="0">
+            <a:noFill/>
+            <a:prstDash val="solid"/>
+          </a:ln>
+        </p:spPr>
+        <p:txBody>
+          <a:bodyPr xmlns:a="http://schemas.openxmlformats.org/drawingml/2006/main" lIns="0" tIns="0" rIns="0" bIns="0" anchor="ctr">
+            <a:normAutofit fontScale="100000"/>
+          </a:bodyPr>
+          <a:lstStyle xmlns:a="http://schemas.openxmlformats.org/drawingml/2006/main"/>
+          <a:p xmlns:a="http://schemas.openxmlformats.org/drawingml/2006/main">
+            <a:pPr algn="ctr">
+              <a:defRPr sz="1650" b="1">
+                <a:solidFill>
+                  <a:srgbClr val="174D87"/>
+                </a:solidFill>
+                <a:latin typeface="Microsoft YaHei"/>
+                <a:ea typeface="Microsoft YaHei"/>
+                <a:cs typeface="Microsoft YaHei"/>
+              </a:defRPr>
+            </a:pPr>
+            <a:r>
+              <a:rPr sz="1650" b="1">
+                <a:solidFill>
+                  <a:srgbClr val="174D87"/>
+                </a:solidFill>
+                <a:latin typeface="Microsoft YaHei"/>
+                <a:ea typeface="Microsoft YaHei"/>
+                <a:cs typeface="Microsoft YaHei"/>
+              </a:rPr>
+              <a:t>数据基础</a:t>
+            </a:r>
+          </a:p>
+        </p:txBody>
+      </p:sp>
+      <p:sp>
+        <p:nvSpPr>
+          <p:cNvPr id="7" name="PPAGENT_QA|within=parallel-card-0|role=body">
+            <a:extLst xmlns:a="http://schemas.openxmlformats.org/drawingml/2006/main">
+              <a:ext uri="{FF2B5EF4-FFF2-40B4-BE49-F238E27FC236}">
+                <a16:creationId xmlns:a16="http://schemas.microsoft.com/office/drawing/2014/main" id="{E1A66CE8-669F-49D5-B1FD-EDB6EB315C03}"/>
+              </a:ext>
+            </a:extLst>
+          </p:cNvPr>
+          <p:cNvSpPr>
+            <a:spLocks xmlns:a="http://schemas.openxmlformats.org/drawingml/2006/main" noGrp="1"/>
+          </p:cNvSpPr>
+          <p:nvPr/>
+        </p:nvSpPr>
+        <p:spPr>
+          <a:xfrm xmlns:a="http://schemas.openxmlformats.org/drawingml/2006/main">
+            <a:off x="952500" y="3638550"/>
+            <a:ext cx="1569720" cy="952500"/>
+          </a:xfrm>
+          <a:prstGeom xmlns:a="http://schemas.openxmlformats.org/drawingml/2006/main" prst="rect">
+            <a:avLst/>
+          </a:prstGeom>
+          <a:noFill xmlns:a="http://schemas.openxmlformats.org/drawingml/2006/main"/>
+          <a:ln xmlns:a="http://schemas.openxmlformats.org/drawingml/2006/main" w="0">
+            <a:noFill/>
+            <a:prstDash val="solid"/>
+          </a:ln>
+        </p:spPr>
+        <p:txBody>
+          <a:bodyPr xmlns:a="http://schemas.openxmlformats.org/drawingml/2006/main" lIns="0" tIns="0" rIns="0" bIns="0" anchor="t">
+            <a:normAutofit fontScale="100000"/>
+          </a:bodyPr>
+          <a:lstStyle xmlns:a="http://schemas.openxmlformats.org/drawingml/2006/main"/>
+          <a:p xmlns:a="http://schemas.openxmlformats.org/drawingml/2006/main">
+            <a:pPr algn="ctr">
+              <a:defRPr sz="1275" b="0">
+                <a:solidFill>
+                  <a:srgbClr val="607895"/>
+                </a:solidFill>
+                <a:latin typeface="Microsoft YaHei"/>
+                <a:ea typeface="Microsoft YaHei"/>
+                <a:cs typeface="Microsoft YaHei"/>
+              </a:defRPr>
+            </a:pPr>
+            <a:r>
+              <a:rPr sz="1275" b="0">
+                <a:solidFill>
+                  <a:srgbClr val="607895"/>
+                </a:solidFill>
+                <a:latin typeface="Microsoft YaHei"/>
+                <a:ea typeface="Microsoft YaHei"/>
+                <a:cs typeface="Microsoft YaHei"/>
+              </a:rPr>
+              <a:t>统一数据标准与治理口径</a:t>
+            </a:r>
+          </a:p>
+        </p:txBody>
+      </p:sp>
+      <p:sp>
+        <p:nvSpPr>
+          <p:cNvPr id="8" name="PPAGENT_QA|parent=parallel-card-1|domains=parallel-card,parallel-content">
+            <a:extLst xmlns:a="http://schemas.openxmlformats.org/drawingml/2006/main">
+              <a:ext uri="{FF2B5EF4-FFF2-40B4-BE49-F238E27FC236}">
+                <a16:creationId xmlns:a16="http://schemas.microsoft.com/office/drawing/2014/main" id="{93ED5EBC-D433-430F-86F9-5A36B5366E57}"/>
+              </a:ext>
+            </a:extLst>
+          </p:cNvPr>
+          <p:cNvSpPr>
+            <a:spLocks xmlns:a="http://schemas.openxmlformats.org/drawingml/2006/main" noGrp="1"/>
+          </p:cNvSpPr>
+          <p:nvPr/>
+        </p:nvSpPr>
+        <p:spPr>
+          <a:xfrm xmlns:a="http://schemas.openxmlformats.org/drawingml/2006/main">
+            <a:off x="2922270" y="1809750"/>
+            <a:ext cx="1988820" cy="3714750"/>
+          </a:xfrm>
+          <a:prstGeom xmlns:a="http://schemas.openxmlformats.org/drawingml/2006/main" prst="roundRect">
+            <a:avLst>
+              <a:gd name="adj" fmla="val 5747"/>
+            </a:avLst>
+          </a:prstGeom>
+          <a:solidFill xmlns:a="http://schemas.openxmlformats.org/drawingml/2006/main">
+            <a:srgbClr val="F1F8FF"/>
+          </a:solidFill>
+          <a:ln xmlns:a="http://schemas.openxmlformats.org/drawingml/2006/main" w="13335">
+            <a:solidFill>
+              <a:srgbClr val="7EB7ED"/>
+            </a:solidFill>
+            <a:prstDash val="solid"/>
+          </a:ln>
+        </p:spPr>
+        <p:style>
+          <a:lnRef xmlns:a="http://schemas.openxmlformats.org/drawingml/2006/main" idx="0"/>
+          <a:fillRef xmlns:a="http://schemas.openxmlformats.org/drawingml/2006/main" idx="0"/>
+          <a:effectRef xmlns:a="http://schemas.openxmlformats.org/drawingml/2006/main" idx="4"/>
+          <a:fontRef xmlns:a="http://schemas.openxmlformats.org/drawingml/2006/main" idx="major"/>
+        </p:style>
+      </p:sp>
+      <p:sp>
+        <p:nvSpPr>
+          <p:cNvPr id="9" name="PPAGENT_QA|within=parallel-card-1|role=accent-rail">
+            <a:extLst xmlns:a="http://schemas.openxmlformats.org/drawingml/2006/main">
+              <a:ext uri="{FF2B5EF4-FFF2-40B4-BE49-F238E27FC236}">
+                <a16:creationId xmlns:a16="http://schemas.microsoft.com/office/drawing/2014/main" id="{2E81DCF1-C0C7-4B55-9415-6CBA9B493744}"/>
+              </a:ext>
+            </a:extLst>
+          </p:cNvPr>
+          <p:cNvSpPr>
+            <a:spLocks xmlns:a="http://schemas.openxmlformats.org/drawingml/2006/main" noGrp="1"/>
+          </p:cNvSpPr>
+          <p:nvPr/>
+        </p:nvSpPr>
+        <p:spPr>
+          <a:xfrm xmlns:a="http://schemas.openxmlformats.org/drawingml/2006/main">
+            <a:off x="2922270" y="1809750"/>
+            <a:ext cx="1988820" cy="76200"/>
+          </a:xfrm>
+          <a:prstGeom xmlns:a="http://schemas.openxmlformats.org/drawingml/2006/main" prst="rect">
+            <a:avLst/>
+          </a:prstGeom>
+          <a:solidFill xmlns:a="http://schemas.openxmlformats.org/drawingml/2006/main">
+            <a:srgbClr val="4C88E8"/>
+          </a:solidFill>
+          <a:ln xmlns:a="http://schemas.openxmlformats.org/drawingml/2006/main" w="0">
+            <a:noFill/>
+            <a:prstDash val="solid"/>
+          </a:ln>
+        </p:spPr>
+      </p:sp>
+      <p:sp>
+        <p:nvSpPr>
+          <p:cNvPr id="10" name="PPAGENT_QA|within=parallel-card-1|role=index">
+            <a:extLst xmlns:a="http://schemas.openxmlformats.org/drawingml/2006/main">
+              <a:ext uri="{FF2B5EF4-FFF2-40B4-BE49-F238E27FC236}">
+                <a16:creationId xmlns:a16="http://schemas.microsoft.com/office/drawing/2014/main" id="{76E8D6DF-E24F-4F6B-A0AB-48F90D06F8D9}"/>
+              </a:ext>
+            </a:extLst>
+          </p:cNvPr>
+          <p:cNvSpPr>
+            <a:spLocks xmlns:a="http://schemas.openxmlformats.org/drawingml/2006/main" noGrp="1"/>
+          </p:cNvSpPr>
+          <p:nvPr/>
+        </p:nvSpPr>
+        <p:spPr>
+          <a:xfrm xmlns:a="http://schemas.openxmlformats.org/drawingml/2006/main">
+            <a:off x="3112770" y="2114550"/>
+            <a:ext cx="514350" cy="514350"/>
+          </a:xfrm>
+          <a:prstGeom xmlns:a="http://schemas.openxmlformats.org/drawingml/2006/main" prst="ellipse">
+            <a:avLst/>
+          </a:prstGeom>
+          <a:solidFill xmlns:a="http://schemas.openxmlformats.org/drawingml/2006/main">
+            <a:srgbClr val="4C88E8"/>
+          </a:solidFill>
+          <a:ln xmlns:a="http://schemas.openxmlformats.org/drawingml/2006/main" w="19050">
+            <a:solidFill>
+              <a:srgbClr val="FFFFFF"/>
+            </a:solidFill>
+            <a:prstDash val="solid"/>
+          </a:ln>
+        </p:spPr>
+        <p:txBody>
+          <a:bodyPr xmlns:a="http://schemas.openxmlformats.org/drawingml/2006/main" lIns="0" tIns="0" rIns="0" bIns="0" anchor="ctr">
+            <a:normAutofit fontScale="100000"/>
+          </a:bodyPr>
+          <a:lstStyle xmlns:a="http://schemas.openxmlformats.org/drawingml/2006/main"/>
+          <a:p xmlns:a="http://schemas.openxmlformats.org/drawingml/2006/main">
+            <a:pPr algn="ctr">
+              <a:defRPr sz="1275" b="1">
+                <a:solidFill>
+                  <a:srgbClr val="FFFFFF"/>
+                </a:solidFill>
+                <a:latin typeface="Microsoft YaHei"/>
+                <a:ea typeface="Microsoft YaHei"/>
+                <a:cs typeface="Microsoft YaHei"/>
+              </a:defRPr>
+            </a:pPr>
+            <a:r>
+              <a:rPr sz="1275" b="1">
+                <a:solidFill>
+                  <a:srgbClr val="FFFFFF"/>
+                </a:solidFill>
+                <a:latin typeface="Microsoft YaHei"/>
+                <a:ea typeface="Microsoft YaHei"/>
+                <a:cs typeface="Microsoft YaHei"/>
+              </a:rPr>
+              <a:t>02</a:t>
+            </a:r>
+          </a:p>
+        </p:txBody>
+      </p:sp>
+      <p:sp>
+        <p:nvSpPr>
+          <p:cNvPr id="11" name="PPAGENT_QA|within=parallel-card-1|role=title">
+            <a:extLst xmlns:a="http://schemas.openxmlformats.org/drawingml/2006/main">
+              <a:ext uri="{FF2B5EF4-FFF2-40B4-BE49-F238E27FC236}">
+                <a16:creationId xmlns:a16="http://schemas.microsoft.com/office/drawing/2014/main" id="{74CA3C28-E1AB-48DF-93A1-06C0AF2DF20C}"/>
+              </a:ext>
+            </a:extLst>
+          </p:cNvPr>
+          <p:cNvSpPr>
+            <a:spLocks xmlns:a="http://schemas.openxmlformats.org/drawingml/2006/main" noGrp="1"/>
+          </p:cNvSpPr>
+          <p:nvPr/>
+        </p:nvSpPr>
+        <p:spPr>
+          <a:xfrm xmlns:a="http://schemas.openxmlformats.org/drawingml/2006/main">
+            <a:off x="3112770" y="2952750"/>
+            <a:ext cx="1607820" cy="523875"/>
+          </a:xfrm>
+          <a:prstGeom xmlns:a="http://schemas.openxmlformats.org/drawingml/2006/main" prst="rect">
+            <a:avLst/>
+          </a:prstGeom>
+          <a:noFill xmlns:a="http://schemas.openxmlformats.org/drawingml/2006/main"/>
+          <a:ln xmlns:a="http://schemas.openxmlformats.org/drawingml/2006/main" w="0">
+            <a:noFill/>
+            <a:prstDash val="solid"/>
+          </a:ln>
+        </p:spPr>
+        <p:txBody>
+          <a:bodyPr xmlns:a="http://schemas.openxmlformats.org/drawingml/2006/main" lIns="0" tIns="0" rIns="0" bIns="0" anchor="ctr">
+            <a:normAutofit fontScale="100000"/>
+          </a:bodyPr>
+          <a:lstStyle xmlns:a="http://schemas.openxmlformats.org/drawingml/2006/main"/>
+          <a:p xmlns:a="http://schemas.openxmlformats.org/drawingml/2006/main">
+            <a:pPr algn="ctr">
+              <a:defRPr sz="1650" b="1">
+                <a:solidFill>
+                  <a:srgbClr val="174D87"/>
+                </a:solidFill>
+                <a:latin typeface="Microsoft YaHei"/>
+                <a:ea typeface="Microsoft YaHei"/>
+                <a:cs typeface="Microsoft YaHei"/>
+              </a:defRPr>
+            </a:pPr>
+            <a:r>
+              <a:rPr sz="1650" b="1">
+                <a:solidFill>
+                  <a:srgbClr val="174D87"/>
+                </a:solidFill>
+                <a:latin typeface="Microsoft YaHei"/>
+                <a:ea typeface="Microsoft YaHei"/>
+                <a:cs typeface="Microsoft YaHei"/>
+              </a:rPr>
+              <a:t>模型能力</a:t>
+            </a:r>
+          </a:p>
+        </p:txBody>
+      </p:sp>
+      <p:sp>
+        <p:nvSpPr>
+          <p:cNvPr id="12" name="PPAGENT_QA|within=parallel-card-1|role=body">
+            <a:extLst xmlns:a="http://schemas.openxmlformats.org/drawingml/2006/main">
+              <a:ext uri="{FF2B5EF4-FFF2-40B4-BE49-F238E27FC236}">
+                <a16:creationId xmlns:a16="http://schemas.microsoft.com/office/drawing/2014/main" id="{5A962D40-B132-471A-BE87-5A5FE20E50D1}"/>
+              </a:ext>
+            </a:extLst>
+          </p:cNvPr>
+          <p:cNvSpPr>
+            <a:spLocks xmlns:a="http://schemas.openxmlformats.org/drawingml/2006/main" noGrp="1"/>
+          </p:cNvSpPr>
+          <p:nvPr/>
+        </p:nvSpPr>
+        <p:spPr>
+          <a:xfrm xmlns:a="http://schemas.openxmlformats.org/drawingml/2006/main">
+            <a:off x="3131820" y="3638550"/>
+            <a:ext cx="1569720" cy="952500"/>
+          </a:xfrm>
+          <a:prstGeom xmlns:a="http://schemas.openxmlformats.org/drawingml/2006/main" prst="rect">
+            <a:avLst/>
+          </a:prstGeom>
+          <a:noFill xmlns:a="http://schemas.openxmlformats.org/drawingml/2006/main"/>
+          <a:ln xmlns:a="http://schemas.openxmlformats.org/drawingml/2006/main" w="0">
+            <a:noFill/>
+            <a:prstDash val="solid"/>
+          </a:ln>
+        </p:spPr>
+        <p:txBody>
+          <a:bodyPr xmlns:a="http://schemas.openxmlformats.org/drawingml/2006/main" lIns="0" tIns="0" rIns="0" bIns="0" anchor="t">
+            <a:normAutofit fontScale="100000"/>
+          </a:bodyPr>
+          <a:lstStyle xmlns:a="http://schemas.openxmlformats.org/drawingml/2006/main"/>
+          <a:p xmlns:a="http://schemas.openxmlformats.org/drawingml/2006/main">
+            <a:pPr algn="ctr">
+              <a:defRPr sz="1275" b="0">
+                <a:solidFill>
+                  <a:srgbClr val="607895"/>
+                </a:solidFill>
+                <a:latin typeface="Microsoft YaHei"/>
+                <a:ea typeface="Microsoft YaHei"/>
+                <a:cs typeface="Microsoft YaHei"/>
+              </a:defRPr>
+            </a:pPr>
+            <a:r>
+              <a:rPr sz="1275" b="0">
+                <a:solidFill>
+                  <a:srgbClr val="607895"/>
+                </a:solidFill>
+                <a:latin typeface="Microsoft YaHei"/>
+                <a:ea typeface="Microsoft YaHei"/>
+                <a:cs typeface="Microsoft YaHei"/>
+              </a:rPr>
+              <a:t>沉淀可复用的建模方法</a:t>
+            </a:r>
+          </a:p>
+        </p:txBody>
+      </p:sp>
+      <p:sp>
+        <p:nvSpPr>
+          <p:cNvPr id="13" name="PPAGENT_QA|parent=parallel-card-2|domains=parallel-card,parallel-content">
+            <a:extLst xmlns:a="http://schemas.openxmlformats.org/drawingml/2006/main">
+              <a:ext uri="{FF2B5EF4-FFF2-40B4-BE49-F238E27FC236}">
+                <a16:creationId xmlns:a16="http://schemas.microsoft.com/office/drawing/2014/main" id="{D9781DD0-4461-45E7-9FB7-DB5D3E85EDE9}"/>
+              </a:ext>
+            </a:extLst>
+          </p:cNvPr>
+          <p:cNvSpPr>
+            <a:spLocks xmlns:a="http://schemas.openxmlformats.org/drawingml/2006/main" noGrp="1"/>
+          </p:cNvSpPr>
+          <p:nvPr/>
+        </p:nvSpPr>
+        <p:spPr>
+          <a:xfrm xmlns:a="http://schemas.openxmlformats.org/drawingml/2006/main">
+            <a:off x="5101590" y="1809750"/>
+            <a:ext cx="1988820" cy="3714750"/>
+          </a:xfrm>
+          <a:prstGeom xmlns:a="http://schemas.openxmlformats.org/drawingml/2006/main" prst="roundRect">
+            <a:avLst>
+              <a:gd name="adj" fmla="val 5747"/>
+            </a:avLst>
+          </a:prstGeom>
+          <a:solidFill xmlns:a="http://schemas.openxmlformats.org/drawingml/2006/main">
+            <a:srgbClr val="F7FBFF"/>
+          </a:solidFill>
+          <a:ln xmlns:a="http://schemas.openxmlformats.org/drawingml/2006/main" w="13335">
+            <a:solidFill>
+              <a:srgbClr val="A8CBEA"/>
+            </a:solidFill>
+            <a:prstDash val="solid"/>
+          </a:ln>
+        </p:spPr>
+        <p:style>
+          <a:lnRef xmlns:a="http://schemas.openxmlformats.org/drawingml/2006/main" idx="0"/>
+          <a:fillRef xmlns:a="http://schemas.openxmlformats.org/drawingml/2006/main" idx="0"/>
+          <a:effectRef xmlns:a="http://schemas.openxmlformats.org/drawingml/2006/main" idx="4"/>
+          <a:fontRef xmlns:a="http://schemas.openxmlformats.org/drawingml/2006/main" idx="major"/>
+        </p:style>
+      </p:sp>
+      <p:sp>
+        <p:nvSpPr>
+          <p:cNvPr id="14" name="PPAGENT_QA|within=parallel-card-2|role=accent-rail">
+            <a:extLst xmlns:a="http://schemas.openxmlformats.org/drawingml/2006/main">
+              <a:ext uri="{FF2B5EF4-FFF2-40B4-BE49-F238E27FC236}">
+                <a16:creationId xmlns:a16="http://schemas.microsoft.com/office/drawing/2014/main" id="{02AC6A7D-0464-4EEC-B519-BF23DDEC25FC}"/>
+              </a:ext>
+            </a:extLst>
+          </p:cNvPr>
+          <p:cNvSpPr>
+            <a:spLocks xmlns:a="http://schemas.openxmlformats.org/drawingml/2006/main" noGrp="1"/>
+          </p:cNvSpPr>
+          <p:nvPr/>
+        </p:nvSpPr>
+        <p:spPr>
+          <a:xfrm xmlns:a="http://schemas.openxmlformats.org/drawingml/2006/main">
+            <a:off x="5101590" y="1809750"/>
+            <a:ext cx="1988820" cy="76200"/>
+          </a:xfrm>
+          <a:prstGeom xmlns:a="http://schemas.openxmlformats.org/drawingml/2006/main" prst="rect">
+            <a:avLst/>
+          </a:prstGeom>
+          <a:solidFill xmlns:a="http://schemas.openxmlformats.org/drawingml/2006/main">
+            <a:srgbClr val="2F5EA8"/>
+          </a:solidFill>
+          <a:ln xmlns:a="http://schemas.openxmlformats.org/drawingml/2006/main" w="0">
+            <a:noFill/>
+            <a:prstDash val="solid"/>
+          </a:ln>
+        </p:spPr>
+      </p:sp>
+      <p:sp>
+        <p:nvSpPr>
+          <p:cNvPr id="15" name="PPAGENT_QA|within=parallel-card-2|role=index">
+            <a:extLst xmlns:a="http://schemas.openxmlformats.org/drawingml/2006/main">
+              <a:ext uri="{FF2B5EF4-FFF2-40B4-BE49-F238E27FC236}">
+                <a16:creationId xmlns:a16="http://schemas.microsoft.com/office/drawing/2014/main" id="{E4E8F979-55D1-4865-B1F7-B831C2885F45}"/>
+              </a:ext>
+            </a:extLst>
+          </p:cNvPr>
+          <p:cNvSpPr>
+            <a:spLocks xmlns:a="http://schemas.openxmlformats.org/drawingml/2006/main" noGrp="1"/>
+          </p:cNvSpPr>
+          <p:nvPr/>
+        </p:nvSpPr>
+        <p:spPr>
+          <a:xfrm xmlns:a="http://schemas.openxmlformats.org/drawingml/2006/main">
+            <a:off x="5292090" y="2114550"/>
+            <a:ext cx="514350" cy="514350"/>
+          </a:xfrm>
+          <a:prstGeom xmlns:a="http://schemas.openxmlformats.org/drawingml/2006/main" prst="ellipse">
+            <a:avLst/>
+          </a:prstGeom>
+          <a:solidFill xmlns:a="http://schemas.openxmlformats.org/drawingml/2006/main">
+            <a:srgbClr val="2F5EA8"/>
+          </a:solidFill>
+          <a:ln xmlns:a="http://schemas.openxmlformats.org/drawingml/2006/main" w="19050">
+            <a:solidFill>
+              <a:srgbClr val="FFFFFF"/>
+            </a:solidFill>
+            <a:prstDash val="solid"/>
+          </a:ln>
+        </p:spPr>
+        <p:txBody>
+          <a:bodyPr xmlns:a="http://schemas.openxmlformats.org/drawingml/2006/main" lIns="0" tIns="0" rIns="0" bIns="0" anchor="ctr">
+            <a:normAutofit fontScale="100000"/>
+          </a:bodyPr>
+          <a:lstStyle xmlns:a="http://schemas.openxmlformats.org/drawingml/2006/main"/>
+          <a:p xmlns:a="http://schemas.openxmlformats.org/drawingml/2006/main">
+            <a:pPr algn="ctr">
+              <a:defRPr sz="1275" b="1">
+                <a:solidFill>
+                  <a:srgbClr val="FFFFFF"/>
+                </a:solidFill>
+                <a:latin typeface="Microsoft YaHei"/>
+                <a:ea typeface="Microsoft YaHei"/>
+                <a:cs typeface="Microsoft YaHei"/>
+              </a:defRPr>
+            </a:pPr>
+            <a:r>
+              <a:rPr sz="1275" b="1">
+                <a:solidFill>
+                  <a:srgbClr val="FFFFFF"/>
+                </a:solidFill>
+                <a:latin typeface="Microsoft YaHei"/>
+                <a:ea typeface="Microsoft YaHei"/>
+                <a:cs typeface="Microsoft YaHei"/>
+              </a:rPr>
+              <a:t>03</a:t>
+            </a:r>
+          </a:p>
+        </p:txBody>
+      </p:sp>
+      <p:sp>
+        <p:nvSpPr>
+          <p:cNvPr id="16" name="PPAGENT_QA|within=parallel-card-2|role=title">
+            <a:extLst xmlns:a="http://schemas.openxmlformats.org/drawingml/2006/main">
+              <a:ext uri="{FF2B5EF4-FFF2-40B4-BE49-F238E27FC236}">
+                <a16:creationId xmlns:a16="http://schemas.microsoft.com/office/drawing/2014/main" id="{521752F5-1CF1-4935-86B4-E0F30CF8662E}"/>
+              </a:ext>
+            </a:extLst>
+          </p:cNvPr>
+          <p:cNvSpPr>
+            <a:spLocks xmlns:a="http://schemas.openxmlformats.org/drawingml/2006/main" noGrp="1"/>
+          </p:cNvSpPr>
+          <p:nvPr/>
+        </p:nvSpPr>
+        <p:spPr>
+          <a:xfrm xmlns:a="http://schemas.openxmlformats.org/drawingml/2006/main">
+            <a:off x="5292090" y="2952750"/>
+            <a:ext cx="1607820" cy="523875"/>
+          </a:xfrm>
+          <a:prstGeom xmlns:a="http://schemas.openxmlformats.org/drawingml/2006/main" prst="rect">
+            <a:avLst/>
+          </a:prstGeom>
+          <a:noFill xmlns:a="http://schemas.openxmlformats.org/drawingml/2006/main"/>
+          <a:ln xmlns:a="http://schemas.openxmlformats.org/drawingml/2006/main" w="0">
+            <a:noFill/>
+            <a:prstDash val="solid"/>
+          </a:ln>
+        </p:spPr>
+        <p:txBody>
+          <a:bodyPr xmlns:a="http://schemas.openxmlformats.org/drawingml/2006/main" lIns="0" tIns="0" rIns="0" bIns="0" anchor="ctr">
+            <a:normAutofit fontScale="100000"/>
+          </a:bodyPr>
+          <a:lstStyle xmlns:a="http://schemas.openxmlformats.org/drawingml/2006/main"/>
+          <a:p xmlns:a="http://schemas.openxmlformats.org/drawingml/2006/main">
+            <a:pPr algn="ctr">
+              <a:defRPr sz="1650" b="1">
+                <a:solidFill>
+                  <a:srgbClr val="174D87"/>
+                </a:solidFill>
+                <a:latin typeface="Microsoft YaHei"/>
+                <a:ea typeface="Microsoft YaHei"/>
+                <a:cs typeface="Microsoft YaHei"/>
+              </a:defRPr>
+            </a:pPr>
+            <a:r>
+              <a:rPr sz="1650" b="1">
+                <a:solidFill>
+                  <a:srgbClr val="174D87"/>
+                </a:solidFill>
+                <a:latin typeface="Microsoft YaHei"/>
+                <a:ea typeface="Microsoft YaHei"/>
+                <a:cs typeface="Microsoft YaHei"/>
+              </a:rPr>
+              <a:t>验证体系</a:t>
+            </a:r>
+          </a:p>
+        </p:txBody>
+      </p:sp>
+      <p:sp>
+        <p:nvSpPr>
+          <p:cNvPr id="17" name="PPAGENT_QA|within=parallel-card-2|role=body">
+            <a:extLst xmlns:a="http://schemas.openxmlformats.org/drawingml/2006/main">
+              <a:ext uri="{FF2B5EF4-FFF2-40B4-BE49-F238E27FC236}">
+                <a16:creationId xmlns:a16="http://schemas.microsoft.com/office/drawing/2014/main" id="{BCF2EFF8-72A8-4E9A-A2D1-4BBB4AE274A5}"/>
+              </a:ext>
+            </a:extLst>
+          </p:cNvPr>
+          <p:cNvSpPr>
+            <a:spLocks xmlns:a="http://schemas.openxmlformats.org/drawingml/2006/main" noGrp="1"/>
+          </p:cNvSpPr>
+          <p:nvPr/>
+        </p:nvSpPr>
+        <p:spPr>
+          <a:xfrm xmlns:a="http://schemas.openxmlformats.org/drawingml/2006/main">
+            <a:off x="5311140" y="3638550"/>
+            <a:ext cx="1569720" cy="952500"/>
+          </a:xfrm>
+          <a:prstGeom xmlns:a="http://schemas.openxmlformats.org/drawingml/2006/main" prst="rect">
+            <a:avLst/>
+          </a:prstGeom>
+          <a:noFill xmlns:a="http://schemas.openxmlformats.org/drawingml/2006/main"/>
+          <a:ln xmlns:a="http://schemas.openxmlformats.org/drawingml/2006/main" w="0">
+            <a:noFill/>
+            <a:prstDash val="solid"/>
+          </a:ln>
+        </p:spPr>
+        <p:txBody>
+          <a:bodyPr xmlns:a="http://schemas.openxmlformats.org/drawingml/2006/main" lIns="0" tIns="0" rIns="0" bIns="0" anchor="t">
+            <a:normAutofit fontScale="100000"/>
+          </a:bodyPr>
+          <a:lstStyle xmlns:a="http://schemas.openxmlformats.org/drawingml/2006/main"/>
+          <a:p xmlns:a="http://schemas.openxmlformats.org/drawingml/2006/main">
+            <a:pPr algn="ctr">
+              <a:defRPr sz="1275" b="0">
+                <a:solidFill>
+                  <a:srgbClr val="607895"/>
+                </a:solidFill>
+                <a:latin typeface="Microsoft YaHei"/>
+                <a:ea typeface="Microsoft YaHei"/>
+                <a:cs typeface="Microsoft YaHei"/>
+              </a:defRPr>
+            </a:pPr>
+            <a:r>
+              <a:rPr sz="1275" b="0">
+                <a:solidFill>
+                  <a:srgbClr val="607895"/>
+                </a:solidFill>
+                <a:latin typeface="Microsoft YaHei"/>
+                <a:ea typeface="Microsoft YaHei"/>
+                <a:cs typeface="Microsoft YaHei"/>
+              </a:rPr>
+              <a:t>形成稳定实验与评估流程</a:t>
+            </a:r>
+          </a:p>
+        </p:txBody>
+      </p:sp>
+      <p:sp>
+        <p:nvSpPr>
+          <p:cNvPr id="18" name="PPAGENT_QA|parent=parallel-card-3|domains=parallel-card,parallel-content">
+            <a:extLst xmlns:a="http://schemas.openxmlformats.org/drawingml/2006/main">
+              <a:ext uri="{FF2B5EF4-FFF2-40B4-BE49-F238E27FC236}">
+                <a16:creationId xmlns:a16="http://schemas.microsoft.com/office/drawing/2014/main" id="{E908E7B3-0E47-4399-A410-81ADA7A2568B}"/>
+              </a:ext>
+            </a:extLst>
+          </p:cNvPr>
+          <p:cNvSpPr>
+            <a:spLocks xmlns:a="http://schemas.openxmlformats.org/drawingml/2006/main" noGrp="1"/>
+          </p:cNvSpPr>
+          <p:nvPr/>
+        </p:nvSpPr>
+        <p:spPr>
+          <a:xfrm xmlns:a="http://schemas.openxmlformats.org/drawingml/2006/main">
+            <a:off x="7280910" y="1809750"/>
+            <a:ext cx="1988820" cy="3714750"/>
+          </a:xfrm>
+          <a:prstGeom xmlns:a="http://schemas.openxmlformats.org/drawingml/2006/main" prst="roundRect">
+            <a:avLst>
+              <a:gd name="adj" fmla="val 5747"/>
+            </a:avLst>
+          </a:prstGeom>
+          <a:solidFill xmlns:a="http://schemas.openxmlformats.org/drawingml/2006/main">
+            <a:srgbClr val="F1F8FF"/>
+          </a:solidFill>
+          <a:ln xmlns:a="http://schemas.openxmlformats.org/drawingml/2006/main" w="13335">
+            <a:solidFill>
+              <a:srgbClr val="7EB7ED"/>
+            </a:solidFill>
+            <a:prstDash val="solid"/>
+          </a:ln>
+        </p:spPr>
+        <p:style>
+          <a:lnRef xmlns:a="http://schemas.openxmlformats.org/drawingml/2006/main" idx="0"/>
+          <a:fillRef xmlns:a="http://schemas.openxmlformats.org/drawingml/2006/main" idx="0"/>
+          <a:effectRef xmlns:a="http://schemas.openxmlformats.org/drawingml/2006/main" idx="4"/>
+          <a:fontRef xmlns:a="http://schemas.openxmlformats.org/drawingml/2006/main" idx="major"/>
+        </p:style>
+      </p:sp>
+      <p:sp>
+        <p:nvSpPr>
+          <p:cNvPr id="19" name="PPAGENT_QA|within=parallel-card-3|role=accent-rail">
+            <a:extLst xmlns:a="http://schemas.openxmlformats.org/drawingml/2006/main">
+              <a:ext uri="{FF2B5EF4-FFF2-40B4-BE49-F238E27FC236}">
+                <a16:creationId xmlns:a16="http://schemas.microsoft.com/office/drawing/2014/main" id="{1829847B-C5F4-46AA-8F87-1642B93EE076}"/>
+              </a:ext>
+            </a:extLst>
+          </p:cNvPr>
+          <p:cNvSpPr>
+            <a:spLocks xmlns:a="http://schemas.openxmlformats.org/drawingml/2006/main" noGrp="1"/>
+          </p:cNvSpPr>
+          <p:nvPr/>
+        </p:nvSpPr>
+        <p:spPr>
+          <a:xfrm xmlns:a="http://schemas.openxmlformats.org/drawingml/2006/main">
+            <a:off x="7280910" y="1809750"/>
+            <a:ext cx="1988820" cy="76200"/>
+          </a:xfrm>
+          <a:prstGeom xmlns:a="http://schemas.openxmlformats.org/drawingml/2006/main" prst="rect">
+            <a:avLst/>
+          </a:prstGeom>
+          <a:solidFill xmlns:a="http://schemas.openxmlformats.org/drawingml/2006/main">
+            <a:srgbClr val="4C88E8"/>
+          </a:solidFill>
+          <a:ln xmlns:a="http://schemas.openxmlformats.org/drawingml/2006/main" w="0">
+            <a:noFill/>
+            <a:prstDash val="solid"/>
+          </a:ln>
+        </p:spPr>
+      </p:sp>
+      <p:sp>
+        <p:nvSpPr>
+          <p:cNvPr id="20" name="PPAGENT_QA|within=parallel-card-3|role=index">
+            <a:extLst xmlns:a="http://schemas.openxmlformats.org/drawingml/2006/main">
+              <a:ext uri="{FF2B5EF4-FFF2-40B4-BE49-F238E27FC236}">
+                <a16:creationId xmlns:a16="http://schemas.microsoft.com/office/drawing/2014/main" id="{D9CCDD33-4899-4499-A562-4850A77B428B}"/>
+              </a:ext>
+            </a:extLst>
+          </p:cNvPr>
+          <p:cNvSpPr>
+            <a:spLocks xmlns:a="http://schemas.openxmlformats.org/drawingml/2006/main" noGrp="1"/>
+          </p:cNvSpPr>
+          <p:nvPr/>
+        </p:nvSpPr>
+        <p:spPr>
+          <a:xfrm xmlns:a="http://schemas.openxmlformats.org/drawingml/2006/main">
+            <a:off x="7471410" y="2114550"/>
+            <a:ext cx="514350" cy="514350"/>
+          </a:xfrm>
+          <a:prstGeom xmlns:a="http://schemas.openxmlformats.org/drawingml/2006/main" prst="ellipse">
+            <a:avLst/>
+          </a:prstGeom>
+          <a:solidFill xmlns:a="http://schemas.openxmlformats.org/drawingml/2006/main">
+            <a:srgbClr val="4C88E8"/>
+          </a:solidFill>
+          <a:ln xmlns:a="http://schemas.openxmlformats.org/drawingml/2006/main" w="19050">
+            <a:solidFill>
+              <a:srgbClr val="FFFFFF"/>
+            </a:solidFill>
+            <a:prstDash val="solid"/>
+          </a:ln>
+        </p:spPr>
+        <p:txBody>
+          <a:bodyPr xmlns:a="http://schemas.openxmlformats.org/drawingml/2006/main" lIns="0" tIns="0" rIns="0" bIns="0" anchor="ctr">
+            <a:normAutofit fontScale="100000"/>
+          </a:bodyPr>
+          <a:lstStyle xmlns:a="http://schemas.openxmlformats.org/drawingml/2006/main"/>
+          <a:p xmlns:a="http://schemas.openxmlformats.org/drawingml/2006/main">
+            <a:pPr algn="ctr">
+              <a:defRPr sz="1275" b="1">
+                <a:solidFill>
+                  <a:srgbClr val="FFFFFF"/>
+                </a:solidFill>
+                <a:latin typeface="Microsoft YaHei"/>
+                <a:ea typeface="Microsoft YaHei"/>
+                <a:cs typeface="Microsoft YaHei"/>
+              </a:defRPr>
+            </a:pPr>
+            <a:r>
+              <a:rPr sz="1275" b="1">
+                <a:solidFill>
+                  <a:srgbClr val="FFFFFF"/>
+                </a:solidFill>
+                <a:latin typeface="Microsoft YaHei"/>
+                <a:ea typeface="Microsoft YaHei"/>
+                <a:cs typeface="Microsoft YaHei"/>
+              </a:rPr>
+              <a:t>04</a:t>
+            </a:r>
+          </a:p>
+        </p:txBody>
+      </p:sp>
+      <p:sp>
+        <p:nvSpPr>
+          <p:cNvPr id="21" name="PPAGENT_QA|within=parallel-card-3|role=title">
+            <a:extLst xmlns:a="http://schemas.openxmlformats.org/drawingml/2006/main">
+              <a:ext uri="{FF2B5EF4-FFF2-40B4-BE49-F238E27FC236}">
+                <a16:creationId xmlns:a16="http://schemas.microsoft.com/office/drawing/2014/main" id="{6939C310-65E9-4681-BAEC-F18E23097DA0}"/>
+              </a:ext>
+            </a:extLst>
+          </p:cNvPr>
+          <p:cNvSpPr>
+            <a:spLocks xmlns:a="http://schemas.openxmlformats.org/drawingml/2006/main" noGrp="1"/>
+          </p:cNvSpPr>
+          <p:nvPr/>
+        </p:nvSpPr>
+        <p:spPr>
+          <a:xfrm xmlns:a="http://schemas.openxmlformats.org/drawingml/2006/main">
+            <a:off x="7471410" y="2952750"/>
+            <a:ext cx="1607820" cy="523875"/>
+          </a:xfrm>
+          <a:prstGeom xmlns:a="http://schemas.openxmlformats.org/drawingml/2006/main" prst="rect">
+            <a:avLst/>
+          </a:prstGeom>
+          <a:noFill xmlns:a="http://schemas.openxmlformats.org/drawingml/2006/main"/>
+          <a:ln xmlns:a="http://schemas.openxmlformats.org/drawingml/2006/main" w="0">
+            <a:noFill/>
+            <a:prstDash val="solid"/>
+          </a:ln>
+        </p:spPr>
+        <p:txBody>
+          <a:bodyPr xmlns:a="http://schemas.openxmlformats.org/drawingml/2006/main" lIns="0" tIns="0" rIns="0" bIns="0" anchor="ctr">
+            <a:normAutofit fontScale="100000"/>
+          </a:bodyPr>
+          <a:lstStyle xmlns:a="http://schemas.openxmlformats.org/drawingml/2006/main"/>
+          <a:p xmlns:a="http://schemas.openxmlformats.org/drawingml/2006/main">
+            <a:pPr algn="ctr">
+              <a:defRPr sz="1650" b="1">
+                <a:solidFill>
+                  <a:srgbClr val="174D87"/>
+                </a:solidFill>
+                <a:latin typeface="Microsoft YaHei"/>
+                <a:ea typeface="Microsoft YaHei"/>
+                <a:cs typeface="Microsoft YaHei"/>
+              </a:defRPr>
+            </a:pPr>
+            <a:r>
+              <a:rPr sz="1650" b="1">
+                <a:solidFill>
+                  <a:srgbClr val="174D87"/>
+                </a:solidFill>
+                <a:latin typeface="Microsoft YaHei"/>
+                <a:ea typeface="Microsoft YaHei"/>
+                <a:cs typeface="Microsoft YaHei"/>
+              </a:rPr>
+              <a:t>工程交付</a:t>
+            </a:r>
+          </a:p>
+        </p:txBody>
+      </p:sp>
+      <p:sp>
+        <p:nvSpPr>
+          <p:cNvPr id="22" name="PPAGENT_QA|within=parallel-card-3|role=body">
+            <a:extLst xmlns:a="http://schemas.openxmlformats.org/drawingml/2006/main">
+              <a:ext uri="{FF2B5EF4-FFF2-40B4-BE49-F238E27FC236}">
+                <a16:creationId xmlns:a16="http://schemas.microsoft.com/office/drawing/2014/main" id="{0B3F6AB0-6DF8-4A4F-8D0A-D349FF5AFE14}"/>
+              </a:ext>
+            </a:extLst>
+          </p:cNvPr>
+          <p:cNvSpPr>
+            <a:spLocks xmlns:a="http://schemas.openxmlformats.org/drawingml/2006/main" noGrp="1"/>
+          </p:cNvSpPr>
+          <p:nvPr/>
+        </p:nvSpPr>
+        <p:spPr>
+          <a:xfrm xmlns:a="http://schemas.openxmlformats.org/drawingml/2006/main">
+            <a:off x="7490460" y="3638550"/>
+            <a:ext cx="1569720" cy="952500"/>
+          </a:xfrm>
+          <a:prstGeom xmlns:a="http://schemas.openxmlformats.org/drawingml/2006/main" prst="rect">
+            <a:avLst/>
+          </a:prstGeom>
+          <a:noFill xmlns:a="http://schemas.openxmlformats.org/drawingml/2006/main"/>
+          <a:ln xmlns:a="http://schemas.openxmlformats.org/drawingml/2006/main" w="0">
+            <a:noFill/>
+            <a:prstDash val="solid"/>
+          </a:ln>
+        </p:spPr>
+        <p:txBody>
+          <a:bodyPr xmlns:a="http://schemas.openxmlformats.org/drawingml/2006/main" lIns="0" tIns="0" rIns="0" bIns="0" anchor="t">
+            <a:normAutofit fontScale="100000"/>
+          </a:bodyPr>
+          <a:lstStyle xmlns:a="http://schemas.openxmlformats.org/drawingml/2006/main"/>
+          <a:p xmlns:a="http://schemas.openxmlformats.org/drawingml/2006/main">
+            <a:pPr algn="ctr">
+              <a:defRPr sz="1275" b="0">
+                <a:solidFill>
+                  <a:srgbClr val="607895"/>
+                </a:solidFill>
+                <a:latin typeface="Microsoft YaHei"/>
+                <a:ea typeface="Microsoft YaHei"/>
+                <a:cs typeface="Microsoft YaHei"/>
+              </a:defRPr>
+            </a:pPr>
+            <a:r>
+              <a:rPr sz="1275" b="0">
+                <a:solidFill>
+                  <a:srgbClr val="607895"/>
+                </a:solidFill>
+                <a:latin typeface="Microsoft YaHei"/>
+                <a:ea typeface="Microsoft YaHei"/>
+                <a:cs typeface="Microsoft YaHei"/>
+              </a:rPr>
+              <a:t>把研究能力转化为可用系统</a:t>
+            </a:r>
+          </a:p>
+        </p:txBody>
+      </p:sp>
+      <p:sp>
+        <p:nvSpPr>
+          <p:cNvPr id="23" name="PPAGENT_QA|parent=parallel-card-4|domains=parallel-card,parallel-content">
+            <a:extLst xmlns:a="http://schemas.openxmlformats.org/drawingml/2006/main">
+              <a:ext uri="{FF2B5EF4-FFF2-40B4-BE49-F238E27FC236}">
+                <a16:creationId xmlns:a16="http://schemas.microsoft.com/office/drawing/2014/main" id="{15AD06D8-2B52-4B48-93B9-30B43B9AEBE9}"/>
+              </a:ext>
+            </a:extLst>
+          </p:cNvPr>
+          <p:cNvSpPr>
+            <a:spLocks xmlns:a="http://schemas.openxmlformats.org/drawingml/2006/main" noGrp="1"/>
+          </p:cNvSpPr>
+          <p:nvPr/>
+        </p:nvSpPr>
+        <p:spPr>
+          <a:xfrm xmlns:a="http://schemas.openxmlformats.org/drawingml/2006/main">
+            <a:off x="9460230" y="1809750"/>
+            <a:ext cx="1988820" cy="3714750"/>
+          </a:xfrm>
+          <a:prstGeom xmlns:a="http://schemas.openxmlformats.org/drawingml/2006/main" prst="roundRect">
+            <a:avLst>
+              <a:gd name="adj" fmla="val 5747"/>
+            </a:avLst>
+          </a:prstGeom>
+          <a:solidFill xmlns:a="http://schemas.openxmlformats.org/drawingml/2006/main">
+            <a:srgbClr val="F7FBFF"/>
+          </a:solidFill>
+          <a:ln xmlns:a="http://schemas.openxmlformats.org/drawingml/2006/main" w="13335">
+            <a:solidFill>
+              <a:srgbClr val="A8CBEA"/>
+            </a:solidFill>
+            <a:prstDash val="solid"/>
+          </a:ln>
+        </p:spPr>
+        <p:style>
+          <a:lnRef xmlns:a="http://schemas.openxmlformats.org/drawingml/2006/main" idx="0"/>
+          <a:fillRef xmlns:a="http://schemas.openxmlformats.org/drawingml/2006/main" idx="0"/>
+          <a:effectRef xmlns:a="http://schemas.openxmlformats.org/drawingml/2006/main" idx="4"/>
+          <a:fontRef xmlns:a="http://schemas.openxmlformats.org/drawingml/2006/main" idx="major"/>
+        </p:style>
+      </p:sp>
+      <p:sp>
+        <p:nvSpPr>
+          <p:cNvPr id="24" name="PPAGENT_QA|within=parallel-card-4|role=accent-rail">
+            <a:extLst xmlns:a="http://schemas.openxmlformats.org/drawingml/2006/main">
+              <a:ext uri="{FF2B5EF4-FFF2-40B4-BE49-F238E27FC236}">
+                <a16:creationId xmlns:a16="http://schemas.microsoft.com/office/drawing/2014/main" id="{7C762731-15B8-442D-B2DE-870A78DE02A0}"/>
+              </a:ext>
+            </a:extLst>
+          </p:cNvPr>
+          <p:cNvSpPr>
+            <a:spLocks xmlns:a="http://schemas.openxmlformats.org/drawingml/2006/main" noGrp="1"/>
+          </p:cNvSpPr>
+          <p:nvPr/>
+        </p:nvSpPr>
+        <p:spPr>
+          <a:xfrm xmlns:a="http://schemas.openxmlformats.org/drawingml/2006/main">
+            <a:off x="9460230" y="1809750"/>
+            <a:ext cx="1988820" cy="76200"/>
+          </a:xfrm>
+          <a:prstGeom xmlns:a="http://schemas.openxmlformats.org/drawingml/2006/main" prst="rect">
+            <a:avLst/>
+          </a:prstGeom>
+          <a:solidFill xmlns:a="http://schemas.openxmlformats.org/drawingml/2006/main">
+            <a:srgbClr val="2F5EA8"/>
+          </a:solidFill>
+          <a:ln xmlns:a="http://schemas.openxmlformats.org/drawingml/2006/main" w="0">
+            <a:noFill/>
+            <a:prstDash val="solid"/>
+          </a:ln>
+        </p:spPr>
+      </p:sp>
+      <p:sp>
+        <p:nvSpPr>
+          <p:cNvPr id="25" name="PPAGENT_QA|within=parallel-card-4|role=index">
+            <a:extLst xmlns:a="http://schemas.openxmlformats.org/drawingml/2006/main">
+              <a:ext uri="{FF2B5EF4-FFF2-40B4-BE49-F238E27FC236}">
+                <a16:creationId xmlns:a16="http://schemas.microsoft.com/office/drawing/2014/main" id="{1B421D14-36B8-49DE-AADD-AD5B43E91020}"/>
+              </a:ext>
+            </a:extLst>
+          </p:cNvPr>
+          <p:cNvSpPr>
+            <a:spLocks xmlns:a="http://schemas.openxmlformats.org/drawingml/2006/main" noGrp="1"/>
+          </p:cNvSpPr>
+          <p:nvPr/>
+        </p:nvSpPr>
+        <p:spPr>
+          <a:xfrm xmlns:a="http://schemas.openxmlformats.org/drawingml/2006/main">
+            <a:off x="9650730" y="2114550"/>
+            <a:ext cx="514350" cy="514350"/>
+          </a:xfrm>
+          <a:prstGeom xmlns:a="http://schemas.openxmlformats.org/drawingml/2006/main" prst="ellipse">
+            <a:avLst/>
+          </a:prstGeom>
+          <a:solidFill xmlns:a="http://schemas.openxmlformats.org/drawingml/2006/main">
+            <a:srgbClr val="2F5EA8"/>
+          </a:solidFill>
+          <a:ln xmlns:a="http://schemas.openxmlformats.org/drawingml/2006/main" w="19050">
+            <a:solidFill>
+              <a:srgbClr val="FFFFFF"/>
+            </a:solidFill>
+            <a:prstDash val="solid"/>
+          </a:ln>
+        </p:spPr>
+        <p:txBody>
+          <a:bodyPr xmlns:a="http://schemas.openxmlformats.org/drawingml/2006/main" lIns="0" tIns="0" rIns="0" bIns="0" anchor="ctr">
+            <a:normAutofit fontScale="100000"/>
+          </a:bodyPr>
+          <a:lstStyle xmlns:a="http://schemas.openxmlformats.org/drawingml/2006/main"/>
+          <a:p xmlns:a="http://schemas.openxmlformats.org/drawingml/2006/main">
+            <a:pPr algn="ctr">
+              <a:defRPr sz="1275" b="1">
+                <a:solidFill>
+                  <a:srgbClr val="FFFFFF"/>
+                </a:solidFill>
+                <a:latin typeface="Microsoft YaHei"/>
+                <a:ea typeface="Microsoft YaHei"/>
+                <a:cs typeface="Microsoft YaHei"/>
+              </a:defRPr>
+            </a:pPr>
+            <a:r>
+              <a:rPr sz="1275" b="1">
+                <a:solidFill>
+                  <a:srgbClr val="FFFFFF"/>
+                </a:solidFill>
+                <a:latin typeface="Microsoft YaHei"/>
+                <a:ea typeface="Microsoft YaHei"/>
+                <a:cs typeface="Microsoft YaHei"/>
+              </a:rPr>
+              <a:t>05</a:t>
+            </a:r>
+          </a:p>
+        </p:txBody>
+      </p:sp>
+      <p:sp>
+        <p:nvSpPr>
+          <p:cNvPr id="26" name="PPAGENT_QA|within=parallel-card-4|role=title">
+            <a:extLst xmlns:a="http://schemas.openxmlformats.org/drawingml/2006/main">
+              <a:ext uri="{FF2B5EF4-FFF2-40B4-BE49-F238E27FC236}">
+                <a16:creationId xmlns:a16="http://schemas.microsoft.com/office/drawing/2014/main" id="{E5824FD4-A806-4F56-9BE8-15E81560EB3B}"/>
+              </a:ext>
+            </a:extLst>
+          </p:cNvPr>
+          <p:cNvSpPr>
+            <a:spLocks xmlns:a="http://schemas.openxmlformats.org/drawingml/2006/main" noGrp="1"/>
+          </p:cNvSpPr>
+          <p:nvPr/>
+        </p:nvSpPr>
+        <p:spPr>
+          <a:xfrm xmlns:a="http://schemas.openxmlformats.org/drawingml/2006/main">
+            <a:off x="9650730" y="2952750"/>
+            <a:ext cx="1607820" cy="523875"/>
+          </a:xfrm>
+          <a:prstGeom xmlns:a="http://schemas.openxmlformats.org/drawingml/2006/main" prst="rect">
+            <a:avLst/>
+          </a:prstGeom>
+          <a:noFill xmlns:a="http://schemas.openxmlformats.org/drawingml/2006/main"/>
+          <a:ln xmlns:a="http://schemas.openxmlformats.org/drawingml/2006/main" w="0">
+            <a:noFill/>
+            <a:prstDash val="solid"/>
+          </a:ln>
+        </p:spPr>
+        <p:txBody>
+          <a:bodyPr xmlns:a="http://schemas.openxmlformats.org/drawingml/2006/main" lIns="0" tIns="0" rIns="0" bIns="0" anchor="ctr">
+            <a:normAutofit fontScale="100000"/>
+          </a:bodyPr>
+          <a:lstStyle xmlns:a="http://schemas.openxmlformats.org/drawingml/2006/main"/>
+          <a:p xmlns:a="http://schemas.openxmlformats.org/drawingml/2006/main">
+            <a:pPr algn="ctr">
+              <a:defRPr sz="1650" b="1">
+                <a:solidFill>
+                  <a:srgbClr val="174D87"/>
+                </a:solidFill>
+                <a:latin typeface="Microsoft YaHei"/>
+                <a:ea typeface="Microsoft YaHei"/>
+                <a:cs typeface="Microsoft YaHei"/>
+              </a:defRPr>
+            </a:pPr>
+            <a:r>
+              <a:rPr sz="1650" b="1">
+                <a:solidFill>
+                  <a:srgbClr val="174D87"/>
+                </a:solidFill>
+                <a:latin typeface="Microsoft YaHei"/>
+                <a:ea typeface="Microsoft YaHei"/>
+                <a:cs typeface="Microsoft YaHei"/>
+              </a:rPr>
+              <a:t>协同机制</a:t>
+            </a:r>
+          </a:p>
+        </p:txBody>
+      </p:sp>
+      <p:sp>
+        <p:nvSpPr>
+          <p:cNvPr id="27" name="PPAGENT_QA|within=parallel-card-4|role=body">
+            <a:extLst xmlns:a="http://schemas.openxmlformats.org/drawingml/2006/main">
+              <a:ext uri="{FF2B5EF4-FFF2-40B4-BE49-F238E27FC236}">
+                <a16:creationId xmlns:a16="http://schemas.microsoft.com/office/drawing/2014/main" id="{450129C9-72B1-4466-B006-1BB0BF9D1C38}"/>
+              </a:ext>
+            </a:extLst>
+          </p:cNvPr>
+          <p:cNvSpPr>
+            <a:spLocks xmlns:a="http://schemas.openxmlformats.org/drawingml/2006/main" noGrp="1"/>
+          </p:cNvSpPr>
+          <p:nvPr/>
+        </p:nvSpPr>
+        <p:spPr>
+          <a:xfrm xmlns:a="http://schemas.openxmlformats.org/drawingml/2006/main">
+            <a:off x="9669780" y="3638550"/>
+            <a:ext cx="1569720" cy="952500"/>
+          </a:xfrm>
+          <a:prstGeom xmlns:a="http://schemas.openxmlformats.org/drawingml/2006/main" prst="rect">
+            <a:avLst/>
+          </a:prstGeom>
+          <a:noFill xmlns:a="http://schemas.openxmlformats.org/drawingml/2006/main"/>
+          <a:ln xmlns:a="http://schemas.openxmlformats.org/drawingml/2006/main" w="0">
+            <a:noFill/>
+            <a:prstDash val="solid"/>
+          </a:ln>
+        </p:spPr>
+        <p:txBody>
+          <a:bodyPr xmlns:a="http://schemas.openxmlformats.org/drawingml/2006/main" lIns="0" tIns="0" rIns="0" bIns="0" anchor="t">
+            <a:normAutofit fontScale="100000"/>
+          </a:bodyPr>
+          <a:lstStyle xmlns:a="http://schemas.openxmlformats.org/drawingml/2006/main"/>
+          <a:p xmlns:a="http://schemas.openxmlformats.org/drawingml/2006/main">
+            <a:pPr algn="ctr">
+              <a:defRPr sz="1275" b="0">
+                <a:solidFill>
+                  <a:srgbClr val="607895"/>
+                </a:solidFill>
+                <a:latin typeface="Microsoft YaHei"/>
+                <a:ea typeface="Microsoft YaHei"/>
+                <a:cs typeface="Microsoft YaHei"/>
+              </a:defRPr>
+            </a:pPr>
+            <a:r>
+              <a:rPr sz="1275" b="0">
+                <a:solidFill>
+                  <a:srgbClr val="607895"/>
+                </a:solidFill>
+                <a:latin typeface="Microsoft YaHei"/>
+                <a:ea typeface="Microsoft YaHei"/>
+                <a:cs typeface="Microsoft YaHei"/>
+              </a:rPr>
+              <a:t>让角色分工和信息接口清晰可见</a:t>
+            </a:r>
+          </a:p>
+        </p:txBody>
+      </p:sp>
+    </p:spTree>
+    <p:extLst>
+      <p:ext uri="{BB962C8B-B14F-4D97-AF65-F5344CB8AC3E}">
+        <p14:creationId xmlns:p14="http://schemas.microsoft.com/office/powerpoint/2010/main" val="1484664711"/>
+      </p:ext>
+    </p:extLst>
+  </p:cSld>
+</p:sld>
+</file>
+
+<file path=ppt/slides/slide4.xml><?xml version="1.0" encoding="utf-8"?>
+<p:sld xmlns:p="http://schemas.openxmlformats.org/presentationml/2006/main">
+  <p:cSld>
+    <p:bg>
+      <p:bgPr>
+        <a:solidFill xmlns:a="http://schemas.openxmlformats.org/drawingml/2006/main">
+          <a:srgbClr val="F7FAFC"/>
+        </a:solidFill>
+      </p:bgPr>
+    </p:bg>
+    <p:spTree>
+      <p:nvGrpSpPr>
+        <p:cNvPr id="1" name=""/>
+        <p:cNvGrpSpPr/>
+        <p:nvPr/>
+      </p:nvGrpSpPr>
+      <p:grpSpPr>
+        <a:xfrm xmlns:a="http://schemas.openxmlformats.org/drawingml/2006/main"/>
+      </p:grpSpPr>
+      <p:sp>
+        <p:nvSpPr>
+          <p:cNvPr id="33" name="">
+            <a:extLst xmlns:a="http://schemas.openxmlformats.org/drawingml/2006/main">
+              <a:ext uri="{FF2B5EF4-FFF2-40B4-BE49-F238E27FC236}">
+                <a16:creationId xmlns:a16="http://schemas.microsoft.com/office/drawing/2014/main" id="{19BB2B45-2856-4EB8-A752-CCAD547032F0}"/>
+              </a:ext>
+            </a:extLst>
+          </p:cNvPr>
+          <p:cNvSpPr>
+            <a:spLocks xmlns:a="http://schemas.openxmlformats.org/drawingml/2006/main" noGrp="1"/>
+          </p:cNvSpPr>
+          <p:nvPr/>
+        </p:nvSpPr>
+        <p:spPr>
+          <a:xfrm xmlns:a="http://schemas.openxmlformats.org/drawingml/2006/main">
+            <a:off x="685800" y="400050"/>
+            <a:ext cx="8382000" cy="457200"/>
+          </a:xfrm>
+          <a:prstGeom xmlns:a="http://schemas.openxmlformats.org/drawingml/2006/main" prst="rect">
+            <a:avLst/>
+          </a:prstGeom>
+          <a:noFill xmlns:a="http://schemas.openxmlformats.org/drawingml/2006/main"/>
+          <a:ln xmlns:a="http://schemas.openxmlformats.org/drawingml/2006/main" w="0">
+            <a:noFill/>
+            <a:prstDash val="solid"/>
+          </a:ln>
+        </p:spPr>
+        <p:txBody>
+          <a:bodyPr xmlns:a="http://schemas.openxmlformats.org/drawingml/2006/main" lIns="0" tIns="0" rIns="0" bIns="0" anchor="ctr">
+            <a:normAutofit fontScale="100000"/>
+          </a:bodyPr>
+          <a:lstStyle xmlns:a="http://schemas.openxmlformats.org/drawingml/2006/main"/>
+          <a:p xmlns:a="http://schemas.openxmlformats.org/drawingml/2006/main">
+            <a:pPr algn="l">
+              <a:defRPr sz="2700" b="1">
+                <a:solidFill>
+                  <a:srgbClr val="1677C8"/>
+                </a:solidFill>
+                <a:latin typeface="Microsoft YaHei"/>
+                <a:ea typeface="Microsoft YaHei"/>
+                <a:cs typeface="Microsoft YaHei"/>
+              </a:defRPr>
+            </a:pPr>
+            <a:r>
+              <a:rPr sz="2700" b="1">
+                <a:solidFill>
+                  <a:srgbClr val="1677C8"/>
+                </a:solidFill>
+                <a:latin typeface="Microsoft YaHei"/>
+                <a:ea typeface="Microsoft YaHei"/>
+                <a:cs typeface="Microsoft YaHei"/>
+              </a:rPr>
+              <a:t>同级能力建设</a:t>
+            </a:r>
+          </a:p>
+        </p:txBody>
+      </p:sp>
+      <p:sp>
+        <p:nvSpPr>
+          <p:cNvPr id="2" name="">
+            <a:extLst xmlns:a="http://schemas.openxmlformats.org/drawingml/2006/main">
+              <a:ext uri="{FF2B5EF4-FFF2-40B4-BE49-F238E27FC236}">
+                <a16:creationId xmlns:a16="http://schemas.microsoft.com/office/drawing/2014/main" id="{D5E15570-6E08-4A51-9D1E-2BCD949CA42D}"/>
+              </a:ext>
+            </a:extLst>
+          </p:cNvPr>
+          <p:cNvSpPr>
+            <a:spLocks xmlns:a="http://schemas.openxmlformats.org/drawingml/2006/main" noGrp="1"/>
+          </p:cNvSpPr>
+          <p:nvPr/>
+        </p:nvSpPr>
+        <p:spPr>
+          <a:xfrm xmlns:a="http://schemas.openxmlformats.org/drawingml/2006/main">
+            <a:off x="704850" y="876300"/>
+            <a:ext cx="4953000" cy="247650"/>
+          </a:xfrm>
+          <a:prstGeom xmlns:a="http://schemas.openxmlformats.org/drawingml/2006/main" prst="rect">
+            <a:avLst/>
+          </a:prstGeom>
+          <a:noFill xmlns:a="http://schemas.openxmlformats.org/drawingml/2006/main"/>
+          <a:ln xmlns:a="http://schemas.openxmlformats.org/drawingml/2006/main" w="0">
+            <a:noFill/>
+            <a:prstDash val="solid"/>
+          </a:ln>
+        </p:spPr>
+        <p:txBody>
+          <a:bodyPr xmlns:a="http://schemas.openxmlformats.org/drawingml/2006/main" lIns="0" tIns="0" rIns="0" bIns="0" anchor="ctr">
+            <a:normAutofit fontScale="100000"/>
+          </a:bodyPr>
+          <a:lstStyle xmlns:a="http://schemas.openxmlformats.org/drawingml/2006/main"/>
+          <a:p xmlns:a="http://schemas.openxmlformats.org/drawingml/2006/main">
+            <a:pPr algn="l">
+              <a:defRPr sz="1200" b="0">
+                <a:solidFill>
+                  <a:srgbClr val="7C8A9A"/>
+                </a:solidFill>
+                <a:latin typeface="Microsoft YaHei"/>
+                <a:ea typeface="Microsoft YaHei"/>
+                <a:cs typeface="Microsoft YaHei"/>
+              </a:defRPr>
+            </a:pPr>
+            <a:r>
+              <a:rPr sz="1200" b="0">
+                <a:solidFill>
+                  <a:srgbClr val="7C8A9A"/>
+                </a:solidFill>
+                <a:latin typeface="Microsoft YaHei"/>
+                <a:ea typeface="Microsoft YaHei"/>
+                <a:cs typeface="Microsoft YaHei"/>
+              </a:rPr>
+              <a:t>并列关系 · 同级能力</a:t>
+            </a:r>
+          </a:p>
+        </p:txBody>
+      </p:sp>
+      <p:sp>
+        <p:nvSpPr>
+          <p:cNvPr id="3" name="PPAGENT_QA|parent=parallel-card-0|domains=parallel-card,parallel-content">
+            <a:extLst xmlns:a="http://schemas.openxmlformats.org/drawingml/2006/main">
+              <a:ext uri="{FF2B5EF4-FFF2-40B4-BE49-F238E27FC236}">
+                <a16:creationId xmlns:a16="http://schemas.microsoft.com/office/drawing/2014/main" id="{71C95C9D-29E1-4CD0-A307-A417E3814A92}"/>
+              </a:ext>
+            </a:extLst>
+          </p:cNvPr>
+          <p:cNvSpPr>
+            <a:spLocks xmlns:a="http://schemas.openxmlformats.org/drawingml/2006/main" noGrp="1"/>
+          </p:cNvSpPr>
+          <p:nvPr/>
+        </p:nvSpPr>
+        <p:spPr>
+          <a:xfrm xmlns:a="http://schemas.openxmlformats.org/drawingml/2006/main">
+            <a:off x="742950" y="1809750"/>
+            <a:ext cx="1625600" cy="3714750"/>
+          </a:xfrm>
+          <a:prstGeom xmlns:a="http://schemas.openxmlformats.org/drawingml/2006/main" prst="roundRect">
+            <a:avLst>
+              <a:gd name="adj" fmla="val 7031"/>
+            </a:avLst>
+          </a:prstGeom>
+          <a:solidFill xmlns:a="http://schemas.openxmlformats.org/drawingml/2006/main">
+            <a:srgbClr val="F7FBFF"/>
+          </a:solidFill>
+          <a:ln xmlns:a="http://schemas.openxmlformats.org/drawingml/2006/main" w="13335">
+            <a:solidFill>
+              <a:srgbClr val="A8CBEA"/>
+            </a:solidFill>
+            <a:prstDash val="solid"/>
+          </a:ln>
+        </p:spPr>
+        <p:style>
+          <a:lnRef xmlns:a="http://schemas.openxmlformats.org/drawingml/2006/main" idx="0"/>
+          <a:fillRef xmlns:a="http://schemas.openxmlformats.org/drawingml/2006/main" idx="0"/>
+          <a:effectRef xmlns:a="http://schemas.openxmlformats.org/drawingml/2006/main" idx="4"/>
+          <a:fontRef xmlns:a="http://schemas.openxmlformats.org/drawingml/2006/main" idx="major"/>
+        </p:style>
+      </p:sp>
+      <p:sp>
+        <p:nvSpPr>
+          <p:cNvPr id="4" name="PPAGENT_QA|within=parallel-card-0|role=accent-rail">
+            <a:extLst xmlns:a="http://schemas.openxmlformats.org/drawingml/2006/main">
+              <a:ext uri="{FF2B5EF4-FFF2-40B4-BE49-F238E27FC236}">
+                <a16:creationId xmlns:a16="http://schemas.microsoft.com/office/drawing/2014/main" id="{261FDD56-E828-4A6A-8FB2-381DC8232151}"/>
+              </a:ext>
+            </a:extLst>
+          </p:cNvPr>
+          <p:cNvSpPr>
+            <a:spLocks xmlns:a="http://schemas.openxmlformats.org/drawingml/2006/main" noGrp="1"/>
+          </p:cNvSpPr>
+          <p:nvPr/>
+        </p:nvSpPr>
+        <p:spPr>
+          <a:xfrm xmlns:a="http://schemas.openxmlformats.org/drawingml/2006/main">
+            <a:off x="742950" y="1809750"/>
+            <a:ext cx="1625600" cy="76200"/>
+          </a:xfrm>
+          <a:prstGeom xmlns:a="http://schemas.openxmlformats.org/drawingml/2006/main" prst="rect">
+            <a:avLst/>
+          </a:prstGeom>
+          <a:solidFill xmlns:a="http://schemas.openxmlformats.org/drawingml/2006/main">
+            <a:srgbClr val="2F5EA8"/>
+          </a:solidFill>
+          <a:ln xmlns:a="http://schemas.openxmlformats.org/drawingml/2006/main" w="0">
+            <a:noFill/>
+            <a:prstDash val="solid"/>
+          </a:ln>
+        </p:spPr>
+      </p:sp>
+      <p:sp>
+        <p:nvSpPr>
+          <p:cNvPr id="5" name="PPAGENT_QA|within=parallel-card-0|role=index">
+            <a:extLst xmlns:a="http://schemas.openxmlformats.org/drawingml/2006/main">
+              <a:ext uri="{FF2B5EF4-FFF2-40B4-BE49-F238E27FC236}">
+                <a16:creationId xmlns:a16="http://schemas.microsoft.com/office/drawing/2014/main" id="{549C9D47-E387-43F5-913D-2660A1FB75DA}"/>
+              </a:ext>
+            </a:extLst>
+          </p:cNvPr>
+          <p:cNvSpPr>
+            <a:spLocks xmlns:a="http://schemas.openxmlformats.org/drawingml/2006/main" noGrp="1"/>
+          </p:cNvSpPr>
+          <p:nvPr/>
+        </p:nvSpPr>
+        <p:spPr>
+          <a:xfrm xmlns:a="http://schemas.openxmlformats.org/drawingml/2006/main">
+            <a:off x="933450" y="2114550"/>
+            <a:ext cx="514350" cy="514350"/>
+          </a:xfrm>
+          <a:prstGeom xmlns:a="http://schemas.openxmlformats.org/drawingml/2006/main" prst="ellipse">
+            <a:avLst/>
+          </a:prstGeom>
+          <a:solidFill xmlns:a="http://schemas.openxmlformats.org/drawingml/2006/main">
+            <a:srgbClr val="2F5EA8"/>
+          </a:solidFill>
+          <a:ln xmlns:a="http://schemas.openxmlformats.org/drawingml/2006/main" w="19050">
+            <a:solidFill>
+              <a:srgbClr val="FFFFFF"/>
+            </a:solidFill>
+            <a:prstDash val="solid"/>
+          </a:ln>
+        </p:spPr>
+        <p:txBody>
+          <a:bodyPr xmlns:a="http://schemas.openxmlformats.org/drawingml/2006/main" lIns="0" tIns="0" rIns="0" bIns="0" anchor="ctr">
+            <a:normAutofit fontScale="100000"/>
+          </a:bodyPr>
+          <a:lstStyle xmlns:a="http://schemas.openxmlformats.org/drawingml/2006/main"/>
+          <a:p xmlns:a="http://schemas.openxmlformats.org/drawingml/2006/main">
+            <a:pPr algn="ctr">
+              <a:defRPr sz="1275" b="1">
+                <a:solidFill>
+                  <a:srgbClr val="FFFFFF"/>
+                </a:solidFill>
+                <a:latin typeface="Microsoft YaHei"/>
+                <a:ea typeface="Microsoft YaHei"/>
+                <a:cs typeface="Microsoft YaHei"/>
+              </a:defRPr>
+            </a:pPr>
+            <a:r>
+              <a:rPr sz="1275" b="1">
+                <a:solidFill>
+                  <a:srgbClr val="FFFFFF"/>
+                </a:solidFill>
+                <a:latin typeface="Microsoft YaHei"/>
+                <a:ea typeface="Microsoft YaHei"/>
+                <a:cs typeface="Microsoft YaHei"/>
+              </a:rPr>
+              <a:t>01</a:t>
+            </a:r>
+          </a:p>
+        </p:txBody>
+      </p:sp>
+      <p:sp>
+        <p:nvSpPr>
+          <p:cNvPr id="6" name="PPAGENT_QA|within=parallel-card-0|role=title">
+            <a:extLst xmlns:a="http://schemas.openxmlformats.org/drawingml/2006/main">
+              <a:ext uri="{FF2B5EF4-FFF2-40B4-BE49-F238E27FC236}">
+                <a16:creationId xmlns:a16="http://schemas.microsoft.com/office/drawing/2014/main" id="{7CEDF2C5-4A91-4050-9BBF-B06C909FBD94}"/>
+              </a:ext>
+            </a:extLst>
+          </p:cNvPr>
+          <p:cNvSpPr>
+            <a:spLocks xmlns:a="http://schemas.openxmlformats.org/drawingml/2006/main" noGrp="1"/>
+          </p:cNvSpPr>
+          <p:nvPr/>
+        </p:nvSpPr>
+        <p:spPr>
+          <a:xfrm xmlns:a="http://schemas.openxmlformats.org/drawingml/2006/main">
+            <a:off x="933450" y="2952750"/>
+            <a:ext cx="1244600" cy="523875"/>
+          </a:xfrm>
+          <a:prstGeom xmlns:a="http://schemas.openxmlformats.org/drawingml/2006/main" prst="rect">
+            <a:avLst/>
+          </a:prstGeom>
+          <a:noFill xmlns:a="http://schemas.openxmlformats.org/drawingml/2006/main"/>
+          <a:ln xmlns:a="http://schemas.openxmlformats.org/drawingml/2006/main" w="0">
+            <a:noFill/>
+            <a:prstDash val="solid"/>
+          </a:ln>
+        </p:spPr>
+        <p:txBody>
+          <a:bodyPr xmlns:a="http://schemas.openxmlformats.org/drawingml/2006/main" lIns="0" tIns="0" rIns="0" bIns="0" anchor="ctr">
+            <a:normAutofit fontScale="100000"/>
+          </a:bodyPr>
+          <a:lstStyle xmlns:a="http://schemas.openxmlformats.org/drawingml/2006/main"/>
+          <a:p xmlns:a="http://schemas.openxmlformats.org/drawingml/2006/main">
+            <a:pPr algn="ctr">
+              <a:defRPr sz="1650" b="1">
+                <a:solidFill>
+                  <a:srgbClr val="174D87"/>
+                </a:solidFill>
+                <a:latin typeface="Microsoft YaHei"/>
+                <a:ea typeface="Microsoft YaHei"/>
+                <a:cs typeface="Microsoft YaHei"/>
+              </a:defRPr>
+            </a:pPr>
+            <a:r>
+              <a:rPr sz="1650" b="1">
+                <a:solidFill>
+                  <a:srgbClr val="174D87"/>
+                </a:solidFill>
+                <a:latin typeface="Microsoft YaHei"/>
+                <a:ea typeface="Microsoft YaHei"/>
+                <a:cs typeface="Microsoft YaHei"/>
+              </a:rPr>
+              <a:t>数据基础</a:t>
+            </a:r>
+          </a:p>
+        </p:txBody>
+      </p:sp>
+      <p:sp>
+        <p:nvSpPr>
+          <p:cNvPr id="7" name="PPAGENT_QA|within=parallel-card-0|role=body">
+            <a:extLst xmlns:a="http://schemas.openxmlformats.org/drawingml/2006/main">
+              <a:ext uri="{FF2B5EF4-FFF2-40B4-BE49-F238E27FC236}">
+                <a16:creationId xmlns:a16="http://schemas.microsoft.com/office/drawing/2014/main" id="{72ED8473-19F2-4BC6-97E7-4CCA815537D0}"/>
+              </a:ext>
+            </a:extLst>
+          </p:cNvPr>
+          <p:cNvSpPr>
+            <a:spLocks xmlns:a="http://schemas.openxmlformats.org/drawingml/2006/main" noGrp="1"/>
+          </p:cNvSpPr>
+          <p:nvPr/>
+        </p:nvSpPr>
+        <p:spPr>
+          <a:xfrm xmlns:a="http://schemas.openxmlformats.org/drawingml/2006/main">
+            <a:off x="952500" y="3638550"/>
+            <a:ext cx="1206500" cy="952500"/>
+          </a:xfrm>
+          <a:prstGeom xmlns:a="http://schemas.openxmlformats.org/drawingml/2006/main" prst="rect">
+            <a:avLst/>
+          </a:prstGeom>
+          <a:noFill xmlns:a="http://schemas.openxmlformats.org/drawingml/2006/main"/>
+          <a:ln xmlns:a="http://schemas.openxmlformats.org/drawingml/2006/main" w="0">
+            <a:noFill/>
+            <a:prstDash val="solid"/>
+          </a:ln>
+        </p:spPr>
+        <p:txBody>
+          <a:bodyPr xmlns:a="http://schemas.openxmlformats.org/drawingml/2006/main" lIns="0" tIns="0" rIns="0" bIns="0" anchor="t">
+            <a:normAutofit fontScale="100000"/>
+          </a:bodyPr>
+          <a:lstStyle xmlns:a="http://schemas.openxmlformats.org/drawingml/2006/main"/>
+          <a:p xmlns:a="http://schemas.openxmlformats.org/drawingml/2006/main">
+            <a:pPr algn="ctr">
+              <a:defRPr sz="1275" b="0">
+                <a:solidFill>
+                  <a:srgbClr val="607895"/>
+                </a:solidFill>
+                <a:latin typeface="Microsoft YaHei"/>
+                <a:ea typeface="Microsoft YaHei"/>
+                <a:cs typeface="Microsoft YaHei"/>
+              </a:defRPr>
+            </a:pPr>
+            <a:r>
+              <a:rPr sz="1275" b="0">
+                <a:solidFill>
+                  <a:srgbClr val="607895"/>
+                </a:solidFill>
+                <a:latin typeface="Microsoft YaHei"/>
+                <a:ea typeface="Microsoft YaHei"/>
+                <a:cs typeface="Microsoft YaHei"/>
+              </a:rPr>
+              <a:t>统一数据标准与治理口径</a:t>
+            </a:r>
+          </a:p>
+        </p:txBody>
+      </p:sp>
+      <p:sp>
+        <p:nvSpPr>
+          <p:cNvPr id="8" name="PPAGENT_QA|parent=parallel-card-1|domains=parallel-card,parallel-content">
+            <a:extLst xmlns:a="http://schemas.openxmlformats.org/drawingml/2006/main">
+              <a:ext uri="{FF2B5EF4-FFF2-40B4-BE49-F238E27FC236}">
+                <a16:creationId xmlns:a16="http://schemas.microsoft.com/office/drawing/2014/main" id="{220D406D-28B7-4775-8996-F6E7B67D26F5}"/>
+              </a:ext>
+            </a:extLst>
+          </p:cNvPr>
+          <p:cNvSpPr>
+            <a:spLocks xmlns:a="http://schemas.openxmlformats.org/drawingml/2006/main" noGrp="1"/>
+          </p:cNvSpPr>
+          <p:nvPr/>
+        </p:nvSpPr>
+        <p:spPr>
+          <a:xfrm xmlns:a="http://schemas.openxmlformats.org/drawingml/2006/main">
+            <a:off x="2559050" y="1809750"/>
+            <a:ext cx="1625600" cy="3714750"/>
+          </a:xfrm>
+          <a:prstGeom xmlns:a="http://schemas.openxmlformats.org/drawingml/2006/main" prst="roundRect">
+            <a:avLst>
+              <a:gd name="adj" fmla="val 7031"/>
+            </a:avLst>
+          </a:prstGeom>
+          <a:solidFill xmlns:a="http://schemas.openxmlformats.org/drawingml/2006/main">
+            <a:srgbClr val="F1F8FF"/>
+          </a:solidFill>
+          <a:ln xmlns:a="http://schemas.openxmlformats.org/drawingml/2006/main" w="13335">
+            <a:solidFill>
+              <a:srgbClr val="7EB7ED"/>
+            </a:solidFill>
+            <a:prstDash val="solid"/>
+          </a:ln>
+        </p:spPr>
+        <p:style>
+          <a:lnRef xmlns:a="http://schemas.openxmlformats.org/drawingml/2006/main" idx="0"/>
+          <a:fillRef xmlns:a="http://schemas.openxmlformats.org/drawingml/2006/main" idx="0"/>
+          <a:effectRef xmlns:a="http://schemas.openxmlformats.org/drawingml/2006/main" idx="4"/>
+          <a:fontRef xmlns:a="http://schemas.openxmlformats.org/drawingml/2006/main" idx="major"/>
+        </p:style>
+      </p:sp>
+      <p:sp>
+        <p:nvSpPr>
+          <p:cNvPr id="9" name="PPAGENT_QA|within=parallel-card-1|role=accent-rail">
+            <a:extLst xmlns:a="http://schemas.openxmlformats.org/drawingml/2006/main">
+              <a:ext uri="{FF2B5EF4-FFF2-40B4-BE49-F238E27FC236}">
+                <a16:creationId xmlns:a16="http://schemas.microsoft.com/office/drawing/2014/main" id="{3E7CCC2B-E81C-4299-93D2-27C2588D5797}"/>
+              </a:ext>
+            </a:extLst>
+          </p:cNvPr>
+          <p:cNvSpPr>
+            <a:spLocks xmlns:a="http://schemas.openxmlformats.org/drawingml/2006/main" noGrp="1"/>
+          </p:cNvSpPr>
+          <p:nvPr/>
+        </p:nvSpPr>
+        <p:spPr>
+          <a:xfrm xmlns:a="http://schemas.openxmlformats.org/drawingml/2006/main">
+            <a:off x="2559050" y="1809750"/>
+            <a:ext cx="1625600" cy="76200"/>
+          </a:xfrm>
+          <a:prstGeom xmlns:a="http://schemas.openxmlformats.org/drawingml/2006/main" prst="rect">
+            <a:avLst/>
+          </a:prstGeom>
+          <a:solidFill xmlns:a="http://schemas.openxmlformats.org/drawingml/2006/main">
+            <a:srgbClr val="4C88E8"/>
+          </a:solidFill>
+          <a:ln xmlns:a="http://schemas.openxmlformats.org/drawingml/2006/main" w="0">
+            <a:noFill/>
+            <a:prstDash val="solid"/>
+          </a:ln>
+        </p:spPr>
+      </p:sp>
+      <p:sp>
+        <p:nvSpPr>
+          <p:cNvPr id="10" name="PPAGENT_QA|within=parallel-card-1|role=index">
+            <a:extLst xmlns:a="http://schemas.openxmlformats.org/drawingml/2006/main">
+              <a:ext uri="{FF2B5EF4-FFF2-40B4-BE49-F238E27FC236}">
+                <a16:creationId xmlns:a16="http://schemas.microsoft.com/office/drawing/2014/main" id="{40CDBFEF-8F85-4B9F-BC10-C35AD5DE1D38}"/>
+              </a:ext>
+            </a:extLst>
+          </p:cNvPr>
+          <p:cNvSpPr>
+            <a:spLocks xmlns:a="http://schemas.openxmlformats.org/drawingml/2006/main" noGrp="1"/>
+          </p:cNvSpPr>
+          <p:nvPr/>
+        </p:nvSpPr>
+        <p:spPr>
+          <a:xfrm xmlns:a="http://schemas.openxmlformats.org/drawingml/2006/main">
+            <a:off x="2749550" y="2114550"/>
+            <a:ext cx="514350" cy="514350"/>
+          </a:xfrm>
+          <a:prstGeom xmlns:a="http://schemas.openxmlformats.org/drawingml/2006/main" prst="ellipse">
+            <a:avLst/>
+          </a:prstGeom>
+          <a:solidFill xmlns:a="http://schemas.openxmlformats.org/drawingml/2006/main">
+            <a:srgbClr val="4C88E8"/>
+          </a:solidFill>
+          <a:ln xmlns:a="http://schemas.openxmlformats.org/drawingml/2006/main" w="19050">
+            <a:solidFill>
+              <a:srgbClr val="FFFFFF"/>
+            </a:solidFill>
+            <a:prstDash val="solid"/>
+          </a:ln>
+        </p:spPr>
+        <p:txBody>
+          <a:bodyPr xmlns:a="http://schemas.openxmlformats.org/drawingml/2006/main" lIns="0" tIns="0" rIns="0" bIns="0" anchor="ctr">
+            <a:normAutofit fontScale="100000"/>
+          </a:bodyPr>
+          <a:lstStyle xmlns:a="http://schemas.openxmlformats.org/drawingml/2006/main"/>
+          <a:p xmlns:a="http://schemas.openxmlformats.org/drawingml/2006/main">
+            <a:pPr algn="ctr">
+              <a:defRPr sz="1275" b="1">
+                <a:solidFill>
+                  <a:srgbClr val="FFFFFF"/>
+                </a:solidFill>
+                <a:latin typeface="Microsoft YaHei"/>
+                <a:ea typeface="Microsoft YaHei"/>
+                <a:cs typeface="Microsoft YaHei"/>
+              </a:defRPr>
+            </a:pPr>
+            <a:r>
+              <a:rPr sz="1275" b="1">
+                <a:solidFill>
+                  <a:srgbClr val="FFFFFF"/>
+                </a:solidFill>
+                <a:latin typeface="Microsoft YaHei"/>
+                <a:ea typeface="Microsoft YaHei"/>
+                <a:cs typeface="Microsoft YaHei"/>
+              </a:rPr>
+              <a:t>02</a:t>
+            </a:r>
+          </a:p>
+        </p:txBody>
+      </p:sp>
+      <p:sp>
+        <p:nvSpPr>
+          <p:cNvPr id="11" name="PPAGENT_QA|within=parallel-card-1|role=title">
+            <a:extLst xmlns:a="http://schemas.openxmlformats.org/drawingml/2006/main">
+              <a:ext uri="{FF2B5EF4-FFF2-40B4-BE49-F238E27FC236}">
+                <a16:creationId xmlns:a16="http://schemas.microsoft.com/office/drawing/2014/main" id="{AE204634-CD8E-490A-AE50-107D13139290}"/>
+              </a:ext>
+            </a:extLst>
+          </p:cNvPr>
+          <p:cNvSpPr>
+            <a:spLocks xmlns:a="http://schemas.openxmlformats.org/drawingml/2006/main" noGrp="1"/>
+          </p:cNvSpPr>
+          <p:nvPr/>
+        </p:nvSpPr>
+        <p:spPr>
+          <a:xfrm xmlns:a="http://schemas.openxmlformats.org/drawingml/2006/main">
+            <a:off x="2749550" y="2952750"/>
+            <a:ext cx="1244600" cy="523875"/>
+          </a:xfrm>
+          <a:prstGeom xmlns:a="http://schemas.openxmlformats.org/drawingml/2006/main" prst="rect">
+            <a:avLst/>
+          </a:prstGeom>
+          <a:noFill xmlns:a="http://schemas.openxmlformats.org/drawingml/2006/main"/>
+          <a:ln xmlns:a="http://schemas.openxmlformats.org/drawingml/2006/main" w="0">
+            <a:noFill/>
+            <a:prstDash val="solid"/>
+          </a:ln>
+        </p:spPr>
+        <p:txBody>
+          <a:bodyPr xmlns:a="http://schemas.openxmlformats.org/drawingml/2006/main" lIns="0" tIns="0" rIns="0" bIns="0" anchor="ctr">
+            <a:normAutofit fontScale="100000"/>
+          </a:bodyPr>
+          <a:lstStyle xmlns:a="http://schemas.openxmlformats.org/drawingml/2006/main"/>
+          <a:p xmlns:a="http://schemas.openxmlformats.org/drawingml/2006/main">
+            <a:pPr algn="ctr">
+              <a:defRPr sz="1650" b="1">
+                <a:solidFill>
+                  <a:srgbClr val="174D87"/>
+                </a:solidFill>
+                <a:latin typeface="Microsoft YaHei"/>
+                <a:ea typeface="Microsoft YaHei"/>
+                <a:cs typeface="Microsoft YaHei"/>
+              </a:defRPr>
+            </a:pPr>
+            <a:r>
+              <a:rPr sz="1650" b="1">
+                <a:solidFill>
+                  <a:srgbClr val="174D87"/>
+                </a:solidFill>
+                <a:latin typeface="Microsoft YaHei"/>
+                <a:ea typeface="Microsoft YaHei"/>
+                <a:cs typeface="Microsoft YaHei"/>
+              </a:rPr>
+              <a:t>模型能力</a:t>
+            </a:r>
+          </a:p>
+        </p:txBody>
+      </p:sp>
+      <p:sp>
+        <p:nvSpPr>
+          <p:cNvPr id="12" name="PPAGENT_QA|within=parallel-card-1|role=body">
+            <a:extLst xmlns:a="http://schemas.openxmlformats.org/drawingml/2006/main">
+              <a:ext uri="{FF2B5EF4-FFF2-40B4-BE49-F238E27FC236}">
+                <a16:creationId xmlns:a16="http://schemas.microsoft.com/office/drawing/2014/main" id="{3E9093A1-9EA4-4132-B1E1-3C3363CDC427}"/>
+              </a:ext>
+            </a:extLst>
+          </p:cNvPr>
+          <p:cNvSpPr>
+            <a:spLocks xmlns:a="http://schemas.openxmlformats.org/drawingml/2006/main" noGrp="1"/>
+          </p:cNvSpPr>
+          <p:nvPr/>
+        </p:nvSpPr>
+        <p:spPr>
+          <a:xfrm xmlns:a="http://schemas.openxmlformats.org/drawingml/2006/main">
+            <a:off x="2768600" y="3638550"/>
+            <a:ext cx="1206500" cy="952500"/>
+          </a:xfrm>
+          <a:prstGeom xmlns:a="http://schemas.openxmlformats.org/drawingml/2006/main" prst="rect">
+            <a:avLst/>
+          </a:prstGeom>
+          <a:noFill xmlns:a="http://schemas.openxmlformats.org/drawingml/2006/main"/>
+          <a:ln xmlns:a="http://schemas.openxmlformats.org/drawingml/2006/main" w="0">
+            <a:noFill/>
+            <a:prstDash val="solid"/>
+          </a:ln>
+        </p:spPr>
+        <p:txBody>
+          <a:bodyPr xmlns:a="http://schemas.openxmlformats.org/drawingml/2006/main" lIns="0" tIns="0" rIns="0" bIns="0" anchor="t">
+            <a:normAutofit fontScale="100000"/>
+          </a:bodyPr>
+          <a:lstStyle xmlns:a="http://schemas.openxmlformats.org/drawingml/2006/main"/>
+          <a:p xmlns:a="http://schemas.openxmlformats.org/drawingml/2006/main">
+            <a:pPr algn="ctr">
+              <a:defRPr sz="1275" b="0">
+                <a:solidFill>
+                  <a:srgbClr val="607895"/>
+                </a:solidFill>
+                <a:latin typeface="Microsoft YaHei"/>
+                <a:ea typeface="Microsoft YaHei"/>
+                <a:cs typeface="Microsoft YaHei"/>
+              </a:defRPr>
+            </a:pPr>
+            <a:r>
+              <a:rPr sz="1275" b="0">
+                <a:solidFill>
+                  <a:srgbClr val="607895"/>
+                </a:solidFill>
+                <a:latin typeface="Microsoft YaHei"/>
+                <a:ea typeface="Microsoft YaHei"/>
+                <a:cs typeface="Microsoft YaHei"/>
+              </a:rPr>
+              <a:t>沉淀可复用的建模方法</a:t>
+            </a:r>
+          </a:p>
+        </p:txBody>
+      </p:sp>
+      <p:sp>
+        <p:nvSpPr>
+          <p:cNvPr id="13" name="PPAGENT_QA|parent=parallel-card-2|domains=parallel-card,parallel-content">
+            <a:extLst xmlns:a="http://schemas.openxmlformats.org/drawingml/2006/main">
+              <a:ext uri="{FF2B5EF4-FFF2-40B4-BE49-F238E27FC236}">
+                <a16:creationId xmlns:a16="http://schemas.microsoft.com/office/drawing/2014/main" id="{04C8E8ED-C144-487F-ABC2-4E63A68BC823}"/>
+              </a:ext>
+            </a:extLst>
+          </p:cNvPr>
+          <p:cNvSpPr>
+            <a:spLocks xmlns:a="http://schemas.openxmlformats.org/drawingml/2006/main" noGrp="1"/>
+          </p:cNvSpPr>
+          <p:nvPr/>
+        </p:nvSpPr>
+        <p:spPr>
+          <a:xfrm xmlns:a="http://schemas.openxmlformats.org/drawingml/2006/main">
+            <a:off x="4375150" y="1809750"/>
+            <a:ext cx="1625600" cy="3714750"/>
+          </a:xfrm>
+          <a:prstGeom xmlns:a="http://schemas.openxmlformats.org/drawingml/2006/main" prst="roundRect">
+            <a:avLst>
+              <a:gd name="adj" fmla="val 7031"/>
+            </a:avLst>
+          </a:prstGeom>
+          <a:solidFill xmlns:a="http://schemas.openxmlformats.org/drawingml/2006/main">
+            <a:srgbClr val="F7FBFF"/>
+          </a:solidFill>
+          <a:ln xmlns:a="http://schemas.openxmlformats.org/drawingml/2006/main" w="13335">
+            <a:solidFill>
+              <a:srgbClr val="A8CBEA"/>
+            </a:solidFill>
+            <a:prstDash val="solid"/>
+          </a:ln>
+        </p:spPr>
+        <p:style>
+          <a:lnRef xmlns:a="http://schemas.openxmlformats.org/drawingml/2006/main" idx="0"/>
+          <a:fillRef xmlns:a="http://schemas.openxmlformats.org/drawingml/2006/main" idx="0"/>
+          <a:effectRef xmlns:a="http://schemas.openxmlformats.org/drawingml/2006/main" idx="4"/>
+          <a:fontRef xmlns:a="http://schemas.openxmlformats.org/drawingml/2006/main" idx="major"/>
+        </p:style>
+      </p:sp>
+      <p:sp>
+        <p:nvSpPr>
+          <p:cNvPr id="14" name="PPAGENT_QA|within=parallel-card-2|role=accent-rail">
+            <a:extLst xmlns:a="http://schemas.openxmlformats.org/drawingml/2006/main">
+              <a:ext uri="{FF2B5EF4-FFF2-40B4-BE49-F238E27FC236}">
+                <a16:creationId xmlns:a16="http://schemas.microsoft.com/office/drawing/2014/main" id="{3C20357B-09AB-4D5C-98EE-3AD8A5B417D4}"/>
+              </a:ext>
+            </a:extLst>
+          </p:cNvPr>
+          <p:cNvSpPr>
+            <a:spLocks xmlns:a="http://schemas.openxmlformats.org/drawingml/2006/main" noGrp="1"/>
+          </p:cNvSpPr>
+          <p:nvPr/>
+        </p:nvSpPr>
+        <p:spPr>
+          <a:xfrm xmlns:a="http://schemas.openxmlformats.org/drawingml/2006/main">
+            <a:off x="4375150" y="1809750"/>
+            <a:ext cx="1625600" cy="76200"/>
+          </a:xfrm>
+          <a:prstGeom xmlns:a="http://schemas.openxmlformats.org/drawingml/2006/main" prst="rect">
+            <a:avLst/>
+          </a:prstGeom>
+          <a:solidFill xmlns:a="http://schemas.openxmlformats.org/drawingml/2006/main">
+            <a:srgbClr val="2F5EA8"/>
+          </a:solidFill>
+          <a:ln xmlns:a="http://schemas.openxmlformats.org/drawingml/2006/main" w="0">
+            <a:noFill/>
+            <a:prstDash val="solid"/>
+          </a:ln>
+        </p:spPr>
+      </p:sp>
+      <p:sp>
+        <p:nvSpPr>
+          <p:cNvPr id="15" name="PPAGENT_QA|within=parallel-card-2|role=index">
+            <a:extLst xmlns:a="http://schemas.openxmlformats.org/drawingml/2006/main">
+              <a:ext uri="{FF2B5EF4-FFF2-40B4-BE49-F238E27FC236}">
+                <a16:creationId xmlns:a16="http://schemas.microsoft.com/office/drawing/2014/main" id="{FC421CE0-A942-4144-BDD8-6881168D1E1D}"/>
+              </a:ext>
+            </a:extLst>
+          </p:cNvPr>
+          <p:cNvSpPr>
+            <a:spLocks xmlns:a="http://schemas.openxmlformats.org/drawingml/2006/main" noGrp="1"/>
+          </p:cNvSpPr>
+          <p:nvPr/>
+        </p:nvSpPr>
+        <p:spPr>
+          <a:xfrm xmlns:a="http://schemas.openxmlformats.org/drawingml/2006/main">
+            <a:off x="4565650" y="2114550"/>
+            <a:ext cx="514350" cy="514350"/>
+          </a:xfrm>
+          <a:prstGeom xmlns:a="http://schemas.openxmlformats.org/drawingml/2006/main" prst="ellipse">
+            <a:avLst/>
+          </a:prstGeom>
+          <a:solidFill xmlns:a="http://schemas.openxmlformats.org/drawingml/2006/main">
+            <a:srgbClr val="2F5EA8"/>
+          </a:solidFill>
+          <a:ln xmlns:a="http://schemas.openxmlformats.org/drawingml/2006/main" w="19050">
+            <a:solidFill>
+              <a:srgbClr val="FFFFFF"/>
+            </a:solidFill>
+            <a:prstDash val="solid"/>
+          </a:ln>
+        </p:spPr>
+        <p:txBody>
+          <a:bodyPr xmlns:a="http://schemas.openxmlformats.org/drawingml/2006/main" lIns="0" tIns="0" rIns="0" bIns="0" anchor="ctr">
+            <a:normAutofit fontScale="100000"/>
+          </a:bodyPr>
+          <a:lstStyle xmlns:a="http://schemas.openxmlformats.org/drawingml/2006/main"/>
+          <a:p xmlns:a="http://schemas.openxmlformats.org/drawingml/2006/main">
+            <a:pPr algn="ctr">
+              <a:defRPr sz="1275" b="1">
+                <a:solidFill>
+                  <a:srgbClr val="FFFFFF"/>
+                </a:solidFill>
+                <a:latin typeface="Microsoft YaHei"/>
+                <a:ea typeface="Microsoft YaHei"/>
+                <a:cs typeface="Microsoft YaHei"/>
+              </a:defRPr>
+            </a:pPr>
+            <a:r>
+              <a:rPr sz="1275" b="1">
+                <a:solidFill>
+                  <a:srgbClr val="FFFFFF"/>
+                </a:solidFill>
+                <a:latin typeface="Microsoft YaHei"/>
+                <a:ea typeface="Microsoft YaHei"/>
+                <a:cs typeface="Microsoft YaHei"/>
+              </a:rPr>
+              <a:t>03</a:t>
+            </a:r>
+          </a:p>
+        </p:txBody>
+      </p:sp>
+      <p:sp>
+        <p:nvSpPr>
+          <p:cNvPr id="16" name="PPAGENT_QA|within=parallel-card-2|role=title">
+            <a:extLst xmlns:a="http://schemas.openxmlformats.org/drawingml/2006/main">
+              <a:ext uri="{FF2B5EF4-FFF2-40B4-BE49-F238E27FC236}">
+                <a16:creationId xmlns:a16="http://schemas.microsoft.com/office/drawing/2014/main" id="{CE7EC3DE-9BBC-49A7-BF5A-58D1E52681C8}"/>
+              </a:ext>
+            </a:extLst>
+          </p:cNvPr>
+          <p:cNvSpPr>
+            <a:spLocks xmlns:a="http://schemas.openxmlformats.org/drawingml/2006/main" noGrp="1"/>
+          </p:cNvSpPr>
+          <p:nvPr/>
+        </p:nvSpPr>
+        <p:spPr>
+          <a:xfrm xmlns:a="http://schemas.openxmlformats.org/drawingml/2006/main">
+            <a:off x="4565650" y="2952750"/>
+            <a:ext cx="1244600" cy="523875"/>
+          </a:xfrm>
+          <a:prstGeom xmlns:a="http://schemas.openxmlformats.org/drawingml/2006/main" prst="rect">
+            <a:avLst/>
+          </a:prstGeom>
+          <a:noFill xmlns:a="http://schemas.openxmlformats.org/drawingml/2006/main"/>
+          <a:ln xmlns:a="http://schemas.openxmlformats.org/drawingml/2006/main" w="0">
+            <a:noFill/>
+            <a:prstDash val="solid"/>
+          </a:ln>
+        </p:spPr>
+        <p:txBody>
+          <a:bodyPr xmlns:a="http://schemas.openxmlformats.org/drawingml/2006/main" lIns="0" tIns="0" rIns="0" bIns="0" anchor="ctr">
+            <a:normAutofit fontScale="100000"/>
+          </a:bodyPr>
+          <a:lstStyle xmlns:a="http://schemas.openxmlformats.org/drawingml/2006/main"/>
+          <a:p xmlns:a="http://schemas.openxmlformats.org/drawingml/2006/main">
+            <a:pPr algn="ctr">
+              <a:defRPr sz="1650" b="1">
+                <a:solidFill>
+                  <a:srgbClr val="174D87"/>
+                </a:solidFill>
+                <a:latin typeface="Microsoft YaHei"/>
+                <a:ea typeface="Microsoft YaHei"/>
+                <a:cs typeface="Microsoft YaHei"/>
+              </a:defRPr>
+            </a:pPr>
+            <a:r>
+              <a:rPr sz="1650" b="1">
+                <a:solidFill>
+                  <a:srgbClr val="174D87"/>
+                </a:solidFill>
+                <a:latin typeface="Microsoft YaHei"/>
+                <a:ea typeface="Microsoft YaHei"/>
+                <a:cs typeface="Microsoft YaHei"/>
+              </a:rPr>
+              <a:t>验证体系</a:t>
+            </a:r>
+          </a:p>
+        </p:txBody>
+      </p:sp>
+      <p:sp>
+        <p:nvSpPr>
+          <p:cNvPr id="17" name="PPAGENT_QA|within=parallel-card-2|role=body">
+            <a:extLst xmlns:a="http://schemas.openxmlformats.org/drawingml/2006/main">
+              <a:ext uri="{FF2B5EF4-FFF2-40B4-BE49-F238E27FC236}">
+                <a16:creationId xmlns:a16="http://schemas.microsoft.com/office/drawing/2014/main" id="{DD279182-8640-4BFC-8F10-E05242EDC53F}"/>
+              </a:ext>
+            </a:extLst>
+          </p:cNvPr>
+          <p:cNvSpPr>
+            <a:spLocks xmlns:a="http://schemas.openxmlformats.org/drawingml/2006/main" noGrp="1"/>
+          </p:cNvSpPr>
+          <p:nvPr/>
+        </p:nvSpPr>
+        <p:spPr>
+          <a:xfrm xmlns:a="http://schemas.openxmlformats.org/drawingml/2006/main">
+            <a:off x="4584700" y="3638550"/>
+            <a:ext cx="1206500" cy="952500"/>
+          </a:xfrm>
+          <a:prstGeom xmlns:a="http://schemas.openxmlformats.org/drawingml/2006/main" prst="rect">
+            <a:avLst/>
+          </a:prstGeom>
+          <a:noFill xmlns:a="http://schemas.openxmlformats.org/drawingml/2006/main"/>
+          <a:ln xmlns:a="http://schemas.openxmlformats.org/drawingml/2006/main" w="0">
+            <a:noFill/>
+            <a:prstDash val="solid"/>
+          </a:ln>
+        </p:spPr>
+        <p:txBody>
+          <a:bodyPr xmlns:a="http://schemas.openxmlformats.org/drawingml/2006/main" lIns="0" tIns="0" rIns="0" bIns="0" anchor="t">
+            <a:normAutofit fontScale="100000"/>
+          </a:bodyPr>
+          <a:lstStyle xmlns:a="http://schemas.openxmlformats.org/drawingml/2006/main"/>
+          <a:p xmlns:a="http://schemas.openxmlformats.org/drawingml/2006/main">
+            <a:pPr algn="ctr">
+              <a:defRPr sz="1275" b="0">
+                <a:solidFill>
+                  <a:srgbClr val="607895"/>
+                </a:solidFill>
+                <a:latin typeface="Microsoft YaHei"/>
+                <a:ea typeface="Microsoft YaHei"/>
+                <a:cs typeface="Microsoft YaHei"/>
+              </a:defRPr>
+            </a:pPr>
+            <a:r>
+              <a:rPr sz="1275" b="0">
+                <a:solidFill>
+                  <a:srgbClr val="607895"/>
+                </a:solidFill>
+                <a:latin typeface="Microsoft YaHei"/>
+                <a:ea typeface="Microsoft YaHei"/>
+                <a:cs typeface="Microsoft YaHei"/>
+              </a:rPr>
+              <a:t>形成稳定实验与评估流程</a:t>
+            </a:r>
+          </a:p>
+        </p:txBody>
+      </p:sp>
+      <p:sp>
+        <p:nvSpPr>
+          <p:cNvPr id="18" name="PPAGENT_QA|parent=parallel-card-3|domains=parallel-card,parallel-content">
+            <a:extLst xmlns:a="http://schemas.openxmlformats.org/drawingml/2006/main">
+              <a:ext uri="{FF2B5EF4-FFF2-40B4-BE49-F238E27FC236}">
+                <a16:creationId xmlns:a16="http://schemas.microsoft.com/office/drawing/2014/main" id="{A5DDAE44-9D93-4E39-A84F-D4F0BADF4C1B}"/>
+              </a:ext>
+            </a:extLst>
+          </p:cNvPr>
+          <p:cNvSpPr>
+            <a:spLocks xmlns:a="http://schemas.openxmlformats.org/drawingml/2006/main" noGrp="1"/>
+          </p:cNvSpPr>
+          <p:nvPr/>
+        </p:nvSpPr>
+        <p:spPr>
+          <a:xfrm xmlns:a="http://schemas.openxmlformats.org/drawingml/2006/main">
+            <a:off x="6191250" y="1809750"/>
+            <a:ext cx="1625600" cy="3714750"/>
+          </a:xfrm>
+          <a:prstGeom xmlns:a="http://schemas.openxmlformats.org/drawingml/2006/main" prst="roundRect">
+            <a:avLst>
+              <a:gd name="adj" fmla="val 7031"/>
+            </a:avLst>
+          </a:prstGeom>
+          <a:solidFill xmlns:a="http://schemas.openxmlformats.org/drawingml/2006/main">
+            <a:srgbClr val="F1F8FF"/>
+          </a:solidFill>
+          <a:ln xmlns:a="http://schemas.openxmlformats.org/drawingml/2006/main" w="13335">
+            <a:solidFill>
+              <a:srgbClr val="7EB7ED"/>
+            </a:solidFill>
+            <a:prstDash val="solid"/>
+          </a:ln>
+        </p:spPr>
+        <p:style>
+          <a:lnRef xmlns:a="http://schemas.openxmlformats.org/drawingml/2006/main" idx="0"/>
+          <a:fillRef xmlns:a="http://schemas.openxmlformats.org/drawingml/2006/main" idx="0"/>
+          <a:effectRef xmlns:a="http://schemas.openxmlformats.org/drawingml/2006/main" idx="4"/>
+          <a:fontRef xmlns:a="http://schemas.openxmlformats.org/drawingml/2006/main" idx="major"/>
+        </p:style>
+      </p:sp>
+      <p:sp>
+        <p:nvSpPr>
+          <p:cNvPr id="19" name="PPAGENT_QA|within=parallel-card-3|role=accent-rail">
+            <a:extLst xmlns:a="http://schemas.openxmlformats.org/drawingml/2006/main">
+              <a:ext uri="{FF2B5EF4-FFF2-40B4-BE49-F238E27FC236}">
+                <a16:creationId xmlns:a16="http://schemas.microsoft.com/office/drawing/2014/main" id="{42FFF0F6-55B9-4983-B8B4-8712BD4D1CD6}"/>
+              </a:ext>
+            </a:extLst>
+          </p:cNvPr>
+          <p:cNvSpPr>
+            <a:spLocks xmlns:a="http://schemas.openxmlformats.org/drawingml/2006/main" noGrp="1"/>
+          </p:cNvSpPr>
+          <p:nvPr/>
+        </p:nvSpPr>
+        <p:spPr>
+          <a:xfrm xmlns:a="http://schemas.openxmlformats.org/drawingml/2006/main">
+            <a:off x="6191250" y="1809750"/>
+            <a:ext cx="1625600" cy="76200"/>
+          </a:xfrm>
+          <a:prstGeom xmlns:a="http://schemas.openxmlformats.org/drawingml/2006/main" prst="rect">
+            <a:avLst/>
+          </a:prstGeom>
+          <a:solidFill xmlns:a="http://schemas.openxmlformats.org/drawingml/2006/main">
+            <a:srgbClr val="4C88E8"/>
+          </a:solidFill>
+          <a:ln xmlns:a="http://schemas.openxmlformats.org/drawingml/2006/main" w="0">
+            <a:noFill/>
+            <a:prstDash val="solid"/>
+          </a:ln>
+        </p:spPr>
+      </p:sp>
+      <p:sp>
+        <p:nvSpPr>
+          <p:cNvPr id="20" name="PPAGENT_QA|within=parallel-card-3|role=index">
+            <a:extLst xmlns:a="http://schemas.openxmlformats.org/drawingml/2006/main">
+              <a:ext uri="{FF2B5EF4-FFF2-40B4-BE49-F238E27FC236}">
+                <a16:creationId xmlns:a16="http://schemas.microsoft.com/office/drawing/2014/main" id="{B0E37A3D-5A61-435A-A900-A6321CDFA879}"/>
+              </a:ext>
+            </a:extLst>
+          </p:cNvPr>
+          <p:cNvSpPr>
+            <a:spLocks xmlns:a="http://schemas.openxmlformats.org/drawingml/2006/main" noGrp="1"/>
+          </p:cNvSpPr>
+          <p:nvPr/>
+        </p:nvSpPr>
+        <p:spPr>
+          <a:xfrm xmlns:a="http://schemas.openxmlformats.org/drawingml/2006/main">
+            <a:off x="6381750" y="2114550"/>
+            <a:ext cx="514350" cy="514350"/>
+          </a:xfrm>
+          <a:prstGeom xmlns:a="http://schemas.openxmlformats.org/drawingml/2006/main" prst="ellipse">
+            <a:avLst/>
+          </a:prstGeom>
+          <a:solidFill xmlns:a="http://schemas.openxmlformats.org/drawingml/2006/main">
+            <a:srgbClr val="4C88E8"/>
+          </a:solidFill>
+          <a:ln xmlns:a="http://schemas.openxmlformats.org/drawingml/2006/main" w="19050">
+            <a:solidFill>
+              <a:srgbClr val="FFFFFF"/>
+            </a:solidFill>
+            <a:prstDash val="solid"/>
+          </a:ln>
+        </p:spPr>
+        <p:txBody>
+          <a:bodyPr xmlns:a="http://schemas.openxmlformats.org/drawingml/2006/main" lIns="0" tIns="0" rIns="0" bIns="0" anchor="ctr">
+            <a:normAutofit fontScale="100000"/>
+          </a:bodyPr>
+          <a:lstStyle xmlns:a="http://schemas.openxmlformats.org/drawingml/2006/main"/>
+          <a:p xmlns:a="http://schemas.openxmlformats.org/drawingml/2006/main">
+            <a:pPr algn="ctr">
+              <a:defRPr sz="1275" b="1">
+                <a:solidFill>
+                  <a:srgbClr val="FFFFFF"/>
+                </a:solidFill>
+                <a:latin typeface="Microsoft YaHei"/>
+                <a:ea typeface="Microsoft YaHei"/>
+                <a:cs typeface="Microsoft YaHei"/>
+              </a:defRPr>
+            </a:pPr>
+            <a:r>
+              <a:rPr sz="1275" b="1">
+                <a:solidFill>
+                  <a:srgbClr val="FFFFFF"/>
+                </a:solidFill>
+                <a:latin typeface="Microsoft YaHei"/>
+                <a:ea typeface="Microsoft YaHei"/>
+                <a:cs typeface="Microsoft YaHei"/>
+              </a:rPr>
+              <a:t>04</a:t>
+            </a:r>
+          </a:p>
+        </p:txBody>
+      </p:sp>
+      <p:sp>
+        <p:nvSpPr>
+          <p:cNvPr id="21" name="PPAGENT_QA|within=parallel-card-3|role=title">
+            <a:extLst xmlns:a="http://schemas.openxmlformats.org/drawingml/2006/main">
+              <a:ext uri="{FF2B5EF4-FFF2-40B4-BE49-F238E27FC236}">
+                <a16:creationId xmlns:a16="http://schemas.microsoft.com/office/drawing/2014/main" id="{BA0AD214-E248-46CC-9A2D-3A08C320B89E}"/>
+              </a:ext>
+            </a:extLst>
+          </p:cNvPr>
+          <p:cNvSpPr>
+            <a:spLocks xmlns:a="http://schemas.openxmlformats.org/drawingml/2006/main" noGrp="1"/>
+          </p:cNvSpPr>
+          <p:nvPr/>
+        </p:nvSpPr>
+        <p:spPr>
+          <a:xfrm xmlns:a="http://schemas.openxmlformats.org/drawingml/2006/main">
+            <a:off x="6381750" y="2952750"/>
+            <a:ext cx="1244600" cy="523875"/>
+          </a:xfrm>
+          <a:prstGeom xmlns:a="http://schemas.openxmlformats.org/drawingml/2006/main" prst="rect">
+            <a:avLst/>
+          </a:prstGeom>
+          <a:noFill xmlns:a="http://schemas.openxmlformats.org/drawingml/2006/main"/>
+          <a:ln xmlns:a="http://schemas.openxmlformats.org/drawingml/2006/main" w="0">
+            <a:noFill/>
+            <a:prstDash val="solid"/>
+          </a:ln>
+        </p:spPr>
+        <p:txBody>
+          <a:bodyPr xmlns:a="http://schemas.openxmlformats.org/drawingml/2006/main" lIns="0" tIns="0" rIns="0" bIns="0" anchor="ctr">
+            <a:normAutofit fontScale="100000"/>
+          </a:bodyPr>
+          <a:lstStyle xmlns:a="http://schemas.openxmlformats.org/drawingml/2006/main"/>
+          <a:p xmlns:a="http://schemas.openxmlformats.org/drawingml/2006/main">
+            <a:pPr algn="ctr">
+              <a:defRPr sz="1650" b="1">
+                <a:solidFill>
+                  <a:srgbClr val="174D87"/>
+                </a:solidFill>
+                <a:latin typeface="Microsoft YaHei"/>
+                <a:ea typeface="Microsoft YaHei"/>
+                <a:cs typeface="Microsoft YaHei"/>
+              </a:defRPr>
+            </a:pPr>
+            <a:r>
+              <a:rPr sz="1650" b="1">
+                <a:solidFill>
+                  <a:srgbClr val="174D87"/>
+                </a:solidFill>
+                <a:latin typeface="Microsoft YaHei"/>
+                <a:ea typeface="Microsoft YaHei"/>
+                <a:cs typeface="Microsoft YaHei"/>
+              </a:rPr>
+              <a:t>工程交付</a:t>
+            </a:r>
+          </a:p>
+        </p:txBody>
+      </p:sp>
+      <p:sp>
+        <p:nvSpPr>
+          <p:cNvPr id="22" name="PPAGENT_QA|within=parallel-card-3|role=body">
+            <a:extLst xmlns:a="http://schemas.openxmlformats.org/drawingml/2006/main">
+              <a:ext uri="{FF2B5EF4-FFF2-40B4-BE49-F238E27FC236}">
+                <a16:creationId xmlns:a16="http://schemas.microsoft.com/office/drawing/2014/main" id="{E04672A9-AFA5-4820-B1BD-69DBAB9FD495}"/>
+              </a:ext>
+            </a:extLst>
+          </p:cNvPr>
+          <p:cNvSpPr>
+            <a:spLocks xmlns:a="http://schemas.openxmlformats.org/drawingml/2006/main" noGrp="1"/>
+          </p:cNvSpPr>
+          <p:nvPr/>
+        </p:nvSpPr>
+        <p:spPr>
+          <a:xfrm xmlns:a="http://schemas.openxmlformats.org/drawingml/2006/main">
+            <a:off x="6400800" y="3638550"/>
+            <a:ext cx="1206500" cy="952500"/>
+          </a:xfrm>
+          <a:prstGeom xmlns:a="http://schemas.openxmlformats.org/drawingml/2006/main" prst="rect">
+            <a:avLst/>
+          </a:prstGeom>
+          <a:noFill xmlns:a="http://schemas.openxmlformats.org/drawingml/2006/main"/>
+          <a:ln xmlns:a="http://schemas.openxmlformats.org/drawingml/2006/main" w="0">
+            <a:noFill/>
+            <a:prstDash val="solid"/>
+          </a:ln>
+        </p:spPr>
+        <p:txBody>
+          <a:bodyPr xmlns:a="http://schemas.openxmlformats.org/drawingml/2006/main" lIns="0" tIns="0" rIns="0" bIns="0" anchor="t">
+            <a:normAutofit fontScale="100000"/>
+          </a:bodyPr>
+          <a:lstStyle xmlns:a="http://schemas.openxmlformats.org/drawingml/2006/main"/>
+          <a:p xmlns:a="http://schemas.openxmlformats.org/drawingml/2006/main">
+            <a:pPr algn="ctr">
+              <a:defRPr sz="1275" b="0">
+                <a:solidFill>
+                  <a:srgbClr val="607895"/>
+                </a:solidFill>
+                <a:latin typeface="Microsoft YaHei"/>
+                <a:ea typeface="Microsoft YaHei"/>
+                <a:cs typeface="Microsoft YaHei"/>
+              </a:defRPr>
+            </a:pPr>
+            <a:r>
+              <a:rPr sz="1275" b="0">
+                <a:solidFill>
+                  <a:srgbClr val="607895"/>
+                </a:solidFill>
+                <a:latin typeface="Microsoft YaHei"/>
+                <a:ea typeface="Microsoft YaHei"/>
+                <a:cs typeface="Microsoft YaHei"/>
+              </a:rPr>
+              <a:t>把研究能力转化为可用系统</a:t>
+            </a:r>
+          </a:p>
+        </p:txBody>
+      </p:sp>
+      <p:sp>
+        <p:nvSpPr>
+          <p:cNvPr id="23" name="PPAGENT_QA|parent=parallel-card-4|domains=parallel-card,parallel-content">
+            <a:extLst xmlns:a="http://schemas.openxmlformats.org/drawingml/2006/main">
+              <a:ext uri="{FF2B5EF4-FFF2-40B4-BE49-F238E27FC236}">
+                <a16:creationId xmlns:a16="http://schemas.microsoft.com/office/drawing/2014/main" id="{B26F3DF1-1E8C-4FE5-8094-5884C5A750D0}"/>
+              </a:ext>
+            </a:extLst>
+          </p:cNvPr>
+          <p:cNvSpPr>
+            <a:spLocks xmlns:a="http://schemas.openxmlformats.org/drawingml/2006/main" noGrp="1"/>
+          </p:cNvSpPr>
+          <p:nvPr/>
+        </p:nvSpPr>
+        <p:spPr>
+          <a:xfrm xmlns:a="http://schemas.openxmlformats.org/drawingml/2006/main">
+            <a:off x="8007350" y="1809750"/>
+            <a:ext cx="1625600" cy="3714750"/>
+          </a:xfrm>
+          <a:prstGeom xmlns:a="http://schemas.openxmlformats.org/drawingml/2006/main" prst="roundRect">
+            <a:avLst>
+              <a:gd name="adj" fmla="val 7031"/>
+            </a:avLst>
+          </a:prstGeom>
+          <a:solidFill xmlns:a="http://schemas.openxmlformats.org/drawingml/2006/main">
+            <a:srgbClr val="F7FBFF"/>
+          </a:solidFill>
+          <a:ln xmlns:a="http://schemas.openxmlformats.org/drawingml/2006/main" w="13335">
+            <a:solidFill>
+              <a:srgbClr val="A8CBEA"/>
+            </a:solidFill>
+            <a:prstDash val="solid"/>
+          </a:ln>
+        </p:spPr>
+        <p:style>
+          <a:lnRef xmlns:a="http://schemas.openxmlformats.org/drawingml/2006/main" idx="0"/>
+          <a:fillRef xmlns:a="http://schemas.openxmlformats.org/drawingml/2006/main" idx="0"/>
+          <a:effectRef xmlns:a="http://schemas.openxmlformats.org/drawingml/2006/main" idx="4"/>
+          <a:fontRef xmlns:a="http://schemas.openxmlformats.org/drawingml/2006/main" idx="major"/>
+        </p:style>
+      </p:sp>
+      <p:sp>
+        <p:nvSpPr>
+          <p:cNvPr id="24" name="PPAGENT_QA|within=parallel-card-4|role=accent-rail">
+            <a:extLst xmlns:a="http://schemas.openxmlformats.org/drawingml/2006/main">
+              <a:ext uri="{FF2B5EF4-FFF2-40B4-BE49-F238E27FC236}">
+                <a16:creationId xmlns:a16="http://schemas.microsoft.com/office/drawing/2014/main" id="{7FA0E444-84A6-4D73-8448-1AD06A60DEEE}"/>
+              </a:ext>
+            </a:extLst>
+          </p:cNvPr>
+          <p:cNvSpPr>
+            <a:spLocks xmlns:a="http://schemas.openxmlformats.org/drawingml/2006/main" noGrp="1"/>
+          </p:cNvSpPr>
+          <p:nvPr/>
+        </p:nvSpPr>
+        <p:spPr>
+          <a:xfrm xmlns:a="http://schemas.openxmlformats.org/drawingml/2006/main">
+            <a:off x="8007350" y="1809750"/>
+            <a:ext cx="1625600" cy="76200"/>
+          </a:xfrm>
+          <a:prstGeom xmlns:a="http://schemas.openxmlformats.org/drawingml/2006/main" prst="rect">
+            <a:avLst/>
+          </a:prstGeom>
+          <a:solidFill xmlns:a="http://schemas.openxmlformats.org/drawingml/2006/main">
+            <a:srgbClr val="2F5EA8"/>
+          </a:solidFill>
+          <a:ln xmlns:a="http://schemas.openxmlformats.org/drawingml/2006/main" w="0">
+            <a:noFill/>
+            <a:prstDash val="solid"/>
+          </a:ln>
+        </p:spPr>
+      </p:sp>
+      <p:sp>
+        <p:nvSpPr>
+          <p:cNvPr id="25" name="PPAGENT_QA|within=parallel-card-4|role=index">
+            <a:extLst xmlns:a="http://schemas.openxmlformats.org/drawingml/2006/main">
+              <a:ext uri="{FF2B5EF4-FFF2-40B4-BE49-F238E27FC236}">
+                <a16:creationId xmlns:a16="http://schemas.microsoft.com/office/drawing/2014/main" id="{70654357-E880-4ED7-A07B-DF8EBC203F58}"/>
+              </a:ext>
+            </a:extLst>
+          </p:cNvPr>
+          <p:cNvSpPr>
+            <a:spLocks xmlns:a="http://schemas.openxmlformats.org/drawingml/2006/main" noGrp="1"/>
+          </p:cNvSpPr>
+          <p:nvPr/>
+        </p:nvSpPr>
+        <p:spPr>
+          <a:xfrm xmlns:a="http://schemas.openxmlformats.org/drawingml/2006/main">
+            <a:off x="8197850" y="2114550"/>
+            <a:ext cx="514350" cy="514350"/>
+          </a:xfrm>
+          <a:prstGeom xmlns:a="http://schemas.openxmlformats.org/drawingml/2006/main" prst="ellipse">
+            <a:avLst/>
+          </a:prstGeom>
+          <a:solidFill xmlns:a="http://schemas.openxmlformats.org/drawingml/2006/main">
+            <a:srgbClr val="2F5EA8"/>
+          </a:solidFill>
+          <a:ln xmlns:a="http://schemas.openxmlformats.org/drawingml/2006/main" w="19050">
+            <a:solidFill>
+              <a:srgbClr val="FFFFFF"/>
+            </a:solidFill>
+            <a:prstDash val="solid"/>
+          </a:ln>
+        </p:spPr>
+        <p:txBody>
+          <a:bodyPr xmlns:a="http://schemas.openxmlformats.org/drawingml/2006/main" lIns="0" tIns="0" rIns="0" bIns="0" anchor="ctr">
+            <a:normAutofit fontScale="100000"/>
+          </a:bodyPr>
+          <a:lstStyle xmlns:a="http://schemas.openxmlformats.org/drawingml/2006/main"/>
+          <a:p xmlns:a="http://schemas.openxmlformats.org/drawingml/2006/main">
+            <a:pPr algn="ctr">
+              <a:defRPr sz="1275" b="1">
+                <a:solidFill>
+                  <a:srgbClr val="FFFFFF"/>
+                </a:solidFill>
+                <a:latin typeface="Microsoft YaHei"/>
+                <a:ea typeface="Microsoft YaHei"/>
+                <a:cs typeface="Microsoft YaHei"/>
+              </a:defRPr>
+            </a:pPr>
+            <a:r>
+              <a:rPr sz="1275" b="1">
+                <a:solidFill>
+                  <a:srgbClr val="FFFFFF"/>
+                </a:solidFill>
+                <a:latin typeface="Microsoft YaHei"/>
+                <a:ea typeface="Microsoft YaHei"/>
+                <a:cs typeface="Microsoft YaHei"/>
+              </a:rPr>
+              <a:t>05</a:t>
+            </a:r>
+          </a:p>
+        </p:txBody>
+      </p:sp>
+      <p:sp>
+        <p:nvSpPr>
+          <p:cNvPr id="26" name="PPAGENT_QA|within=parallel-card-4|role=title">
+            <a:extLst xmlns:a="http://schemas.openxmlformats.org/drawingml/2006/main">
+              <a:ext uri="{FF2B5EF4-FFF2-40B4-BE49-F238E27FC236}">
+                <a16:creationId xmlns:a16="http://schemas.microsoft.com/office/drawing/2014/main" id="{B529C9DF-054A-4021-868F-EB77DD5438D0}"/>
+              </a:ext>
+            </a:extLst>
+          </p:cNvPr>
+          <p:cNvSpPr>
+            <a:spLocks xmlns:a="http://schemas.openxmlformats.org/drawingml/2006/main" noGrp="1"/>
+          </p:cNvSpPr>
+          <p:nvPr/>
+        </p:nvSpPr>
+        <p:spPr>
+          <a:xfrm xmlns:a="http://schemas.openxmlformats.org/drawingml/2006/main">
+            <a:off x="8197850" y="2952750"/>
+            <a:ext cx="1244600" cy="523875"/>
+          </a:xfrm>
+          <a:prstGeom xmlns:a="http://schemas.openxmlformats.org/drawingml/2006/main" prst="rect">
+            <a:avLst/>
+          </a:prstGeom>
+          <a:noFill xmlns:a="http://schemas.openxmlformats.org/drawingml/2006/main"/>
+          <a:ln xmlns:a="http://schemas.openxmlformats.org/drawingml/2006/main" w="0">
+            <a:noFill/>
+            <a:prstDash val="solid"/>
+          </a:ln>
+        </p:spPr>
+        <p:txBody>
+          <a:bodyPr xmlns:a="http://schemas.openxmlformats.org/drawingml/2006/main" lIns="0" tIns="0" rIns="0" bIns="0" anchor="ctr">
+            <a:normAutofit fontScale="100000"/>
+          </a:bodyPr>
+          <a:lstStyle xmlns:a="http://schemas.openxmlformats.org/drawingml/2006/main"/>
+          <a:p xmlns:a="http://schemas.openxmlformats.org/drawingml/2006/main">
+            <a:pPr algn="ctr">
+              <a:defRPr sz="1650" b="1">
+                <a:solidFill>
+                  <a:srgbClr val="174D87"/>
+                </a:solidFill>
+                <a:latin typeface="Microsoft YaHei"/>
+                <a:ea typeface="Microsoft YaHei"/>
+                <a:cs typeface="Microsoft YaHei"/>
+              </a:defRPr>
+            </a:pPr>
+            <a:r>
+              <a:rPr sz="1650" b="1">
+                <a:solidFill>
+                  <a:srgbClr val="174D87"/>
+                </a:solidFill>
+                <a:latin typeface="Microsoft YaHei"/>
+                <a:ea typeface="Microsoft YaHei"/>
+                <a:cs typeface="Microsoft YaHei"/>
+              </a:rPr>
+              <a:t>协同机制</a:t>
+            </a:r>
+          </a:p>
+        </p:txBody>
+      </p:sp>
+      <p:sp>
+        <p:nvSpPr>
+          <p:cNvPr id="27" name="PPAGENT_QA|within=parallel-card-4|role=body">
+            <a:extLst xmlns:a="http://schemas.openxmlformats.org/drawingml/2006/main">
+              <a:ext uri="{FF2B5EF4-FFF2-40B4-BE49-F238E27FC236}">
+                <a16:creationId xmlns:a16="http://schemas.microsoft.com/office/drawing/2014/main" id="{D087C7DA-E433-4D87-B98C-25931DAF69D5}"/>
+              </a:ext>
+            </a:extLst>
+          </p:cNvPr>
+          <p:cNvSpPr>
+            <a:spLocks xmlns:a="http://schemas.openxmlformats.org/drawingml/2006/main" noGrp="1"/>
+          </p:cNvSpPr>
+          <p:nvPr/>
+        </p:nvSpPr>
+        <p:spPr>
+          <a:xfrm xmlns:a="http://schemas.openxmlformats.org/drawingml/2006/main">
+            <a:off x="8216900" y="3638550"/>
+            <a:ext cx="1206500" cy="952500"/>
+          </a:xfrm>
+          <a:prstGeom xmlns:a="http://schemas.openxmlformats.org/drawingml/2006/main" prst="rect">
+            <a:avLst/>
+          </a:prstGeom>
+          <a:noFill xmlns:a="http://schemas.openxmlformats.org/drawingml/2006/main"/>
+          <a:ln xmlns:a="http://schemas.openxmlformats.org/drawingml/2006/main" w="0">
+            <a:noFill/>
+            <a:prstDash val="solid"/>
+          </a:ln>
+        </p:spPr>
+        <p:txBody>
+          <a:bodyPr xmlns:a="http://schemas.openxmlformats.org/drawingml/2006/main" lIns="0" tIns="0" rIns="0" bIns="0" anchor="t">
+            <a:normAutofit fontScale="100000"/>
+          </a:bodyPr>
+          <a:lstStyle xmlns:a="http://schemas.openxmlformats.org/drawingml/2006/main"/>
+          <a:p xmlns:a="http://schemas.openxmlformats.org/drawingml/2006/main">
+            <a:pPr algn="ctr">
+              <a:defRPr sz="1275" b="0">
+                <a:solidFill>
+                  <a:srgbClr val="607895"/>
+                </a:solidFill>
+                <a:latin typeface="Microsoft YaHei"/>
+                <a:ea typeface="Microsoft YaHei"/>
+                <a:cs typeface="Microsoft YaHei"/>
+              </a:defRPr>
+            </a:pPr>
+            <a:r>
+              <a:rPr sz="1275" b="0">
+                <a:solidFill>
+                  <a:srgbClr val="607895"/>
+                </a:solidFill>
+                <a:latin typeface="Microsoft YaHei"/>
+                <a:ea typeface="Microsoft YaHei"/>
+                <a:cs typeface="Microsoft YaHei"/>
+              </a:rPr>
+              <a:t>让角色分工和信息接口清晰可见</a:t>
+            </a:r>
+          </a:p>
+        </p:txBody>
+      </p:sp>
+      <p:sp>
+        <p:nvSpPr>
+          <p:cNvPr id="28" name="PPAGENT_QA|parent=parallel-card-5|domains=parallel-card,parallel-content">
+            <a:extLst xmlns:a="http://schemas.openxmlformats.org/drawingml/2006/main">
+              <a:ext uri="{FF2B5EF4-FFF2-40B4-BE49-F238E27FC236}">
+                <a16:creationId xmlns:a16="http://schemas.microsoft.com/office/drawing/2014/main" id="{BF2F176C-C56A-410F-B3F4-0D634712FA70}"/>
+              </a:ext>
+            </a:extLst>
+          </p:cNvPr>
+          <p:cNvSpPr>
+            <a:spLocks xmlns:a="http://schemas.openxmlformats.org/drawingml/2006/main" noGrp="1"/>
+          </p:cNvSpPr>
+          <p:nvPr/>
+        </p:nvSpPr>
+        <p:spPr>
+          <a:xfrm xmlns:a="http://schemas.openxmlformats.org/drawingml/2006/main">
+            <a:off x="9823450" y="1809750"/>
+            <a:ext cx="1625600" cy="3714750"/>
+          </a:xfrm>
+          <a:prstGeom xmlns:a="http://schemas.openxmlformats.org/drawingml/2006/main" prst="roundRect">
+            <a:avLst>
+              <a:gd name="adj" fmla="val 7031"/>
+            </a:avLst>
+          </a:prstGeom>
+          <a:solidFill xmlns:a="http://schemas.openxmlformats.org/drawingml/2006/main">
+            <a:srgbClr val="F1F8FF"/>
+          </a:solidFill>
+          <a:ln xmlns:a="http://schemas.openxmlformats.org/drawingml/2006/main" w="13335">
+            <a:solidFill>
+              <a:srgbClr val="7EB7ED"/>
+            </a:solidFill>
+            <a:prstDash val="solid"/>
+          </a:ln>
+        </p:spPr>
+        <p:style>
+          <a:lnRef xmlns:a="http://schemas.openxmlformats.org/drawingml/2006/main" idx="0"/>
+          <a:fillRef xmlns:a="http://schemas.openxmlformats.org/drawingml/2006/main" idx="0"/>
+          <a:effectRef xmlns:a="http://schemas.openxmlformats.org/drawingml/2006/main" idx="4"/>
+          <a:fontRef xmlns:a="http://schemas.openxmlformats.org/drawingml/2006/main" idx="major"/>
+        </p:style>
+      </p:sp>
+      <p:sp>
+        <p:nvSpPr>
+          <p:cNvPr id="29" name="PPAGENT_QA|within=parallel-card-5|role=accent-rail">
+            <a:extLst xmlns:a="http://schemas.openxmlformats.org/drawingml/2006/main">
+              <a:ext uri="{FF2B5EF4-FFF2-40B4-BE49-F238E27FC236}">
+                <a16:creationId xmlns:a16="http://schemas.microsoft.com/office/drawing/2014/main" id="{32EE0127-1080-4197-A4BD-494D1077BA80}"/>
+              </a:ext>
+            </a:extLst>
+          </p:cNvPr>
+          <p:cNvSpPr>
+            <a:spLocks xmlns:a="http://schemas.openxmlformats.org/drawingml/2006/main" noGrp="1"/>
+          </p:cNvSpPr>
+          <p:nvPr/>
+        </p:nvSpPr>
+        <p:spPr>
+          <a:xfrm xmlns:a="http://schemas.openxmlformats.org/drawingml/2006/main">
+            <a:off x="9823450" y="1809750"/>
+            <a:ext cx="1625600" cy="76200"/>
+          </a:xfrm>
+          <a:prstGeom xmlns:a="http://schemas.openxmlformats.org/drawingml/2006/main" prst="rect">
+            <a:avLst/>
+          </a:prstGeom>
+          <a:solidFill xmlns:a="http://schemas.openxmlformats.org/drawingml/2006/main">
+            <a:srgbClr val="4C88E8"/>
+          </a:solidFill>
+          <a:ln xmlns:a="http://schemas.openxmlformats.org/drawingml/2006/main" w="0">
+            <a:noFill/>
+            <a:prstDash val="solid"/>
+          </a:ln>
+        </p:spPr>
+      </p:sp>
+      <p:sp>
+        <p:nvSpPr>
+          <p:cNvPr id="30" name="PPAGENT_QA|within=parallel-card-5|role=index">
+            <a:extLst xmlns:a="http://schemas.openxmlformats.org/drawingml/2006/main">
+              <a:ext uri="{FF2B5EF4-FFF2-40B4-BE49-F238E27FC236}">
+                <a16:creationId xmlns:a16="http://schemas.microsoft.com/office/drawing/2014/main" id="{889B53EA-4A11-4BF9-ADB0-561E8C03F730}"/>
+              </a:ext>
+            </a:extLst>
+          </p:cNvPr>
+          <p:cNvSpPr>
+            <a:spLocks xmlns:a="http://schemas.openxmlformats.org/drawingml/2006/main" noGrp="1"/>
+          </p:cNvSpPr>
+          <p:nvPr/>
+        </p:nvSpPr>
+        <p:spPr>
+          <a:xfrm xmlns:a="http://schemas.openxmlformats.org/drawingml/2006/main">
+            <a:off x="10013950" y="2114550"/>
+            <a:ext cx="514350" cy="514350"/>
+          </a:xfrm>
+          <a:prstGeom xmlns:a="http://schemas.openxmlformats.org/drawingml/2006/main" prst="ellipse">
+            <a:avLst/>
+          </a:prstGeom>
+          <a:solidFill xmlns:a="http://schemas.openxmlformats.org/drawingml/2006/main">
+            <a:srgbClr val="4C88E8"/>
+          </a:solidFill>
+          <a:ln xmlns:a="http://schemas.openxmlformats.org/drawingml/2006/main" w="19050">
+            <a:solidFill>
+              <a:srgbClr val="FFFFFF"/>
+            </a:solidFill>
+            <a:prstDash val="solid"/>
+          </a:ln>
+        </p:spPr>
+        <p:txBody>
+          <a:bodyPr xmlns:a="http://schemas.openxmlformats.org/drawingml/2006/main" lIns="0" tIns="0" rIns="0" bIns="0" anchor="ctr">
+            <a:normAutofit fontScale="100000"/>
+          </a:bodyPr>
+          <a:lstStyle xmlns:a="http://schemas.openxmlformats.org/drawingml/2006/main"/>
+          <a:p xmlns:a="http://schemas.openxmlformats.org/drawingml/2006/main">
+            <a:pPr algn="ctr">
+              <a:defRPr sz="1275" b="1">
+                <a:solidFill>
+                  <a:srgbClr val="FFFFFF"/>
+                </a:solidFill>
+                <a:latin typeface="Microsoft YaHei"/>
+                <a:ea typeface="Microsoft YaHei"/>
+                <a:cs typeface="Microsoft YaHei"/>
+              </a:defRPr>
+            </a:pPr>
+            <a:r>
+              <a:rPr sz="1275" b="1">
+                <a:solidFill>
+                  <a:srgbClr val="FFFFFF"/>
+                </a:solidFill>
+                <a:latin typeface="Microsoft YaHei"/>
+                <a:ea typeface="Microsoft YaHei"/>
+                <a:cs typeface="Microsoft YaHei"/>
+              </a:rPr>
+              <a:t>06</a:t>
+            </a:r>
+          </a:p>
+        </p:txBody>
+      </p:sp>
+      <p:sp>
+        <p:nvSpPr>
+          <p:cNvPr id="31" name="PPAGENT_QA|within=parallel-card-5|role=title">
+            <a:extLst xmlns:a="http://schemas.openxmlformats.org/drawingml/2006/main">
+              <a:ext uri="{FF2B5EF4-FFF2-40B4-BE49-F238E27FC236}">
+                <a16:creationId xmlns:a16="http://schemas.microsoft.com/office/drawing/2014/main" id="{900862FD-B7C1-4FF1-AFB3-0E5D9205DAD6}"/>
+              </a:ext>
+            </a:extLst>
+          </p:cNvPr>
+          <p:cNvSpPr>
+            <a:spLocks xmlns:a="http://schemas.openxmlformats.org/drawingml/2006/main" noGrp="1"/>
+          </p:cNvSpPr>
+          <p:nvPr/>
+        </p:nvSpPr>
+        <p:spPr>
+          <a:xfrm xmlns:a="http://schemas.openxmlformats.org/drawingml/2006/main">
+            <a:off x="10013950" y="2952750"/>
+            <a:ext cx="1244600" cy="523875"/>
+          </a:xfrm>
+          <a:prstGeom xmlns:a="http://schemas.openxmlformats.org/drawingml/2006/main" prst="rect">
+            <a:avLst/>
+          </a:prstGeom>
+          <a:noFill xmlns:a="http://schemas.openxmlformats.org/drawingml/2006/main"/>
+          <a:ln xmlns:a="http://schemas.openxmlformats.org/drawingml/2006/main" w="0">
+            <a:noFill/>
+            <a:prstDash val="solid"/>
+          </a:ln>
+        </p:spPr>
+        <p:txBody>
+          <a:bodyPr xmlns:a="http://schemas.openxmlformats.org/drawingml/2006/main" lIns="0" tIns="0" rIns="0" bIns="0" anchor="ctr">
+            <a:normAutofit fontScale="100000"/>
+          </a:bodyPr>
+          <a:lstStyle xmlns:a="http://schemas.openxmlformats.org/drawingml/2006/main"/>
+          <a:p xmlns:a="http://schemas.openxmlformats.org/drawingml/2006/main">
+            <a:pPr algn="ctr">
+              <a:defRPr sz="1650" b="1">
+                <a:solidFill>
+                  <a:srgbClr val="174D87"/>
+                </a:solidFill>
+                <a:latin typeface="Microsoft YaHei"/>
+                <a:ea typeface="Microsoft YaHei"/>
+                <a:cs typeface="Microsoft YaHei"/>
+              </a:defRPr>
+            </a:pPr>
+            <a:r>
+              <a:rPr sz="1650" b="1">
+                <a:solidFill>
+                  <a:srgbClr val="174D87"/>
+                </a:solidFill>
+                <a:latin typeface="Microsoft YaHei"/>
+                <a:ea typeface="Microsoft YaHei"/>
+                <a:cs typeface="Microsoft YaHei"/>
+              </a:rPr>
+              <a:t>质量控制</a:t>
+            </a:r>
+          </a:p>
+        </p:txBody>
+      </p:sp>
+      <p:sp>
+        <p:nvSpPr>
+          <p:cNvPr id="32" name="PPAGENT_QA|within=parallel-card-5|role=body">
+            <a:extLst xmlns:a="http://schemas.openxmlformats.org/drawingml/2006/main">
+              <a:ext uri="{FF2B5EF4-FFF2-40B4-BE49-F238E27FC236}">
+                <a16:creationId xmlns:a16="http://schemas.microsoft.com/office/drawing/2014/main" id="{143DAC47-FE02-4965-B25B-AA5E6F1732AF}"/>
+              </a:ext>
+            </a:extLst>
+          </p:cNvPr>
+          <p:cNvSpPr>
+            <a:spLocks xmlns:a="http://schemas.openxmlformats.org/drawingml/2006/main" noGrp="1"/>
+          </p:cNvSpPr>
+          <p:nvPr/>
+        </p:nvSpPr>
+        <p:spPr>
+          <a:xfrm xmlns:a="http://schemas.openxmlformats.org/drawingml/2006/main">
+            <a:off x="10033000" y="3638550"/>
+            <a:ext cx="1206500" cy="952500"/>
+          </a:xfrm>
+          <a:prstGeom xmlns:a="http://schemas.openxmlformats.org/drawingml/2006/main" prst="rect">
+            <a:avLst/>
+          </a:prstGeom>
+          <a:noFill xmlns:a="http://schemas.openxmlformats.org/drawingml/2006/main"/>
+          <a:ln xmlns:a="http://schemas.openxmlformats.org/drawingml/2006/main" w="0">
+            <a:noFill/>
+            <a:prstDash val="solid"/>
+          </a:ln>
+        </p:spPr>
+        <p:txBody>
+          <a:bodyPr xmlns:a="http://schemas.openxmlformats.org/drawingml/2006/main" lIns="0" tIns="0" rIns="0" bIns="0" anchor="t">
+            <a:normAutofit fontScale="100000"/>
+          </a:bodyPr>
+          <a:lstStyle xmlns:a="http://schemas.openxmlformats.org/drawingml/2006/main"/>
+          <a:p xmlns:a="http://schemas.openxmlformats.org/drawingml/2006/main">
+            <a:pPr algn="ctr">
+              <a:defRPr sz="1275" b="0">
+                <a:solidFill>
+                  <a:srgbClr val="607895"/>
+                </a:solidFill>
+                <a:latin typeface="Microsoft YaHei"/>
+                <a:ea typeface="Microsoft YaHei"/>
+                <a:cs typeface="Microsoft YaHei"/>
+              </a:defRPr>
+            </a:pPr>
+            <a:r>
+              <a:rPr sz="1275" b="0">
+                <a:solidFill>
+                  <a:srgbClr val="607895"/>
+                </a:solidFill>
+                <a:latin typeface="Microsoft YaHei"/>
+                <a:ea typeface="Microsoft YaHei"/>
+                <a:cs typeface="Microsoft YaHei"/>
+              </a:rPr>
+              <a:t>在交付前识别容量与几何风险</a:t>
+            </a:r>
+          </a:p>
+        </p:txBody>
+      </p:sp>
+    </p:spTree>
+    <p:extLst>
+      <p:ext uri="{BB962C8B-B14F-4D97-AF65-F5344CB8AC3E}">
+        <p14:creationId xmlns:p14="http://schemas.microsoft.com/office/powerpoint/2010/main" val="893387271"/>
+      </p:ext>
+    </p:extLst>
+  </p:cSld>
+</p:sld>
+</file>
+
+<file path=ppt/slides/slide5.xml><?xml version="1.0" encoding="utf-8"?>
+<p:sld xmlns:p="http://schemas.openxmlformats.org/presentationml/2006/main">
+  <p:cSld>
+    <p:bg>
+      <p:bgPr>
+        <a:solidFill xmlns:a="http://schemas.openxmlformats.org/drawingml/2006/main">
+          <a:srgbClr val="F7FAFC"/>
+        </a:solidFill>
+      </p:bgPr>
+    </p:bg>
+    <p:spTree>
+      <p:nvGrpSpPr>
+        <p:cNvPr id="1" name=""/>
+        <p:cNvGrpSpPr/>
+        <p:nvPr/>
+      </p:nvGrpSpPr>
+      <p:grpSpPr>
+        <a:xfrm xmlns:a="http://schemas.openxmlformats.org/drawingml/2006/main"/>
+      </p:grpSpPr>
+      <p:sp>
+        <p:nvSpPr>
+          <p:cNvPr id="38" name="">
+            <a:extLst xmlns:a="http://schemas.openxmlformats.org/drawingml/2006/main">
+              <a:ext uri="{FF2B5EF4-FFF2-40B4-BE49-F238E27FC236}">
+                <a16:creationId xmlns:a16="http://schemas.microsoft.com/office/drawing/2014/main" id="{46E161D4-AC74-480B-934C-1748344CF5B7}"/>
+              </a:ext>
+            </a:extLst>
+          </p:cNvPr>
+          <p:cNvSpPr>
+            <a:spLocks xmlns:a="http://schemas.openxmlformats.org/drawingml/2006/main" noGrp="1"/>
+          </p:cNvSpPr>
+          <p:nvPr/>
+        </p:nvSpPr>
+        <p:spPr>
+          <a:xfrm xmlns:a="http://schemas.openxmlformats.org/drawingml/2006/main">
+            <a:off x="685800" y="400050"/>
+            <a:ext cx="8382000" cy="457200"/>
+          </a:xfrm>
+          <a:prstGeom xmlns:a="http://schemas.openxmlformats.org/drawingml/2006/main" prst="rect">
+            <a:avLst/>
+          </a:prstGeom>
+          <a:noFill xmlns:a="http://schemas.openxmlformats.org/drawingml/2006/main"/>
+          <a:ln xmlns:a="http://schemas.openxmlformats.org/drawingml/2006/main" w="0">
+            <a:noFill/>
+            <a:prstDash val="solid"/>
+          </a:ln>
+        </p:spPr>
+        <p:txBody>
+          <a:bodyPr xmlns:a="http://schemas.openxmlformats.org/drawingml/2006/main" lIns="0" tIns="0" rIns="0" bIns="0" anchor="ctr">
+            <a:normAutofit fontScale="100000"/>
+          </a:bodyPr>
+          <a:lstStyle xmlns:a="http://schemas.openxmlformats.org/drawingml/2006/main"/>
+          <a:p xmlns:a="http://schemas.openxmlformats.org/drawingml/2006/main">
+            <a:pPr algn="l">
+              <a:defRPr sz="2700" b="1">
+                <a:solidFill>
+                  <a:srgbClr val="1677C8"/>
+                </a:solidFill>
+                <a:latin typeface="Microsoft YaHei"/>
+                <a:ea typeface="Microsoft YaHei"/>
+                <a:cs typeface="Microsoft YaHei"/>
+              </a:defRPr>
+            </a:pPr>
+            <a:r>
+              <a:rPr sz="2700" b="1">
+                <a:solidFill>
+                  <a:srgbClr val="1677C8"/>
+                </a:solidFill>
+                <a:latin typeface="Microsoft YaHei"/>
+                <a:ea typeface="Microsoft YaHei"/>
+                <a:cs typeface="Microsoft YaHei"/>
+              </a:rPr>
+              <a:t>同级能力建设</a:t>
+            </a:r>
+          </a:p>
+        </p:txBody>
+      </p:sp>
+      <p:sp>
+        <p:nvSpPr>
+          <p:cNvPr id="2" name="">
+            <a:extLst xmlns:a="http://schemas.openxmlformats.org/drawingml/2006/main">
+              <a:ext uri="{FF2B5EF4-FFF2-40B4-BE49-F238E27FC236}">
+                <a16:creationId xmlns:a16="http://schemas.microsoft.com/office/drawing/2014/main" id="{8AFCB743-90B7-4971-8AB3-E47E44EB1629}"/>
+              </a:ext>
+            </a:extLst>
+          </p:cNvPr>
+          <p:cNvSpPr>
+            <a:spLocks xmlns:a="http://schemas.openxmlformats.org/drawingml/2006/main" noGrp="1"/>
+          </p:cNvSpPr>
+          <p:nvPr/>
+        </p:nvSpPr>
+        <p:spPr>
+          <a:xfrm xmlns:a="http://schemas.openxmlformats.org/drawingml/2006/main">
+            <a:off x="704850" y="876300"/>
+            <a:ext cx="4953000" cy="247650"/>
+          </a:xfrm>
+          <a:prstGeom xmlns:a="http://schemas.openxmlformats.org/drawingml/2006/main" prst="rect">
+            <a:avLst/>
+          </a:prstGeom>
+          <a:noFill xmlns:a="http://schemas.openxmlformats.org/drawingml/2006/main"/>
+          <a:ln xmlns:a="http://schemas.openxmlformats.org/drawingml/2006/main" w="0">
+            <a:noFill/>
+            <a:prstDash val="solid"/>
+          </a:ln>
+        </p:spPr>
+        <p:txBody>
+          <a:bodyPr xmlns:a="http://schemas.openxmlformats.org/drawingml/2006/main" lIns="0" tIns="0" rIns="0" bIns="0" anchor="ctr">
+            <a:normAutofit fontScale="100000"/>
+          </a:bodyPr>
+          <a:lstStyle xmlns:a="http://schemas.openxmlformats.org/drawingml/2006/main"/>
+          <a:p xmlns:a="http://schemas.openxmlformats.org/drawingml/2006/main">
+            <a:pPr algn="l">
+              <a:defRPr sz="1200" b="0">
+                <a:solidFill>
+                  <a:srgbClr val="7C8A9A"/>
+                </a:solidFill>
+                <a:latin typeface="Microsoft YaHei"/>
+                <a:ea typeface="Microsoft YaHei"/>
+                <a:cs typeface="Microsoft YaHei"/>
+              </a:defRPr>
+            </a:pPr>
+            <a:r>
+              <a:rPr sz="1200" b="0">
+                <a:solidFill>
+                  <a:srgbClr val="7C8A9A"/>
+                </a:solidFill>
+                <a:latin typeface="Microsoft YaHei"/>
+                <a:ea typeface="Microsoft YaHei"/>
+                <a:cs typeface="Microsoft YaHei"/>
+              </a:rPr>
+              <a:t>并列关系 · 同级能力</a:t>
+            </a:r>
+          </a:p>
+        </p:txBody>
+      </p:sp>
+      <p:sp>
+        <p:nvSpPr>
+          <p:cNvPr id="3" name="PPAGENT_QA|parent=parallel-card-0|domains=parallel-card,parallel-content">
+            <a:extLst xmlns:a="http://schemas.openxmlformats.org/drawingml/2006/main">
+              <a:ext uri="{FF2B5EF4-FFF2-40B4-BE49-F238E27FC236}">
+                <a16:creationId xmlns:a16="http://schemas.microsoft.com/office/drawing/2014/main" id="{3B7A3E59-DE40-4446-9FAF-D501D505B1D7}"/>
+              </a:ext>
+            </a:extLst>
+          </p:cNvPr>
+          <p:cNvSpPr>
+            <a:spLocks xmlns:a="http://schemas.openxmlformats.org/drawingml/2006/main" noGrp="1"/>
+          </p:cNvSpPr>
+          <p:nvPr/>
+        </p:nvSpPr>
+        <p:spPr>
+          <a:xfrm xmlns:a="http://schemas.openxmlformats.org/drawingml/2006/main">
+            <a:off x="742950" y="1809750"/>
+            <a:ext cx="1366157" cy="3714750"/>
+          </a:xfrm>
+          <a:prstGeom xmlns:a="http://schemas.openxmlformats.org/drawingml/2006/main" prst="roundRect">
+            <a:avLst>
+              <a:gd name="adj" fmla="val 8367"/>
+            </a:avLst>
+          </a:prstGeom>
+          <a:solidFill xmlns:a="http://schemas.openxmlformats.org/drawingml/2006/main">
+            <a:srgbClr val="F7FBFF"/>
+          </a:solidFill>
+          <a:ln xmlns:a="http://schemas.openxmlformats.org/drawingml/2006/main" w="13335">
+            <a:solidFill>
+              <a:srgbClr val="A8CBEA"/>
+            </a:solidFill>
+            <a:prstDash val="solid"/>
+          </a:ln>
+        </p:spPr>
+        <p:style>
+          <a:lnRef xmlns:a="http://schemas.openxmlformats.org/drawingml/2006/main" idx="0"/>
+          <a:fillRef xmlns:a="http://schemas.openxmlformats.org/drawingml/2006/main" idx="0"/>
+          <a:effectRef xmlns:a="http://schemas.openxmlformats.org/drawingml/2006/main" idx="4"/>
+          <a:fontRef xmlns:a="http://schemas.openxmlformats.org/drawingml/2006/main" idx="major"/>
+        </p:style>
+      </p:sp>
+      <p:sp>
+        <p:nvSpPr>
+          <p:cNvPr id="4" name="PPAGENT_QA|within=parallel-card-0|role=accent-rail">
+            <a:extLst xmlns:a="http://schemas.openxmlformats.org/drawingml/2006/main">
+              <a:ext uri="{FF2B5EF4-FFF2-40B4-BE49-F238E27FC236}">
+                <a16:creationId xmlns:a16="http://schemas.microsoft.com/office/drawing/2014/main" id="{918A05A4-9422-4C34-B26B-A026A98B58D9}"/>
+              </a:ext>
+            </a:extLst>
+          </p:cNvPr>
+          <p:cNvSpPr>
+            <a:spLocks xmlns:a="http://schemas.openxmlformats.org/drawingml/2006/main" noGrp="1"/>
+          </p:cNvSpPr>
+          <p:nvPr/>
+        </p:nvSpPr>
+        <p:spPr>
+          <a:xfrm xmlns:a="http://schemas.openxmlformats.org/drawingml/2006/main">
+            <a:off x="742950" y="1809750"/>
+            <a:ext cx="1366157" cy="76200"/>
+          </a:xfrm>
+          <a:prstGeom xmlns:a="http://schemas.openxmlformats.org/drawingml/2006/main" prst="rect">
+            <a:avLst/>
+          </a:prstGeom>
+          <a:solidFill xmlns:a="http://schemas.openxmlformats.org/drawingml/2006/main">
+            <a:srgbClr val="2F5EA8"/>
+          </a:solidFill>
+          <a:ln xmlns:a="http://schemas.openxmlformats.org/drawingml/2006/main" w="0">
+            <a:noFill/>
+            <a:prstDash val="solid"/>
+          </a:ln>
+        </p:spPr>
+      </p:sp>
+      <p:sp>
+        <p:nvSpPr>
+          <p:cNvPr id="5" name="PPAGENT_QA|within=parallel-card-0|role=index">
+            <a:extLst xmlns:a="http://schemas.openxmlformats.org/drawingml/2006/main">
+              <a:ext uri="{FF2B5EF4-FFF2-40B4-BE49-F238E27FC236}">
+                <a16:creationId xmlns:a16="http://schemas.microsoft.com/office/drawing/2014/main" id="{FE275F18-C4C5-436B-880E-AC61F7DD2239}"/>
+              </a:ext>
+            </a:extLst>
+          </p:cNvPr>
+          <p:cNvSpPr>
+            <a:spLocks xmlns:a="http://schemas.openxmlformats.org/drawingml/2006/main" noGrp="1"/>
+          </p:cNvSpPr>
+          <p:nvPr/>
+        </p:nvSpPr>
+        <p:spPr>
+          <a:xfrm xmlns:a="http://schemas.openxmlformats.org/drawingml/2006/main">
+            <a:off x="933450" y="2114550"/>
+            <a:ext cx="514350" cy="514350"/>
+          </a:xfrm>
+          <a:prstGeom xmlns:a="http://schemas.openxmlformats.org/drawingml/2006/main" prst="ellipse">
+            <a:avLst/>
+          </a:prstGeom>
+          <a:solidFill xmlns:a="http://schemas.openxmlformats.org/drawingml/2006/main">
+            <a:srgbClr val="2F5EA8"/>
+          </a:solidFill>
+          <a:ln xmlns:a="http://schemas.openxmlformats.org/drawingml/2006/main" w="19050">
+            <a:solidFill>
+              <a:srgbClr val="FFFFFF"/>
+            </a:solidFill>
+            <a:prstDash val="solid"/>
+          </a:ln>
+        </p:spPr>
+        <p:txBody>
+          <a:bodyPr xmlns:a="http://schemas.openxmlformats.org/drawingml/2006/main" lIns="0" tIns="0" rIns="0" bIns="0" anchor="ctr">
+            <a:normAutofit fontScale="100000"/>
+          </a:bodyPr>
+          <a:lstStyle xmlns:a="http://schemas.openxmlformats.org/drawingml/2006/main"/>
+          <a:p xmlns:a="http://schemas.openxmlformats.org/drawingml/2006/main">
+            <a:pPr algn="ctr">
+              <a:defRPr sz="1275" b="1">
+                <a:solidFill>
+                  <a:srgbClr val="FFFFFF"/>
+                </a:solidFill>
+                <a:latin typeface="Microsoft YaHei"/>
+                <a:ea typeface="Microsoft YaHei"/>
+                <a:cs typeface="Microsoft YaHei"/>
+              </a:defRPr>
+            </a:pPr>
+            <a:r>
+              <a:rPr sz="1275" b="1">
+                <a:solidFill>
+                  <a:srgbClr val="FFFFFF"/>
+                </a:solidFill>
+                <a:latin typeface="Microsoft YaHei"/>
+                <a:ea typeface="Microsoft YaHei"/>
+                <a:cs typeface="Microsoft YaHei"/>
+              </a:rPr>
+              <a:t>01</a:t>
+            </a:r>
+          </a:p>
+        </p:txBody>
+      </p:sp>
+      <p:sp>
+        <p:nvSpPr>
+          <p:cNvPr id="6" name="PPAGENT_QA|within=parallel-card-0|role=title">
+            <a:extLst xmlns:a="http://schemas.openxmlformats.org/drawingml/2006/main">
+              <a:ext uri="{FF2B5EF4-FFF2-40B4-BE49-F238E27FC236}">
+                <a16:creationId xmlns:a16="http://schemas.microsoft.com/office/drawing/2014/main" id="{3DAB680D-6EF1-484A-B8AB-158B7BD2A2CC}"/>
+              </a:ext>
+            </a:extLst>
+          </p:cNvPr>
+          <p:cNvSpPr>
+            <a:spLocks xmlns:a="http://schemas.openxmlformats.org/drawingml/2006/main" noGrp="1"/>
+          </p:cNvSpPr>
+          <p:nvPr/>
+        </p:nvSpPr>
+        <p:spPr>
+          <a:xfrm xmlns:a="http://schemas.openxmlformats.org/drawingml/2006/main">
+            <a:off x="933450" y="2952750"/>
+            <a:ext cx="985157" cy="523875"/>
+          </a:xfrm>
+          <a:prstGeom xmlns:a="http://schemas.openxmlformats.org/drawingml/2006/main" prst="rect">
+            <a:avLst/>
+          </a:prstGeom>
+          <a:noFill xmlns:a="http://schemas.openxmlformats.org/drawingml/2006/main"/>
+          <a:ln xmlns:a="http://schemas.openxmlformats.org/drawingml/2006/main" w="0">
+            <a:noFill/>
+            <a:prstDash val="solid"/>
+          </a:ln>
+        </p:spPr>
+        <p:txBody>
+          <a:bodyPr xmlns:a="http://schemas.openxmlformats.org/drawingml/2006/main" lIns="0" tIns="0" rIns="0" bIns="0" anchor="ctr">
+            <a:normAutofit fontScale="100000"/>
+          </a:bodyPr>
+          <a:lstStyle xmlns:a="http://schemas.openxmlformats.org/drawingml/2006/main"/>
+          <a:p xmlns:a="http://schemas.openxmlformats.org/drawingml/2006/main">
+            <a:pPr algn="ctr">
+              <a:defRPr sz="1650" b="1">
+                <a:solidFill>
+                  <a:srgbClr val="174D87"/>
+                </a:solidFill>
+                <a:latin typeface="Microsoft YaHei"/>
+                <a:ea typeface="Microsoft YaHei"/>
+                <a:cs typeface="Microsoft YaHei"/>
+              </a:defRPr>
+            </a:pPr>
+            <a:r>
+              <a:rPr sz="1650" b="1">
+                <a:solidFill>
+                  <a:srgbClr val="174D87"/>
+                </a:solidFill>
+                <a:latin typeface="Microsoft YaHei"/>
+                <a:ea typeface="Microsoft YaHei"/>
+                <a:cs typeface="Microsoft YaHei"/>
+              </a:rPr>
+              <a:t>数据基础</a:t>
+            </a:r>
+          </a:p>
+        </p:txBody>
+      </p:sp>
+      <p:sp>
+        <p:nvSpPr>
+          <p:cNvPr id="7" name="PPAGENT_QA|within=parallel-card-0|role=body">
+            <a:extLst xmlns:a="http://schemas.openxmlformats.org/drawingml/2006/main">
+              <a:ext uri="{FF2B5EF4-FFF2-40B4-BE49-F238E27FC236}">
+                <a16:creationId xmlns:a16="http://schemas.microsoft.com/office/drawing/2014/main" id="{005DA010-BF04-4B8D-A971-55EB3618A613}"/>
+              </a:ext>
+            </a:extLst>
+          </p:cNvPr>
+          <p:cNvSpPr>
+            <a:spLocks xmlns:a="http://schemas.openxmlformats.org/drawingml/2006/main" noGrp="1"/>
+          </p:cNvSpPr>
+          <p:nvPr/>
+        </p:nvSpPr>
+        <p:spPr>
+          <a:xfrm xmlns:a="http://schemas.openxmlformats.org/drawingml/2006/main">
+            <a:off x="952500" y="3638550"/>
+            <a:ext cx="947057" cy="952500"/>
+          </a:xfrm>
+          <a:prstGeom xmlns:a="http://schemas.openxmlformats.org/drawingml/2006/main" prst="rect">
+            <a:avLst/>
+          </a:prstGeom>
+          <a:noFill xmlns:a="http://schemas.openxmlformats.org/drawingml/2006/main"/>
+          <a:ln xmlns:a="http://schemas.openxmlformats.org/drawingml/2006/main" w="0">
+            <a:noFill/>
+            <a:prstDash val="solid"/>
+          </a:ln>
+        </p:spPr>
+        <p:txBody>
+          <a:bodyPr xmlns:a="http://schemas.openxmlformats.org/drawingml/2006/main" lIns="0" tIns="0" rIns="0" bIns="0" anchor="t">
+            <a:normAutofit fontScale="100000"/>
+          </a:bodyPr>
+          <a:lstStyle xmlns:a="http://schemas.openxmlformats.org/drawingml/2006/main"/>
+          <a:p xmlns:a="http://schemas.openxmlformats.org/drawingml/2006/main">
+            <a:pPr algn="ctr">
+              <a:defRPr sz="1275" b="0">
+                <a:solidFill>
+                  <a:srgbClr val="607895"/>
+                </a:solidFill>
+                <a:latin typeface="Microsoft YaHei"/>
+                <a:ea typeface="Microsoft YaHei"/>
+                <a:cs typeface="Microsoft YaHei"/>
+              </a:defRPr>
+            </a:pPr>
+            <a:r>
+              <a:rPr sz="1275" b="0">
+                <a:solidFill>
+                  <a:srgbClr val="607895"/>
+                </a:solidFill>
+                <a:latin typeface="Microsoft YaHei"/>
+                <a:ea typeface="Microsoft YaHei"/>
+                <a:cs typeface="Microsoft YaHei"/>
+              </a:rPr>
+              <a:t>统一数据标准与治理口径</a:t>
+            </a:r>
+          </a:p>
+        </p:txBody>
+      </p:sp>
+      <p:sp>
+        <p:nvSpPr>
+          <p:cNvPr id="8" name="PPAGENT_QA|parent=parallel-card-1|domains=parallel-card,parallel-content">
+            <a:extLst xmlns:a="http://schemas.openxmlformats.org/drawingml/2006/main">
+              <a:ext uri="{FF2B5EF4-FFF2-40B4-BE49-F238E27FC236}">
+                <a16:creationId xmlns:a16="http://schemas.microsoft.com/office/drawing/2014/main" id="{5FE5A1E0-4893-439A-80DD-BD968E26E5C5}"/>
+              </a:ext>
+            </a:extLst>
+          </p:cNvPr>
+          <p:cNvSpPr>
+            <a:spLocks xmlns:a="http://schemas.openxmlformats.org/drawingml/2006/main" noGrp="1"/>
+          </p:cNvSpPr>
+          <p:nvPr/>
+        </p:nvSpPr>
+        <p:spPr>
+          <a:xfrm xmlns:a="http://schemas.openxmlformats.org/drawingml/2006/main">
+            <a:off x="2299607" y="1809750"/>
+            <a:ext cx="1366157" cy="3714750"/>
+          </a:xfrm>
+          <a:prstGeom xmlns:a="http://schemas.openxmlformats.org/drawingml/2006/main" prst="roundRect">
+            <a:avLst>
+              <a:gd name="adj" fmla="val 8367"/>
+            </a:avLst>
+          </a:prstGeom>
+          <a:solidFill xmlns:a="http://schemas.openxmlformats.org/drawingml/2006/main">
+            <a:srgbClr val="F1F8FF"/>
+          </a:solidFill>
+          <a:ln xmlns:a="http://schemas.openxmlformats.org/drawingml/2006/main" w="13335">
+            <a:solidFill>
+              <a:srgbClr val="7EB7ED"/>
+            </a:solidFill>
+            <a:prstDash val="solid"/>
+          </a:ln>
+        </p:spPr>
+        <p:style>
+          <a:lnRef xmlns:a="http://schemas.openxmlformats.org/drawingml/2006/main" idx="0"/>
+          <a:fillRef xmlns:a="http://schemas.openxmlformats.org/drawingml/2006/main" idx="0"/>
+          <a:effectRef xmlns:a="http://schemas.openxmlformats.org/drawingml/2006/main" idx="4"/>
+          <a:fontRef xmlns:a="http://schemas.openxmlformats.org/drawingml/2006/main" idx="major"/>
+        </p:style>
+      </p:sp>
+      <p:sp>
+        <p:nvSpPr>
+          <p:cNvPr id="9" name="PPAGENT_QA|within=parallel-card-1|role=accent-rail">
+            <a:extLst xmlns:a="http://schemas.openxmlformats.org/drawingml/2006/main">
+              <a:ext uri="{FF2B5EF4-FFF2-40B4-BE49-F238E27FC236}">
+                <a16:creationId xmlns:a16="http://schemas.microsoft.com/office/drawing/2014/main" id="{E851FD19-D923-43C2-B020-CF0B0DFC8134}"/>
+              </a:ext>
+            </a:extLst>
+          </p:cNvPr>
+          <p:cNvSpPr>
+            <a:spLocks xmlns:a="http://schemas.openxmlformats.org/drawingml/2006/main" noGrp="1"/>
+          </p:cNvSpPr>
+          <p:nvPr/>
+        </p:nvSpPr>
+        <p:spPr>
+          <a:xfrm xmlns:a="http://schemas.openxmlformats.org/drawingml/2006/main">
+            <a:off x="2299607" y="1809750"/>
+            <a:ext cx="1366157" cy="76200"/>
+          </a:xfrm>
+          <a:prstGeom xmlns:a="http://schemas.openxmlformats.org/drawingml/2006/main" prst="rect">
+            <a:avLst/>
+          </a:prstGeom>
+          <a:solidFill xmlns:a="http://schemas.openxmlformats.org/drawingml/2006/main">
+            <a:srgbClr val="4C88E8"/>
+          </a:solidFill>
+          <a:ln xmlns:a="http://schemas.openxmlformats.org/drawingml/2006/main" w="0">
+            <a:noFill/>
+            <a:prstDash val="solid"/>
+          </a:ln>
+        </p:spPr>
+      </p:sp>
+      <p:sp>
+        <p:nvSpPr>
+          <p:cNvPr id="10" name="PPAGENT_QA|within=parallel-card-1|role=index">
+            <a:extLst xmlns:a="http://schemas.openxmlformats.org/drawingml/2006/main">
+              <a:ext uri="{FF2B5EF4-FFF2-40B4-BE49-F238E27FC236}">
+                <a16:creationId xmlns:a16="http://schemas.microsoft.com/office/drawing/2014/main" id="{3201FF70-70C3-408D-AA6C-3EB9C3559158}"/>
+              </a:ext>
+            </a:extLst>
+          </p:cNvPr>
+          <p:cNvSpPr>
+            <a:spLocks xmlns:a="http://schemas.openxmlformats.org/drawingml/2006/main" noGrp="1"/>
+          </p:cNvSpPr>
+          <p:nvPr/>
+        </p:nvSpPr>
+        <p:spPr>
+          <a:xfrm xmlns:a="http://schemas.openxmlformats.org/drawingml/2006/main">
+            <a:off x="2490107" y="2114550"/>
+            <a:ext cx="514350" cy="514350"/>
+          </a:xfrm>
+          <a:prstGeom xmlns:a="http://schemas.openxmlformats.org/drawingml/2006/main" prst="ellipse">
+            <a:avLst/>
+          </a:prstGeom>
+          <a:solidFill xmlns:a="http://schemas.openxmlformats.org/drawingml/2006/main">
+            <a:srgbClr val="4C88E8"/>
+          </a:solidFill>
+          <a:ln xmlns:a="http://schemas.openxmlformats.org/drawingml/2006/main" w="19050">
+            <a:solidFill>
+              <a:srgbClr val="FFFFFF"/>
+            </a:solidFill>
+            <a:prstDash val="solid"/>
+          </a:ln>
+        </p:spPr>
+        <p:txBody>
+          <a:bodyPr xmlns:a="http://schemas.openxmlformats.org/drawingml/2006/main" lIns="0" tIns="0" rIns="0" bIns="0" anchor="ctr">
+            <a:normAutofit fontScale="100000"/>
+          </a:bodyPr>
+          <a:lstStyle xmlns:a="http://schemas.openxmlformats.org/drawingml/2006/main"/>
+          <a:p xmlns:a="http://schemas.openxmlformats.org/drawingml/2006/main">
+            <a:pPr algn="ctr">
+              <a:defRPr sz="1275" b="1">
+                <a:solidFill>
+                  <a:srgbClr val="FFFFFF"/>
+                </a:solidFill>
+                <a:latin typeface="Microsoft YaHei"/>
+                <a:ea typeface="Microsoft YaHei"/>
+                <a:cs typeface="Microsoft YaHei"/>
+              </a:defRPr>
+            </a:pPr>
+            <a:r>
+              <a:rPr sz="1275" b="1">
+                <a:solidFill>
+                  <a:srgbClr val="FFFFFF"/>
+                </a:solidFill>
+                <a:latin typeface="Microsoft YaHei"/>
+                <a:ea typeface="Microsoft YaHei"/>
+                <a:cs typeface="Microsoft YaHei"/>
+              </a:rPr>
+              <a:t>02</a:t>
+            </a:r>
+          </a:p>
+        </p:txBody>
+      </p:sp>
+      <p:sp>
+        <p:nvSpPr>
+          <p:cNvPr id="11" name="PPAGENT_QA|within=parallel-card-1|role=title">
+            <a:extLst xmlns:a="http://schemas.openxmlformats.org/drawingml/2006/main">
+              <a:ext uri="{FF2B5EF4-FFF2-40B4-BE49-F238E27FC236}">
+                <a16:creationId xmlns:a16="http://schemas.microsoft.com/office/drawing/2014/main" id="{BF10087A-84CA-45BC-8DCA-CDFA8D0352AA}"/>
+              </a:ext>
+            </a:extLst>
+          </p:cNvPr>
+          <p:cNvSpPr>
+            <a:spLocks xmlns:a="http://schemas.openxmlformats.org/drawingml/2006/main" noGrp="1"/>
+          </p:cNvSpPr>
+          <p:nvPr/>
+        </p:nvSpPr>
+        <p:spPr>
+          <a:xfrm xmlns:a="http://schemas.openxmlformats.org/drawingml/2006/main">
+            <a:off x="2490107" y="2952750"/>
+            <a:ext cx="985157" cy="523875"/>
+          </a:xfrm>
+          <a:prstGeom xmlns:a="http://schemas.openxmlformats.org/drawingml/2006/main" prst="rect">
+            <a:avLst/>
+          </a:prstGeom>
+          <a:noFill xmlns:a="http://schemas.openxmlformats.org/drawingml/2006/main"/>
+          <a:ln xmlns:a="http://schemas.openxmlformats.org/drawingml/2006/main" w="0">
+            <a:noFill/>
+            <a:prstDash val="solid"/>
+          </a:ln>
+        </p:spPr>
+        <p:txBody>
+          <a:bodyPr xmlns:a="http://schemas.openxmlformats.org/drawingml/2006/main" lIns="0" tIns="0" rIns="0" bIns="0" anchor="ctr">
+            <a:normAutofit fontScale="100000"/>
+          </a:bodyPr>
+          <a:lstStyle xmlns:a="http://schemas.openxmlformats.org/drawingml/2006/main"/>
+          <a:p xmlns:a="http://schemas.openxmlformats.org/drawingml/2006/main">
+            <a:pPr algn="ctr">
+              <a:defRPr sz="1650" b="1">
+                <a:solidFill>
+                  <a:srgbClr val="174D87"/>
+                </a:solidFill>
+                <a:latin typeface="Microsoft YaHei"/>
+                <a:ea typeface="Microsoft YaHei"/>
+                <a:cs typeface="Microsoft YaHei"/>
+              </a:defRPr>
+            </a:pPr>
+            <a:r>
+              <a:rPr sz="1650" b="1">
+                <a:solidFill>
+                  <a:srgbClr val="174D87"/>
+                </a:solidFill>
+                <a:latin typeface="Microsoft YaHei"/>
+                <a:ea typeface="Microsoft YaHei"/>
+                <a:cs typeface="Microsoft YaHei"/>
+              </a:rPr>
+              <a:t>模型能力</a:t>
+            </a:r>
+          </a:p>
+        </p:txBody>
+      </p:sp>
+      <p:sp>
+        <p:nvSpPr>
+          <p:cNvPr id="12" name="PPAGENT_QA|within=parallel-card-1|role=body">
+            <a:extLst xmlns:a="http://schemas.openxmlformats.org/drawingml/2006/main">
+              <a:ext uri="{FF2B5EF4-FFF2-40B4-BE49-F238E27FC236}">
+                <a16:creationId xmlns:a16="http://schemas.microsoft.com/office/drawing/2014/main" id="{638145DE-8E34-4A2F-BE94-DE4C903A4116}"/>
+              </a:ext>
+            </a:extLst>
+          </p:cNvPr>
+          <p:cNvSpPr>
+            <a:spLocks xmlns:a="http://schemas.openxmlformats.org/drawingml/2006/main" noGrp="1"/>
+          </p:cNvSpPr>
+          <p:nvPr/>
+        </p:nvSpPr>
+        <p:spPr>
+          <a:xfrm xmlns:a="http://schemas.openxmlformats.org/drawingml/2006/main">
+            <a:off x="2509157" y="3638550"/>
+            <a:ext cx="947057" cy="952500"/>
+          </a:xfrm>
+          <a:prstGeom xmlns:a="http://schemas.openxmlformats.org/drawingml/2006/main" prst="rect">
+            <a:avLst/>
+          </a:prstGeom>
+          <a:noFill xmlns:a="http://schemas.openxmlformats.org/drawingml/2006/main"/>
+          <a:ln xmlns:a="http://schemas.openxmlformats.org/drawingml/2006/main" w="0">
+            <a:noFill/>
+            <a:prstDash val="solid"/>
+          </a:ln>
+        </p:spPr>
+        <p:txBody>
+          <a:bodyPr xmlns:a="http://schemas.openxmlformats.org/drawingml/2006/main" lIns="0" tIns="0" rIns="0" bIns="0" anchor="t">
+            <a:normAutofit fontScale="100000"/>
+          </a:bodyPr>
+          <a:lstStyle xmlns:a="http://schemas.openxmlformats.org/drawingml/2006/main"/>
+          <a:p xmlns:a="http://schemas.openxmlformats.org/drawingml/2006/main">
+            <a:pPr algn="ctr">
+              <a:defRPr sz="1275" b="0">
+                <a:solidFill>
+                  <a:srgbClr val="607895"/>
+                </a:solidFill>
+                <a:latin typeface="Microsoft YaHei"/>
+                <a:ea typeface="Microsoft YaHei"/>
+                <a:cs typeface="Microsoft YaHei"/>
+              </a:defRPr>
+            </a:pPr>
+            <a:r>
+              <a:rPr sz="1275" b="0">
+                <a:solidFill>
+                  <a:srgbClr val="607895"/>
+                </a:solidFill>
+                <a:latin typeface="Microsoft YaHei"/>
+                <a:ea typeface="Microsoft YaHei"/>
+                <a:cs typeface="Microsoft YaHei"/>
+              </a:rPr>
+              <a:t>沉淀可复用的建模方法</a:t>
+            </a:r>
+          </a:p>
+        </p:txBody>
+      </p:sp>
+      <p:sp>
+        <p:nvSpPr>
+          <p:cNvPr id="13" name="PPAGENT_QA|parent=parallel-card-2|domains=parallel-card,parallel-content">
+            <a:extLst xmlns:a="http://schemas.openxmlformats.org/drawingml/2006/main">
+              <a:ext uri="{FF2B5EF4-FFF2-40B4-BE49-F238E27FC236}">
+                <a16:creationId xmlns:a16="http://schemas.microsoft.com/office/drawing/2014/main" id="{57C40A29-5FAE-4311-B7B2-D93A28845CFD}"/>
+              </a:ext>
+            </a:extLst>
+          </p:cNvPr>
+          <p:cNvSpPr>
+            <a:spLocks xmlns:a="http://schemas.openxmlformats.org/drawingml/2006/main" noGrp="1"/>
+          </p:cNvSpPr>
+          <p:nvPr/>
+        </p:nvSpPr>
+        <p:spPr>
+          <a:xfrm xmlns:a="http://schemas.openxmlformats.org/drawingml/2006/main">
+            <a:off x="3856264" y="1809750"/>
+            <a:ext cx="1366157" cy="3714750"/>
+          </a:xfrm>
+          <a:prstGeom xmlns:a="http://schemas.openxmlformats.org/drawingml/2006/main" prst="roundRect">
+            <a:avLst>
+              <a:gd name="adj" fmla="val 8367"/>
+            </a:avLst>
+          </a:prstGeom>
+          <a:solidFill xmlns:a="http://schemas.openxmlformats.org/drawingml/2006/main">
+            <a:srgbClr val="F7FBFF"/>
+          </a:solidFill>
+          <a:ln xmlns:a="http://schemas.openxmlformats.org/drawingml/2006/main" w="13335">
+            <a:solidFill>
+              <a:srgbClr val="A8CBEA"/>
+            </a:solidFill>
+            <a:prstDash val="solid"/>
+          </a:ln>
+        </p:spPr>
+        <p:style>
+          <a:lnRef xmlns:a="http://schemas.openxmlformats.org/drawingml/2006/main" idx="0"/>
+          <a:fillRef xmlns:a="http://schemas.openxmlformats.org/drawingml/2006/main" idx="0"/>
+          <a:effectRef xmlns:a="http://schemas.openxmlformats.org/drawingml/2006/main" idx="4"/>
+          <a:fontRef xmlns:a="http://schemas.openxmlformats.org/drawingml/2006/main" idx="major"/>
+        </p:style>
+      </p:sp>
+      <p:sp>
+        <p:nvSpPr>
+          <p:cNvPr id="14" name="PPAGENT_QA|within=parallel-card-2|role=accent-rail">
+            <a:extLst xmlns:a="http://schemas.openxmlformats.org/drawingml/2006/main">
+              <a:ext uri="{FF2B5EF4-FFF2-40B4-BE49-F238E27FC236}">
+                <a16:creationId xmlns:a16="http://schemas.microsoft.com/office/drawing/2014/main" id="{F050FC6C-AFCC-4F6F-9E4C-22CF67C823D5}"/>
+              </a:ext>
+            </a:extLst>
+          </p:cNvPr>
+          <p:cNvSpPr>
+            <a:spLocks xmlns:a="http://schemas.openxmlformats.org/drawingml/2006/main" noGrp="1"/>
+          </p:cNvSpPr>
+          <p:nvPr/>
+        </p:nvSpPr>
+        <p:spPr>
+          <a:xfrm xmlns:a="http://schemas.openxmlformats.org/drawingml/2006/main">
+            <a:off x="3856264" y="1809750"/>
+            <a:ext cx="1366157" cy="76200"/>
+          </a:xfrm>
+          <a:prstGeom xmlns:a="http://schemas.openxmlformats.org/drawingml/2006/main" prst="rect">
+            <a:avLst/>
+          </a:prstGeom>
+          <a:solidFill xmlns:a="http://schemas.openxmlformats.org/drawingml/2006/main">
+            <a:srgbClr val="2F5EA8"/>
+          </a:solidFill>
+          <a:ln xmlns:a="http://schemas.openxmlformats.org/drawingml/2006/main" w="0">
+            <a:noFill/>
+            <a:prstDash val="solid"/>
+          </a:ln>
+        </p:spPr>
+      </p:sp>
+      <p:sp>
+        <p:nvSpPr>
+          <p:cNvPr id="15" name="PPAGENT_QA|within=parallel-card-2|role=index">
+            <a:extLst xmlns:a="http://schemas.openxmlformats.org/drawingml/2006/main">
+              <a:ext uri="{FF2B5EF4-FFF2-40B4-BE49-F238E27FC236}">
+                <a16:creationId xmlns:a16="http://schemas.microsoft.com/office/drawing/2014/main" id="{717B47AC-DC99-438F-B85F-FA26A12BD398}"/>
+              </a:ext>
+            </a:extLst>
+          </p:cNvPr>
+          <p:cNvSpPr>
+            <a:spLocks xmlns:a="http://schemas.openxmlformats.org/drawingml/2006/main" noGrp="1"/>
+          </p:cNvSpPr>
+          <p:nvPr/>
+        </p:nvSpPr>
+        <p:spPr>
+          <a:xfrm xmlns:a="http://schemas.openxmlformats.org/drawingml/2006/main">
+            <a:off x="4046764" y="2114550"/>
+            <a:ext cx="514350" cy="514350"/>
+          </a:xfrm>
+          <a:prstGeom xmlns:a="http://schemas.openxmlformats.org/drawingml/2006/main" prst="ellipse">
+            <a:avLst/>
+          </a:prstGeom>
+          <a:solidFill xmlns:a="http://schemas.openxmlformats.org/drawingml/2006/main">
+            <a:srgbClr val="2F5EA8"/>
+          </a:solidFill>
+          <a:ln xmlns:a="http://schemas.openxmlformats.org/drawingml/2006/main" w="19050">
+            <a:solidFill>
+              <a:srgbClr val="FFFFFF"/>
+            </a:solidFill>
+            <a:prstDash val="solid"/>
+          </a:ln>
+        </p:spPr>
+        <p:txBody>
+          <a:bodyPr xmlns:a="http://schemas.openxmlformats.org/drawingml/2006/main" lIns="0" tIns="0" rIns="0" bIns="0" anchor="ctr">
+            <a:normAutofit fontScale="100000"/>
+          </a:bodyPr>
+          <a:lstStyle xmlns:a="http://schemas.openxmlformats.org/drawingml/2006/main"/>
+          <a:p xmlns:a="http://schemas.openxmlformats.org/drawingml/2006/main">
+            <a:pPr algn="ctr">
+              <a:defRPr sz="1275" b="1">
+                <a:solidFill>
+                  <a:srgbClr val="FFFFFF"/>
+                </a:solidFill>
+                <a:latin typeface="Microsoft YaHei"/>
+                <a:ea typeface="Microsoft YaHei"/>
+                <a:cs typeface="Microsoft YaHei"/>
+              </a:defRPr>
+            </a:pPr>
+            <a:r>
+              <a:rPr sz="1275" b="1">
+                <a:solidFill>
+                  <a:srgbClr val="FFFFFF"/>
+                </a:solidFill>
+                <a:latin typeface="Microsoft YaHei"/>
+                <a:ea typeface="Microsoft YaHei"/>
+                <a:cs typeface="Microsoft YaHei"/>
+              </a:rPr>
+              <a:t>03</a:t>
+            </a:r>
+          </a:p>
+        </p:txBody>
+      </p:sp>
+      <p:sp>
+        <p:nvSpPr>
+          <p:cNvPr id="16" name="PPAGENT_QA|within=parallel-card-2|role=title">
+            <a:extLst xmlns:a="http://schemas.openxmlformats.org/drawingml/2006/main">
+              <a:ext uri="{FF2B5EF4-FFF2-40B4-BE49-F238E27FC236}">
+                <a16:creationId xmlns:a16="http://schemas.microsoft.com/office/drawing/2014/main" id="{8A976555-195C-4776-9F71-2833091FC87A}"/>
+              </a:ext>
+            </a:extLst>
+          </p:cNvPr>
+          <p:cNvSpPr>
+            <a:spLocks xmlns:a="http://schemas.openxmlformats.org/drawingml/2006/main" noGrp="1"/>
+          </p:cNvSpPr>
+          <p:nvPr/>
+        </p:nvSpPr>
+        <p:spPr>
+          <a:xfrm xmlns:a="http://schemas.openxmlformats.org/drawingml/2006/main">
+            <a:off x="4046764" y="2952750"/>
+            <a:ext cx="985157" cy="523875"/>
+          </a:xfrm>
+          <a:prstGeom xmlns:a="http://schemas.openxmlformats.org/drawingml/2006/main" prst="rect">
+            <a:avLst/>
+          </a:prstGeom>
+          <a:noFill xmlns:a="http://schemas.openxmlformats.org/drawingml/2006/main"/>
+          <a:ln xmlns:a="http://schemas.openxmlformats.org/drawingml/2006/main" w="0">
+            <a:noFill/>
+            <a:prstDash val="solid"/>
+          </a:ln>
+        </p:spPr>
+        <p:txBody>
+          <a:bodyPr xmlns:a="http://schemas.openxmlformats.org/drawingml/2006/main" lIns="0" tIns="0" rIns="0" bIns="0" anchor="ctr">
+            <a:normAutofit fontScale="100000"/>
+          </a:bodyPr>
+          <a:lstStyle xmlns:a="http://schemas.openxmlformats.org/drawingml/2006/main"/>
+          <a:p xmlns:a="http://schemas.openxmlformats.org/drawingml/2006/main">
+            <a:pPr algn="ctr">
+              <a:defRPr sz="1650" b="1">
+                <a:solidFill>
+                  <a:srgbClr val="174D87"/>
+                </a:solidFill>
+                <a:latin typeface="Microsoft YaHei"/>
+                <a:ea typeface="Microsoft YaHei"/>
+                <a:cs typeface="Microsoft YaHei"/>
+              </a:defRPr>
+            </a:pPr>
+            <a:r>
+              <a:rPr sz="1650" b="1">
+                <a:solidFill>
+                  <a:srgbClr val="174D87"/>
+                </a:solidFill>
+                <a:latin typeface="Microsoft YaHei"/>
+                <a:ea typeface="Microsoft YaHei"/>
+                <a:cs typeface="Microsoft YaHei"/>
+              </a:rPr>
+              <a:t>验证体系</a:t>
+            </a:r>
+          </a:p>
+        </p:txBody>
+      </p:sp>
+      <p:sp>
+        <p:nvSpPr>
+          <p:cNvPr id="17" name="PPAGENT_QA|within=parallel-card-2|role=body">
+            <a:extLst xmlns:a="http://schemas.openxmlformats.org/drawingml/2006/main">
+              <a:ext uri="{FF2B5EF4-FFF2-40B4-BE49-F238E27FC236}">
+                <a16:creationId xmlns:a16="http://schemas.microsoft.com/office/drawing/2014/main" id="{46F4FD38-27EC-4A36-AFD1-81160C76F37D}"/>
+              </a:ext>
+            </a:extLst>
+          </p:cNvPr>
+          <p:cNvSpPr>
+            <a:spLocks xmlns:a="http://schemas.openxmlformats.org/drawingml/2006/main" noGrp="1"/>
+          </p:cNvSpPr>
+          <p:nvPr/>
+        </p:nvSpPr>
+        <p:spPr>
+          <a:xfrm xmlns:a="http://schemas.openxmlformats.org/drawingml/2006/main">
+            <a:off x="4065814" y="3638550"/>
+            <a:ext cx="947057" cy="952500"/>
+          </a:xfrm>
+          <a:prstGeom xmlns:a="http://schemas.openxmlformats.org/drawingml/2006/main" prst="rect">
+            <a:avLst/>
+          </a:prstGeom>
+          <a:noFill xmlns:a="http://schemas.openxmlformats.org/drawingml/2006/main"/>
+          <a:ln xmlns:a="http://schemas.openxmlformats.org/drawingml/2006/main" w="0">
+            <a:noFill/>
+            <a:prstDash val="solid"/>
+          </a:ln>
+        </p:spPr>
+        <p:txBody>
+          <a:bodyPr xmlns:a="http://schemas.openxmlformats.org/drawingml/2006/main" lIns="0" tIns="0" rIns="0" bIns="0" anchor="t">
+            <a:normAutofit fontScale="100000"/>
+          </a:bodyPr>
+          <a:lstStyle xmlns:a="http://schemas.openxmlformats.org/drawingml/2006/main"/>
+          <a:p xmlns:a="http://schemas.openxmlformats.org/drawingml/2006/main">
+            <a:pPr algn="ctr">
+              <a:defRPr sz="1275" b="0">
+                <a:solidFill>
+                  <a:srgbClr val="607895"/>
+                </a:solidFill>
+                <a:latin typeface="Microsoft YaHei"/>
+                <a:ea typeface="Microsoft YaHei"/>
+                <a:cs typeface="Microsoft YaHei"/>
+              </a:defRPr>
+            </a:pPr>
+            <a:r>
+              <a:rPr sz="1275" b="0">
+                <a:solidFill>
+                  <a:srgbClr val="607895"/>
+                </a:solidFill>
+                <a:latin typeface="Microsoft YaHei"/>
+                <a:ea typeface="Microsoft YaHei"/>
+                <a:cs typeface="Microsoft YaHei"/>
+              </a:rPr>
+              <a:t>形成稳定实验与评估流程</a:t>
+            </a:r>
+          </a:p>
+        </p:txBody>
+      </p:sp>
+      <p:sp>
+        <p:nvSpPr>
+          <p:cNvPr id="18" name="PPAGENT_QA|parent=parallel-card-3|domains=parallel-card,parallel-content">
+            <a:extLst xmlns:a="http://schemas.openxmlformats.org/drawingml/2006/main">
+              <a:ext uri="{FF2B5EF4-FFF2-40B4-BE49-F238E27FC236}">
+                <a16:creationId xmlns:a16="http://schemas.microsoft.com/office/drawing/2014/main" id="{F228DEA7-3ED1-47B3-AD4A-D81C2036002F}"/>
+              </a:ext>
+            </a:extLst>
+          </p:cNvPr>
+          <p:cNvSpPr>
+            <a:spLocks xmlns:a="http://schemas.openxmlformats.org/drawingml/2006/main" noGrp="1"/>
+          </p:cNvSpPr>
+          <p:nvPr/>
+        </p:nvSpPr>
+        <p:spPr>
+          <a:xfrm xmlns:a="http://schemas.openxmlformats.org/drawingml/2006/main">
+            <a:off x="5412921" y="1809750"/>
+            <a:ext cx="1366157" cy="3714750"/>
+          </a:xfrm>
+          <a:prstGeom xmlns:a="http://schemas.openxmlformats.org/drawingml/2006/main" prst="roundRect">
+            <a:avLst>
+              <a:gd name="adj" fmla="val 8367"/>
+            </a:avLst>
+          </a:prstGeom>
+          <a:solidFill xmlns:a="http://schemas.openxmlformats.org/drawingml/2006/main">
+            <a:srgbClr val="F1F8FF"/>
+          </a:solidFill>
+          <a:ln xmlns:a="http://schemas.openxmlformats.org/drawingml/2006/main" w="13335">
+            <a:solidFill>
+              <a:srgbClr val="7EB7ED"/>
+            </a:solidFill>
+            <a:prstDash val="solid"/>
+          </a:ln>
+        </p:spPr>
+        <p:style>
+          <a:lnRef xmlns:a="http://schemas.openxmlformats.org/drawingml/2006/main" idx="0"/>
+          <a:fillRef xmlns:a="http://schemas.openxmlformats.org/drawingml/2006/main" idx="0"/>
+          <a:effectRef xmlns:a="http://schemas.openxmlformats.org/drawingml/2006/main" idx="4"/>
+          <a:fontRef xmlns:a="http://schemas.openxmlformats.org/drawingml/2006/main" idx="major"/>
+        </p:style>
+      </p:sp>
+      <p:sp>
+        <p:nvSpPr>
+          <p:cNvPr id="19" name="PPAGENT_QA|within=parallel-card-3|role=accent-rail">
+            <a:extLst xmlns:a="http://schemas.openxmlformats.org/drawingml/2006/main">
+              <a:ext uri="{FF2B5EF4-FFF2-40B4-BE49-F238E27FC236}">
+                <a16:creationId xmlns:a16="http://schemas.microsoft.com/office/drawing/2014/main" id="{E2C92FB2-70BE-455B-8823-09A86751CE4F}"/>
+              </a:ext>
+            </a:extLst>
+          </p:cNvPr>
+          <p:cNvSpPr>
+            <a:spLocks xmlns:a="http://schemas.openxmlformats.org/drawingml/2006/main" noGrp="1"/>
+          </p:cNvSpPr>
+          <p:nvPr/>
+        </p:nvSpPr>
+        <p:spPr>
+          <a:xfrm xmlns:a="http://schemas.openxmlformats.org/drawingml/2006/main">
+            <a:off x="5412921" y="1809750"/>
+            <a:ext cx="1366157" cy="76200"/>
+          </a:xfrm>
+          <a:prstGeom xmlns:a="http://schemas.openxmlformats.org/drawingml/2006/main" prst="rect">
+            <a:avLst/>
+          </a:prstGeom>
+          <a:solidFill xmlns:a="http://schemas.openxmlformats.org/drawingml/2006/main">
+            <a:srgbClr val="4C88E8"/>
+          </a:solidFill>
+          <a:ln xmlns:a="http://schemas.openxmlformats.org/drawingml/2006/main" w="0">
+            <a:noFill/>
+            <a:prstDash val="solid"/>
+          </a:ln>
+        </p:spPr>
+      </p:sp>
+      <p:sp>
+        <p:nvSpPr>
+          <p:cNvPr id="20" name="PPAGENT_QA|within=parallel-card-3|role=index">
+            <a:extLst xmlns:a="http://schemas.openxmlformats.org/drawingml/2006/main">
+              <a:ext uri="{FF2B5EF4-FFF2-40B4-BE49-F238E27FC236}">
+                <a16:creationId xmlns:a16="http://schemas.microsoft.com/office/drawing/2014/main" id="{68D676CD-0B74-47EC-BF47-F3BB431FC90F}"/>
+              </a:ext>
+            </a:extLst>
+          </p:cNvPr>
+          <p:cNvSpPr>
+            <a:spLocks xmlns:a="http://schemas.openxmlformats.org/drawingml/2006/main" noGrp="1"/>
+          </p:cNvSpPr>
+          <p:nvPr/>
+        </p:nvSpPr>
+        <p:spPr>
+          <a:xfrm xmlns:a="http://schemas.openxmlformats.org/drawingml/2006/main">
+            <a:off x="5603421" y="2114550"/>
+            <a:ext cx="514350" cy="514350"/>
+          </a:xfrm>
+          <a:prstGeom xmlns:a="http://schemas.openxmlformats.org/drawingml/2006/main" prst="ellipse">
+            <a:avLst/>
+          </a:prstGeom>
+          <a:solidFill xmlns:a="http://schemas.openxmlformats.org/drawingml/2006/main">
+            <a:srgbClr val="4C88E8"/>
+          </a:solidFill>
+          <a:ln xmlns:a="http://schemas.openxmlformats.org/drawingml/2006/main" w="19050">
+            <a:solidFill>
+              <a:srgbClr val="FFFFFF"/>
+            </a:solidFill>
+            <a:prstDash val="solid"/>
+          </a:ln>
+        </p:spPr>
+        <p:txBody>
+          <a:bodyPr xmlns:a="http://schemas.openxmlformats.org/drawingml/2006/main" lIns="0" tIns="0" rIns="0" bIns="0" anchor="ctr">
+            <a:normAutofit fontScale="100000"/>
+          </a:bodyPr>
+          <a:lstStyle xmlns:a="http://schemas.openxmlformats.org/drawingml/2006/main"/>
+          <a:p xmlns:a="http://schemas.openxmlformats.org/drawingml/2006/main">
+            <a:pPr algn="ctr">
+              <a:defRPr sz="1275" b="1">
+                <a:solidFill>
+                  <a:srgbClr val="FFFFFF"/>
+                </a:solidFill>
+                <a:latin typeface="Microsoft YaHei"/>
+                <a:ea typeface="Microsoft YaHei"/>
+                <a:cs typeface="Microsoft YaHei"/>
+              </a:defRPr>
+            </a:pPr>
+            <a:r>
+              <a:rPr sz="1275" b="1">
+                <a:solidFill>
+                  <a:srgbClr val="FFFFFF"/>
+                </a:solidFill>
+                <a:latin typeface="Microsoft YaHei"/>
+                <a:ea typeface="Microsoft YaHei"/>
+                <a:cs typeface="Microsoft YaHei"/>
+              </a:rPr>
+              <a:t>04</a:t>
+            </a:r>
+          </a:p>
+        </p:txBody>
+      </p:sp>
+      <p:sp>
+        <p:nvSpPr>
+          <p:cNvPr id="21" name="PPAGENT_QA|within=parallel-card-3|role=title">
+            <a:extLst xmlns:a="http://schemas.openxmlformats.org/drawingml/2006/main">
+              <a:ext uri="{FF2B5EF4-FFF2-40B4-BE49-F238E27FC236}">
+                <a16:creationId xmlns:a16="http://schemas.microsoft.com/office/drawing/2014/main" id="{52FCAF99-4617-4FD2-8434-9904C01C8913}"/>
+              </a:ext>
+            </a:extLst>
+          </p:cNvPr>
+          <p:cNvSpPr>
+            <a:spLocks xmlns:a="http://schemas.openxmlformats.org/drawingml/2006/main" noGrp="1"/>
+          </p:cNvSpPr>
+          <p:nvPr/>
+        </p:nvSpPr>
+        <p:spPr>
+          <a:xfrm xmlns:a="http://schemas.openxmlformats.org/drawingml/2006/main">
+            <a:off x="5603421" y="2952750"/>
+            <a:ext cx="985157" cy="523875"/>
+          </a:xfrm>
+          <a:prstGeom xmlns:a="http://schemas.openxmlformats.org/drawingml/2006/main" prst="rect">
+            <a:avLst/>
+          </a:prstGeom>
+          <a:noFill xmlns:a="http://schemas.openxmlformats.org/drawingml/2006/main"/>
+          <a:ln xmlns:a="http://schemas.openxmlformats.org/drawingml/2006/main" w="0">
+            <a:noFill/>
+            <a:prstDash val="solid"/>
+          </a:ln>
+        </p:spPr>
+        <p:txBody>
+          <a:bodyPr xmlns:a="http://schemas.openxmlformats.org/drawingml/2006/main" lIns="0" tIns="0" rIns="0" bIns="0" anchor="ctr">
+            <a:normAutofit fontScale="100000"/>
+          </a:bodyPr>
+          <a:lstStyle xmlns:a="http://schemas.openxmlformats.org/drawingml/2006/main"/>
+          <a:p xmlns:a="http://schemas.openxmlformats.org/drawingml/2006/main">
+            <a:pPr algn="ctr">
+              <a:defRPr sz="1650" b="1">
+                <a:solidFill>
+                  <a:srgbClr val="174D87"/>
+                </a:solidFill>
+                <a:latin typeface="Microsoft YaHei"/>
+                <a:ea typeface="Microsoft YaHei"/>
+                <a:cs typeface="Microsoft YaHei"/>
+              </a:defRPr>
+            </a:pPr>
+            <a:r>
+              <a:rPr sz="1650" b="1">
+                <a:solidFill>
+                  <a:srgbClr val="174D87"/>
+                </a:solidFill>
+                <a:latin typeface="Microsoft YaHei"/>
+                <a:ea typeface="Microsoft YaHei"/>
+                <a:cs typeface="Microsoft YaHei"/>
+              </a:rPr>
+              <a:t>工程交付</a:t>
+            </a:r>
+          </a:p>
+        </p:txBody>
+      </p:sp>
+      <p:sp>
+        <p:nvSpPr>
+          <p:cNvPr id="22" name="PPAGENT_QA|within=parallel-card-3|role=body">
+            <a:extLst xmlns:a="http://schemas.openxmlformats.org/drawingml/2006/main">
+              <a:ext uri="{FF2B5EF4-FFF2-40B4-BE49-F238E27FC236}">
+                <a16:creationId xmlns:a16="http://schemas.microsoft.com/office/drawing/2014/main" id="{5C91C941-DD6B-4021-B948-AA7C04AB9006}"/>
+              </a:ext>
+            </a:extLst>
+          </p:cNvPr>
+          <p:cNvSpPr>
+            <a:spLocks xmlns:a="http://schemas.openxmlformats.org/drawingml/2006/main" noGrp="1"/>
+          </p:cNvSpPr>
+          <p:nvPr/>
+        </p:nvSpPr>
+        <p:spPr>
+          <a:xfrm xmlns:a="http://schemas.openxmlformats.org/drawingml/2006/main">
+            <a:off x="5622471" y="3638550"/>
+            <a:ext cx="947057" cy="952500"/>
+          </a:xfrm>
+          <a:prstGeom xmlns:a="http://schemas.openxmlformats.org/drawingml/2006/main" prst="rect">
+            <a:avLst/>
+          </a:prstGeom>
+          <a:noFill xmlns:a="http://schemas.openxmlformats.org/drawingml/2006/main"/>
+          <a:ln xmlns:a="http://schemas.openxmlformats.org/drawingml/2006/main" w="0">
+            <a:noFill/>
+            <a:prstDash val="solid"/>
+          </a:ln>
+        </p:spPr>
+        <p:txBody>
+          <a:bodyPr xmlns:a="http://schemas.openxmlformats.org/drawingml/2006/main" lIns="0" tIns="0" rIns="0" bIns="0" anchor="t">
+            <a:normAutofit fontScale="100000"/>
+          </a:bodyPr>
+          <a:lstStyle xmlns:a="http://schemas.openxmlformats.org/drawingml/2006/main"/>
+          <a:p xmlns:a="http://schemas.openxmlformats.org/drawingml/2006/main">
+            <a:pPr algn="ctr">
+              <a:defRPr sz="1275" b="0">
+                <a:solidFill>
+                  <a:srgbClr val="607895"/>
+                </a:solidFill>
+                <a:latin typeface="Microsoft YaHei"/>
+                <a:ea typeface="Microsoft YaHei"/>
+                <a:cs typeface="Microsoft YaHei"/>
+              </a:defRPr>
+            </a:pPr>
+            <a:r>
+              <a:rPr sz="1275" b="0">
+                <a:solidFill>
+                  <a:srgbClr val="607895"/>
+                </a:solidFill>
+                <a:latin typeface="Microsoft YaHei"/>
+                <a:ea typeface="Microsoft YaHei"/>
+                <a:cs typeface="Microsoft YaHei"/>
+              </a:rPr>
+              <a:t>把研究能力转化为可用系统</a:t>
+            </a:r>
+          </a:p>
+        </p:txBody>
+      </p:sp>
+      <p:sp>
+        <p:nvSpPr>
+          <p:cNvPr id="23" name="PPAGENT_QA|parent=parallel-card-4|domains=parallel-card,parallel-content">
+            <a:extLst xmlns:a="http://schemas.openxmlformats.org/drawingml/2006/main">
+              <a:ext uri="{FF2B5EF4-FFF2-40B4-BE49-F238E27FC236}">
+                <a16:creationId xmlns:a16="http://schemas.microsoft.com/office/drawing/2014/main" id="{21467131-5B68-46AB-A899-B73424C89B26}"/>
+              </a:ext>
+            </a:extLst>
+          </p:cNvPr>
+          <p:cNvSpPr>
+            <a:spLocks xmlns:a="http://schemas.openxmlformats.org/drawingml/2006/main" noGrp="1"/>
+          </p:cNvSpPr>
+          <p:nvPr/>
+        </p:nvSpPr>
+        <p:spPr>
+          <a:xfrm xmlns:a="http://schemas.openxmlformats.org/drawingml/2006/main">
+            <a:off x="6969579" y="1809750"/>
+            <a:ext cx="1366157" cy="3714750"/>
+          </a:xfrm>
+          <a:prstGeom xmlns:a="http://schemas.openxmlformats.org/drawingml/2006/main" prst="roundRect">
+            <a:avLst>
+              <a:gd name="adj" fmla="val 8367"/>
+            </a:avLst>
+          </a:prstGeom>
+          <a:solidFill xmlns:a="http://schemas.openxmlformats.org/drawingml/2006/main">
+            <a:srgbClr val="F7FBFF"/>
+          </a:solidFill>
+          <a:ln xmlns:a="http://schemas.openxmlformats.org/drawingml/2006/main" w="13335">
+            <a:solidFill>
+              <a:srgbClr val="A8CBEA"/>
+            </a:solidFill>
+            <a:prstDash val="solid"/>
+          </a:ln>
+        </p:spPr>
+        <p:style>
+          <a:lnRef xmlns:a="http://schemas.openxmlformats.org/drawingml/2006/main" idx="0"/>
+          <a:fillRef xmlns:a="http://schemas.openxmlformats.org/drawingml/2006/main" idx="0"/>
+          <a:effectRef xmlns:a="http://schemas.openxmlformats.org/drawingml/2006/main" idx="4"/>
+          <a:fontRef xmlns:a="http://schemas.openxmlformats.org/drawingml/2006/main" idx="major"/>
+        </p:style>
+      </p:sp>
+      <p:sp>
+        <p:nvSpPr>
+          <p:cNvPr id="24" name="PPAGENT_QA|within=parallel-card-4|role=accent-rail">
+            <a:extLst xmlns:a="http://schemas.openxmlformats.org/drawingml/2006/main">
+              <a:ext uri="{FF2B5EF4-FFF2-40B4-BE49-F238E27FC236}">
+                <a16:creationId xmlns:a16="http://schemas.microsoft.com/office/drawing/2014/main" id="{A1ECC166-85DE-4DA7-93D4-5A39271C6A0F}"/>
+              </a:ext>
+            </a:extLst>
+          </p:cNvPr>
+          <p:cNvSpPr>
+            <a:spLocks xmlns:a="http://schemas.openxmlformats.org/drawingml/2006/main" noGrp="1"/>
+          </p:cNvSpPr>
+          <p:nvPr/>
+        </p:nvSpPr>
+        <p:spPr>
+          <a:xfrm xmlns:a="http://schemas.openxmlformats.org/drawingml/2006/main">
+            <a:off x="6969579" y="1809750"/>
+            <a:ext cx="1366157" cy="76200"/>
+          </a:xfrm>
+          <a:prstGeom xmlns:a="http://schemas.openxmlformats.org/drawingml/2006/main" prst="rect">
+            <a:avLst/>
+          </a:prstGeom>
+          <a:solidFill xmlns:a="http://schemas.openxmlformats.org/drawingml/2006/main">
+            <a:srgbClr val="2F5EA8"/>
+          </a:solidFill>
+          <a:ln xmlns:a="http://schemas.openxmlformats.org/drawingml/2006/main" w="0">
+            <a:noFill/>
+            <a:prstDash val="solid"/>
+          </a:ln>
+        </p:spPr>
+      </p:sp>
+      <p:sp>
+        <p:nvSpPr>
+          <p:cNvPr id="25" name="PPAGENT_QA|within=parallel-card-4|role=index">
+            <a:extLst xmlns:a="http://schemas.openxmlformats.org/drawingml/2006/main">
+              <a:ext uri="{FF2B5EF4-FFF2-40B4-BE49-F238E27FC236}">
+                <a16:creationId xmlns:a16="http://schemas.microsoft.com/office/drawing/2014/main" id="{4AB24085-0624-40A9-B511-AE6BA5256C88}"/>
+              </a:ext>
+            </a:extLst>
+          </p:cNvPr>
+          <p:cNvSpPr>
+            <a:spLocks xmlns:a="http://schemas.openxmlformats.org/drawingml/2006/main" noGrp="1"/>
+          </p:cNvSpPr>
+          <p:nvPr/>
+        </p:nvSpPr>
+        <p:spPr>
+          <a:xfrm xmlns:a="http://schemas.openxmlformats.org/drawingml/2006/main">
+            <a:off x="7160079" y="2114550"/>
+            <a:ext cx="514350" cy="514350"/>
+          </a:xfrm>
+          <a:prstGeom xmlns:a="http://schemas.openxmlformats.org/drawingml/2006/main" prst="ellipse">
+            <a:avLst/>
+          </a:prstGeom>
+          <a:solidFill xmlns:a="http://schemas.openxmlformats.org/drawingml/2006/main">
+            <a:srgbClr val="2F5EA8"/>
+          </a:solidFill>
+          <a:ln xmlns:a="http://schemas.openxmlformats.org/drawingml/2006/main" w="19050">
+            <a:solidFill>
+              <a:srgbClr val="FFFFFF"/>
+            </a:solidFill>
+            <a:prstDash val="solid"/>
+          </a:ln>
+        </p:spPr>
+        <p:txBody>
+          <a:bodyPr xmlns:a="http://schemas.openxmlformats.org/drawingml/2006/main" lIns="0" tIns="0" rIns="0" bIns="0" anchor="ctr">
+            <a:normAutofit fontScale="100000"/>
+          </a:bodyPr>
+          <a:lstStyle xmlns:a="http://schemas.openxmlformats.org/drawingml/2006/main"/>
+          <a:p xmlns:a="http://schemas.openxmlformats.org/drawingml/2006/main">
+            <a:pPr algn="ctr">
+              <a:defRPr sz="1275" b="1">
+                <a:solidFill>
+                  <a:srgbClr val="FFFFFF"/>
+                </a:solidFill>
+                <a:latin typeface="Microsoft YaHei"/>
+                <a:ea typeface="Microsoft YaHei"/>
+                <a:cs typeface="Microsoft YaHei"/>
+              </a:defRPr>
+            </a:pPr>
+            <a:r>
+              <a:rPr sz="1275" b="1">
+                <a:solidFill>
+                  <a:srgbClr val="FFFFFF"/>
+                </a:solidFill>
+                <a:latin typeface="Microsoft YaHei"/>
+                <a:ea typeface="Microsoft YaHei"/>
+                <a:cs typeface="Microsoft YaHei"/>
+              </a:rPr>
+              <a:t>05</a:t>
+            </a:r>
+          </a:p>
+        </p:txBody>
+      </p:sp>
+      <p:sp>
+        <p:nvSpPr>
+          <p:cNvPr id="26" name="PPAGENT_QA|within=parallel-card-4|role=title">
+            <a:extLst xmlns:a="http://schemas.openxmlformats.org/drawingml/2006/main">
+              <a:ext uri="{FF2B5EF4-FFF2-40B4-BE49-F238E27FC236}">
+                <a16:creationId xmlns:a16="http://schemas.microsoft.com/office/drawing/2014/main" id="{CE5DE50D-CE52-47FF-8A21-79190BEDAFBE}"/>
+              </a:ext>
+            </a:extLst>
+          </p:cNvPr>
+          <p:cNvSpPr>
+            <a:spLocks xmlns:a="http://schemas.openxmlformats.org/drawingml/2006/main" noGrp="1"/>
+          </p:cNvSpPr>
+          <p:nvPr/>
+        </p:nvSpPr>
+        <p:spPr>
+          <a:xfrm xmlns:a="http://schemas.openxmlformats.org/drawingml/2006/main">
+            <a:off x="7160079" y="2952750"/>
+            <a:ext cx="985157" cy="523875"/>
+          </a:xfrm>
+          <a:prstGeom xmlns:a="http://schemas.openxmlformats.org/drawingml/2006/main" prst="rect">
+            <a:avLst/>
+          </a:prstGeom>
+          <a:noFill xmlns:a="http://schemas.openxmlformats.org/drawingml/2006/main"/>
+          <a:ln xmlns:a="http://schemas.openxmlformats.org/drawingml/2006/main" w="0">
+            <a:noFill/>
+            <a:prstDash val="solid"/>
+          </a:ln>
+        </p:spPr>
+        <p:txBody>
+          <a:bodyPr xmlns:a="http://schemas.openxmlformats.org/drawingml/2006/main" lIns="0" tIns="0" rIns="0" bIns="0" anchor="ctr">
+            <a:normAutofit fontScale="100000"/>
+          </a:bodyPr>
+          <a:lstStyle xmlns:a="http://schemas.openxmlformats.org/drawingml/2006/main"/>
+          <a:p xmlns:a="http://schemas.openxmlformats.org/drawingml/2006/main">
+            <a:pPr algn="ctr">
+              <a:defRPr sz="1650" b="1">
+                <a:solidFill>
+                  <a:srgbClr val="174D87"/>
+                </a:solidFill>
+                <a:latin typeface="Microsoft YaHei"/>
+                <a:ea typeface="Microsoft YaHei"/>
+                <a:cs typeface="Microsoft YaHei"/>
+              </a:defRPr>
+            </a:pPr>
+            <a:r>
+              <a:rPr sz="1650" b="1">
+                <a:solidFill>
+                  <a:srgbClr val="174D87"/>
+                </a:solidFill>
+                <a:latin typeface="Microsoft YaHei"/>
+                <a:ea typeface="Microsoft YaHei"/>
+                <a:cs typeface="Microsoft YaHei"/>
+              </a:rPr>
+              <a:t>协同机制</a:t>
+            </a:r>
+          </a:p>
+        </p:txBody>
+      </p:sp>
+      <p:sp>
+        <p:nvSpPr>
+          <p:cNvPr id="27" name="PPAGENT_QA|within=parallel-card-4|role=body">
+            <a:extLst xmlns:a="http://schemas.openxmlformats.org/drawingml/2006/main">
+              <a:ext uri="{FF2B5EF4-FFF2-40B4-BE49-F238E27FC236}">
+                <a16:creationId xmlns:a16="http://schemas.microsoft.com/office/drawing/2014/main" id="{F6FF0F77-3242-427A-8F8F-A3A06C9548B9}"/>
+              </a:ext>
+            </a:extLst>
+          </p:cNvPr>
+          <p:cNvSpPr>
+            <a:spLocks xmlns:a="http://schemas.openxmlformats.org/drawingml/2006/main" noGrp="1"/>
+          </p:cNvSpPr>
+          <p:nvPr/>
+        </p:nvSpPr>
+        <p:spPr>
+          <a:xfrm xmlns:a="http://schemas.openxmlformats.org/drawingml/2006/main">
+            <a:off x="7179129" y="3638550"/>
+            <a:ext cx="947057" cy="952500"/>
+          </a:xfrm>
+          <a:prstGeom xmlns:a="http://schemas.openxmlformats.org/drawingml/2006/main" prst="rect">
+            <a:avLst/>
+          </a:prstGeom>
+          <a:noFill xmlns:a="http://schemas.openxmlformats.org/drawingml/2006/main"/>
+          <a:ln xmlns:a="http://schemas.openxmlformats.org/drawingml/2006/main" w="0">
+            <a:noFill/>
+            <a:prstDash val="solid"/>
+          </a:ln>
+        </p:spPr>
+        <p:txBody>
+          <a:bodyPr xmlns:a="http://schemas.openxmlformats.org/drawingml/2006/main" lIns="0" tIns="0" rIns="0" bIns="0" anchor="t">
+            <a:normAutofit fontScale="100000"/>
+          </a:bodyPr>
+          <a:lstStyle xmlns:a="http://schemas.openxmlformats.org/drawingml/2006/main"/>
+          <a:p xmlns:a="http://schemas.openxmlformats.org/drawingml/2006/main">
+            <a:pPr algn="ctr">
+              <a:defRPr sz="1275" b="0">
+                <a:solidFill>
+                  <a:srgbClr val="607895"/>
+                </a:solidFill>
+                <a:latin typeface="Microsoft YaHei"/>
+                <a:ea typeface="Microsoft YaHei"/>
+                <a:cs typeface="Microsoft YaHei"/>
+              </a:defRPr>
+            </a:pPr>
+            <a:r>
+              <a:rPr sz="1275" b="0">
+                <a:solidFill>
+                  <a:srgbClr val="607895"/>
+                </a:solidFill>
+                <a:latin typeface="Microsoft YaHei"/>
+                <a:ea typeface="Microsoft YaHei"/>
+                <a:cs typeface="Microsoft YaHei"/>
+              </a:rPr>
+              <a:t>让角色分工和信息接口清晰可见</a:t>
+            </a:r>
+          </a:p>
+        </p:txBody>
+      </p:sp>
+      <p:sp>
+        <p:nvSpPr>
+          <p:cNvPr id="28" name="PPAGENT_QA|parent=parallel-card-5|domains=parallel-card,parallel-content">
+            <a:extLst xmlns:a="http://schemas.openxmlformats.org/drawingml/2006/main">
+              <a:ext uri="{FF2B5EF4-FFF2-40B4-BE49-F238E27FC236}">
+                <a16:creationId xmlns:a16="http://schemas.microsoft.com/office/drawing/2014/main" id="{D72894FC-A621-4ECC-9D88-FED530EC0179}"/>
+              </a:ext>
+            </a:extLst>
+          </p:cNvPr>
+          <p:cNvSpPr>
+            <a:spLocks xmlns:a="http://schemas.openxmlformats.org/drawingml/2006/main" noGrp="1"/>
+          </p:cNvSpPr>
+          <p:nvPr/>
+        </p:nvSpPr>
+        <p:spPr>
+          <a:xfrm xmlns:a="http://schemas.openxmlformats.org/drawingml/2006/main">
+            <a:off x="8526236" y="1809750"/>
+            <a:ext cx="1366157" cy="3714750"/>
+          </a:xfrm>
+          <a:prstGeom xmlns:a="http://schemas.openxmlformats.org/drawingml/2006/main" prst="roundRect">
+            <a:avLst>
+              <a:gd name="adj" fmla="val 8367"/>
+            </a:avLst>
+          </a:prstGeom>
+          <a:solidFill xmlns:a="http://schemas.openxmlformats.org/drawingml/2006/main">
+            <a:srgbClr val="F1F8FF"/>
+          </a:solidFill>
+          <a:ln xmlns:a="http://schemas.openxmlformats.org/drawingml/2006/main" w="13335">
+            <a:solidFill>
+              <a:srgbClr val="7EB7ED"/>
+            </a:solidFill>
+            <a:prstDash val="solid"/>
+          </a:ln>
+        </p:spPr>
+        <p:style>
+          <a:lnRef xmlns:a="http://schemas.openxmlformats.org/drawingml/2006/main" idx="0"/>
+          <a:fillRef xmlns:a="http://schemas.openxmlformats.org/drawingml/2006/main" idx="0"/>
+          <a:effectRef xmlns:a="http://schemas.openxmlformats.org/drawingml/2006/main" idx="4"/>
+          <a:fontRef xmlns:a="http://schemas.openxmlformats.org/drawingml/2006/main" idx="major"/>
+        </p:style>
+      </p:sp>
+      <p:sp>
+        <p:nvSpPr>
+          <p:cNvPr id="29" name="PPAGENT_QA|within=parallel-card-5|role=accent-rail">
+            <a:extLst xmlns:a="http://schemas.openxmlformats.org/drawingml/2006/main">
+              <a:ext uri="{FF2B5EF4-FFF2-40B4-BE49-F238E27FC236}">
+                <a16:creationId xmlns:a16="http://schemas.microsoft.com/office/drawing/2014/main" id="{93927EEC-725C-4C4E-BE5A-4AFCBB2A8C09}"/>
+              </a:ext>
+            </a:extLst>
+          </p:cNvPr>
+          <p:cNvSpPr>
+            <a:spLocks xmlns:a="http://schemas.openxmlformats.org/drawingml/2006/main" noGrp="1"/>
+          </p:cNvSpPr>
+          <p:nvPr/>
+        </p:nvSpPr>
+        <p:spPr>
+          <a:xfrm xmlns:a="http://schemas.openxmlformats.org/drawingml/2006/main">
+            <a:off x="8526236" y="1809750"/>
+            <a:ext cx="1366157" cy="76200"/>
+          </a:xfrm>
+          <a:prstGeom xmlns:a="http://schemas.openxmlformats.org/drawingml/2006/main" prst="rect">
+            <a:avLst/>
+          </a:prstGeom>
+          <a:solidFill xmlns:a="http://schemas.openxmlformats.org/drawingml/2006/main">
+            <a:srgbClr val="4C88E8"/>
+          </a:solidFill>
+          <a:ln xmlns:a="http://schemas.openxmlformats.org/drawingml/2006/main" w="0">
+            <a:noFill/>
+            <a:prstDash val="solid"/>
+          </a:ln>
+        </p:spPr>
+      </p:sp>
+      <p:sp>
+        <p:nvSpPr>
+          <p:cNvPr id="30" name="PPAGENT_QA|within=parallel-card-5|role=index">
+            <a:extLst xmlns:a="http://schemas.openxmlformats.org/drawingml/2006/main">
+              <a:ext uri="{FF2B5EF4-FFF2-40B4-BE49-F238E27FC236}">
+                <a16:creationId xmlns:a16="http://schemas.microsoft.com/office/drawing/2014/main" id="{37534F15-EB04-4096-BCE3-53E05DA846D8}"/>
+              </a:ext>
+            </a:extLst>
+          </p:cNvPr>
+          <p:cNvSpPr>
+            <a:spLocks xmlns:a="http://schemas.openxmlformats.org/drawingml/2006/main" noGrp="1"/>
+          </p:cNvSpPr>
+          <p:nvPr/>
+        </p:nvSpPr>
+        <p:spPr>
+          <a:xfrm xmlns:a="http://schemas.openxmlformats.org/drawingml/2006/main">
+            <a:off x="8716736" y="2114550"/>
+            <a:ext cx="514350" cy="514350"/>
+          </a:xfrm>
+          <a:prstGeom xmlns:a="http://schemas.openxmlformats.org/drawingml/2006/main" prst="ellipse">
+            <a:avLst/>
+          </a:prstGeom>
+          <a:solidFill xmlns:a="http://schemas.openxmlformats.org/drawingml/2006/main">
+            <a:srgbClr val="4C88E8"/>
+          </a:solidFill>
+          <a:ln xmlns:a="http://schemas.openxmlformats.org/drawingml/2006/main" w="19050">
+            <a:solidFill>
+              <a:srgbClr val="FFFFFF"/>
+            </a:solidFill>
+            <a:prstDash val="solid"/>
+          </a:ln>
+        </p:spPr>
+        <p:txBody>
+          <a:bodyPr xmlns:a="http://schemas.openxmlformats.org/drawingml/2006/main" lIns="0" tIns="0" rIns="0" bIns="0" anchor="ctr">
+            <a:normAutofit fontScale="100000"/>
+          </a:bodyPr>
+          <a:lstStyle xmlns:a="http://schemas.openxmlformats.org/drawingml/2006/main"/>
+          <a:p xmlns:a="http://schemas.openxmlformats.org/drawingml/2006/main">
+            <a:pPr algn="ctr">
+              <a:defRPr sz="1275" b="1">
+                <a:solidFill>
+                  <a:srgbClr val="FFFFFF"/>
+                </a:solidFill>
+                <a:latin typeface="Microsoft YaHei"/>
+                <a:ea typeface="Microsoft YaHei"/>
+                <a:cs typeface="Microsoft YaHei"/>
+              </a:defRPr>
+            </a:pPr>
+            <a:r>
+              <a:rPr sz="1275" b="1">
+                <a:solidFill>
+                  <a:srgbClr val="FFFFFF"/>
+                </a:solidFill>
+                <a:latin typeface="Microsoft YaHei"/>
+                <a:ea typeface="Microsoft YaHei"/>
+                <a:cs typeface="Microsoft YaHei"/>
+              </a:rPr>
+              <a:t>06</a:t>
+            </a:r>
+          </a:p>
+        </p:txBody>
+      </p:sp>
+      <p:sp>
+        <p:nvSpPr>
+          <p:cNvPr id="31" name="PPAGENT_QA|within=parallel-card-5|role=title">
+            <a:extLst xmlns:a="http://schemas.openxmlformats.org/drawingml/2006/main">
+              <a:ext uri="{FF2B5EF4-FFF2-40B4-BE49-F238E27FC236}">
+                <a16:creationId xmlns:a16="http://schemas.microsoft.com/office/drawing/2014/main" id="{622B534D-E04E-4528-A4B7-DA5C8B04D8E6}"/>
+              </a:ext>
+            </a:extLst>
+          </p:cNvPr>
+          <p:cNvSpPr>
+            <a:spLocks xmlns:a="http://schemas.openxmlformats.org/drawingml/2006/main" noGrp="1"/>
+          </p:cNvSpPr>
+          <p:nvPr/>
+        </p:nvSpPr>
+        <p:spPr>
+          <a:xfrm xmlns:a="http://schemas.openxmlformats.org/drawingml/2006/main">
+            <a:off x="8716736" y="2952750"/>
+            <a:ext cx="985157" cy="523875"/>
+          </a:xfrm>
+          <a:prstGeom xmlns:a="http://schemas.openxmlformats.org/drawingml/2006/main" prst="rect">
+            <a:avLst/>
+          </a:prstGeom>
+          <a:noFill xmlns:a="http://schemas.openxmlformats.org/drawingml/2006/main"/>
+          <a:ln xmlns:a="http://schemas.openxmlformats.org/drawingml/2006/main" w="0">
+            <a:noFill/>
+            <a:prstDash val="solid"/>
+          </a:ln>
+        </p:spPr>
+        <p:txBody>
+          <a:bodyPr xmlns:a="http://schemas.openxmlformats.org/drawingml/2006/main" lIns="0" tIns="0" rIns="0" bIns="0" anchor="ctr">
+            <a:normAutofit fontScale="100000"/>
+          </a:bodyPr>
+          <a:lstStyle xmlns:a="http://schemas.openxmlformats.org/drawingml/2006/main"/>
+          <a:p xmlns:a="http://schemas.openxmlformats.org/drawingml/2006/main">
+            <a:pPr algn="ctr">
+              <a:defRPr sz="1650" b="1">
+                <a:solidFill>
+                  <a:srgbClr val="174D87"/>
+                </a:solidFill>
+                <a:latin typeface="Microsoft YaHei"/>
+                <a:ea typeface="Microsoft YaHei"/>
+                <a:cs typeface="Microsoft YaHei"/>
+              </a:defRPr>
+            </a:pPr>
+            <a:r>
+              <a:rPr sz="1650" b="1">
+                <a:solidFill>
+                  <a:srgbClr val="174D87"/>
+                </a:solidFill>
+                <a:latin typeface="Microsoft YaHei"/>
+                <a:ea typeface="Microsoft YaHei"/>
+                <a:cs typeface="Microsoft YaHei"/>
+              </a:rPr>
+              <a:t>质量控制</a:t>
+            </a:r>
+          </a:p>
+        </p:txBody>
+      </p:sp>
+      <p:sp>
+        <p:nvSpPr>
+          <p:cNvPr id="32" name="PPAGENT_QA|within=parallel-card-5|role=body">
+            <a:extLst xmlns:a="http://schemas.openxmlformats.org/drawingml/2006/main">
+              <a:ext uri="{FF2B5EF4-FFF2-40B4-BE49-F238E27FC236}">
+                <a16:creationId xmlns:a16="http://schemas.microsoft.com/office/drawing/2014/main" id="{EEA819A4-062C-441D-99EC-EA6DC31AEEAB}"/>
+              </a:ext>
+            </a:extLst>
+          </p:cNvPr>
+          <p:cNvSpPr>
+            <a:spLocks xmlns:a="http://schemas.openxmlformats.org/drawingml/2006/main" noGrp="1"/>
+          </p:cNvSpPr>
+          <p:nvPr/>
+        </p:nvSpPr>
+        <p:spPr>
+          <a:xfrm xmlns:a="http://schemas.openxmlformats.org/drawingml/2006/main">
+            <a:off x="8735786" y="3638550"/>
+            <a:ext cx="947057" cy="952500"/>
+          </a:xfrm>
+          <a:prstGeom xmlns:a="http://schemas.openxmlformats.org/drawingml/2006/main" prst="rect">
+            <a:avLst/>
+          </a:prstGeom>
+          <a:noFill xmlns:a="http://schemas.openxmlformats.org/drawingml/2006/main"/>
+          <a:ln xmlns:a="http://schemas.openxmlformats.org/drawingml/2006/main" w="0">
+            <a:noFill/>
+            <a:prstDash val="solid"/>
+          </a:ln>
+        </p:spPr>
+        <p:txBody>
+          <a:bodyPr xmlns:a="http://schemas.openxmlformats.org/drawingml/2006/main" lIns="0" tIns="0" rIns="0" bIns="0" anchor="t">
+            <a:normAutofit fontScale="100000"/>
+          </a:bodyPr>
+          <a:lstStyle xmlns:a="http://schemas.openxmlformats.org/drawingml/2006/main"/>
+          <a:p xmlns:a="http://schemas.openxmlformats.org/drawingml/2006/main">
+            <a:pPr algn="ctr">
+              <a:defRPr sz="1275" b="0">
+                <a:solidFill>
+                  <a:srgbClr val="607895"/>
+                </a:solidFill>
+                <a:latin typeface="Microsoft YaHei"/>
+                <a:ea typeface="Microsoft YaHei"/>
+                <a:cs typeface="Microsoft YaHei"/>
+              </a:defRPr>
+            </a:pPr>
+            <a:r>
+              <a:rPr sz="1275" b="0">
+                <a:solidFill>
+                  <a:srgbClr val="607895"/>
+                </a:solidFill>
+                <a:latin typeface="Microsoft YaHei"/>
+                <a:ea typeface="Microsoft YaHei"/>
+                <a:cs typeface="Microsoft YaHei"/>
+              </a:rPr>
+              <a:t>在交付前识别容量与几何风险</a:t>
+            </a:r>
+          </a:p>
+        </p:txBody>
+      </p:sp>
+      <p:sp>
+        <p:nvSpPr>
+          <p:cNvPr id="33" name="PPAGENT_QA|parent=parallel-card-6|domains=parallel-card,parallel-content">
+            <a:extLst xmlns:a="http://schemas.openxmlformats.org/drawingml/2006/main">
+              <a:ext uri="{FF2B5EF4-FFF2-40B4-BE49-F238E27FC236}">
+                <a16:creationId xmlns:a16="http://schemas.microsoft.com/office/drawing/2014/main" id="{EB71BE9C-7B97-4698-A862-057EB2A47F66}"/>
+              </a:ext>
+            </a:extLst>
+          </p:cNvPr>
+          <p:cNvSpPr>
+            <a:spLocks xmlns:a="http://schemas.openxmlformats.org/drawingml/2006/main" noGrp="1"/>
+          </p:cNvSpPr>
+          <p:nvPr/>
+        </p:nvSpPr>
+        <p:spPr>
+          <a:xfrm xmlns:a="http://schemas.openxmlformats.org/drawingml/2006/main">
+            <a:off x="10082893" y="1809750"/>
+            <a:ext cx="1366157" cy="3714750"/>
+          </a:xfrm>
+          <a:prstGeom xmlns:a="http://schemas.openxmlformats.org/drawingml/2006/main" prst="roundRect">
+            <a:avLst>
+              <a:gd name="adj" fmla="val 8367"/>
+            </a:avLst>
+          </a:prstGeom>
+          <a:solidFill xmlns:a="http://schemas.openxmlformats.org/drawingml/2006/main">
+            <a:srgbClr val="F7FBFF"/>
+          </a:solidFill>
+          <a:ln xmlns:a="http://schemas.openxmlformats.org/drawingml/2006/main" w="13335">
+            <a:solidFill>
+              <a:srgbClr val="A8CBEA"/>
+            </a:solidFill>
+            <a:prstDash val="solid"/>
+          </a:ln>
+        </p:spPr>
+        <p:style>
+          <a:lnRef xmlns:a="http://schemas.openxmlformats.org/drawingml/2006/main" idx="0"/>
+          <a:fillRef xmlns:a="http://schemas.openxmlformats.org/drawingml/2006/main" idx="0"/>
+          <a:effectRef xmlns:a="http://schemas.openxmlformats.org/drawingml/2006/main" idx="4"/>
+          <a:fontRef xmlns:a="http://schemas.openxmlformats.org/drawingml/2006/main" idx="major"/>
+        </p:style>
+      </p:sp>
+      <p:sp>
+        <p:nvSpPr>
+          <p:cNvPr id="34" name="PPAGENT_QA|within=parallel-card-6|role=accent-rail">
+            <a:extLst xmlns:a="http://schemas.openxmlformats.org/drawingml/2006/main">
+              <a:ext uri="{FF2B5EF4-FFF2-40B4-BE49-F238E27FC236}">
+                <a16:creationId xmlns:a16="http://schemas.microsoft.com/office/drawing/2014/main" id="{BAAD7BBC-997D-40BC-8A39-6D09A9E9066B}"/>
+              </a:ext>
+            </a:extLst>
+          </p:cNvPr>
+          <p:cNvSpPr>
+            <a:spLocks xmlns:a="http://schemas.openxmlformats.org/drawingml/2006/main" noGrp="1"/>
+          </p:cNvSpPr>
+          <p:nvPr/>
+        </p:nvSpPr>
+        <p:spPr>
+          <a:xfrm xmlns:a="http://schemas.openxmlformats.org/drawingml/2006/main">
+            <a:off x="10082893" y="1809750"/>
+            <a:ext cx="1366157" cy="76200"/>
+          </a:xfrm>
+          <a:prstGeom xmlns:a="http://schemas.openxmlformats.org/drawingml/2006/main" prst="rect">
+            <a:avLst/>
+          </a:prstGeom>
+          <a:solidFill xmlns:a="http://schemas.openxmlformats.org/drawingml/2006/main">
+            <a:srgbClr val="2F5EA8"/>
+          </a:solidFill>
+          <a:ln xmlns:a="http://schemas.openxmlformats.org/drawingml/2006/main" w="0">
+            <a:noFill/>
+            <a:prstDash val="solid"/>
+          </a:ln>
+        </p:spPr>
+      </p:sp>
+      <p:sp>
+        <p:nvSpPr>
+          <p:cNvPr id="35" name="PPAGENT_QA|within=parallel-card-6|role=index">
+            <a:extLst xmlns:a="http://schemas.openxmlformats.org/drawingml/2006/main">
+              <a:ext uri="{FF2B5EF4-FFF2-40B4-BE49-F238E27FC236}">
+                <a16:creationId xmlns:a16="http://schemas.microsoft.com/office/drawing/2014/main" id="{D976BAC9-D8E5-4531-85A1-5E0257DBFF47}"/>
+              </a:ext>
+            </a:extLst>
+          </p:cNvPr>
+          <p:cNvSpPr>
+            <a:spLocks xmlns:a="http://schemas.openxmlformats.org/drawingml/2006/main" noGrp="1"/>
+          </p:cNvSpPr>
+          <p:nvPr/>
+        </p:nvSpPr>
+        <p:spPr>
+          <a:xfrm xmlns:a="http://schemas.openxmlformats.org/drawingml/2006/main">
+            <a:off x="10273393" y="2114550"/>
+            <a:ext cx="514350" cy="514350"/>
+          </a:xfrm>
+          <a:prstGeom xmlns:a="http://schemas.openxmlformats.org/drawingml/2006/main" prst="ellipse">
+            <a:avLst/>
+          </a:prstGeom>
+          <a:solidFill xmlns:a="http://schemas.openxmlformats.org/drawingml/2006/main">
+            <a:srgbClr val="2F5EA8"/>
+          </a:solidFill>
+          <a:ln xmlns:a="http://schemas.openxmlformats.org/drawingml/2006/main" w="19050">
+            <a:solidFill>
+              <a:srgbClr val="FFFFFF"/>
+            </a:solidFill>
+            <a:prstDash val="solid"/>
+          </a:ln>
+        </p:spPr>
+        <p:txBody>
+          <a:bodyPr xmlns:a="http://schemas.openxmlformats.org/drawingml/2006/main" lIns="0" tIns="0" rIns="0" bIns="0" anchor="ctr">
+            <a:normAutofit fontScale="100000"/>
+          </a:bodyPr>
+          <a:lstStyle xmlns:a="http://schemas.openxmlformats.org/drawingml/2006/main"/>
+          <a:p xmlns:a="http://schemas.openxmlformats.org/drawingml/2006/main">
+            <a:pPr algn="ctr">
+              <a:defRPr sz="1275" b="1">
+                <a:solidFill>
+                  <a:srgbClr val="FFFFFF"/>
+                </a:solidFill>
+                <a:latin typeface="Microsoft YaHei"/>
+                <a:ea typeface="Microsoft YaHei"/>
+                <a:cs typeface="Microsoft YaHei"/>
+              </a:defRPr>
+            </a:pPr>
+            <a:r>
+              <a:rPr sz="1275" b="1">
+                <a:solidFill>
+                  <a:srgbClr val="FFFFFF"/>
+                </a:solidFill>
+                <a:latin typeface="Microsoft YaHei"/>
+                <a:ea typeface="Microsoft YaHei"/>
+                <a:cs typeface="Microsoft YaHei"/>
+              </a:rPr>
+              <a:t>07</a:t>
+            </a:r>
+          </a:p>
+        </p:txBody>
+      </p:sp>
+      <p:sp>
+        <p:nvSpPr>
+          <p:cNvPr id="36" name="PPAGENT_QA|within=parallel-card-6|role=title">
+            <a:extLst xmlns:a="http://schemas.openxmlformats.org/drawingml/2006/main">
+              <a:ext uri="{FF2B5EF4-FFF2-40B4-BE49-F238E27FC236}">
+                <a16:creationId xmlns:a16="http://schemas.microsoft.com/office/drawing/2014/main" id="{10D84BF2-0873-4475-90D7-0E86D7EBEB02}"/>
+              </a:ext>
+            </a:extLst>
+          </p:cNvPr>
+          <p:cNvSpPr>
+            <a:spLocks xmlns:a="http://schemas.openxmlformats.org/drawingml/2006/main" noGrp="1"/>
+          </p:cNvSpPr>
+          <p:nvPr/>
+        </p:nvSpPr>
+        <p:spPr>
+          <a:xfrm xmlns:a="http://schemas.openxmlformats.org/drawingml/2006/main">
+            <a:off x="10273393" y="2952750"/>
+            <a:ext cx="985157" cy="523875"/>
+          </a:xfrm>
+          <a:prstGeom xmlns:a="http://schemas.openxmlformats.org/drawingml/2006/main" prst="rect">
+            <a:avLst/>
+          </a:prstGeom>
+          <a:noFill xmlns:a="http://schemas.openxmlformats.org/drawingml/2006/main"/>
+          <a:ln xmlns:a="http://schemas.openxmlformats.org/drawingml/2006/main" w="0">
+            <a:noFill/>
+            <a:prstDash val="solid"/>
+          </a:ln>
+        </p:spPr>
+        <p:txBody>
+          <a:bodyPr xmlns:a="http://schemas.openxmlformats.org/drawingml/2006/main" lIns="0" tIns="0" rIns="0" bIns="0" anchor="ctr">
+            <a:normAutofit fontScale="100000"/>
+          </a:bodyPr>
+          <a:lstStyle xmlns:a="http://schemas.openxmlformats.org/drawingml/2006/main"/>
+          <a:p xmlns:a="http://schemas.openxmlformats.org/drawingml/2006/main">
+            <a:pPr algn="ctr">
+              <a:defRPr sz="1650" b="1">
+                <a:solidFill>
+                  <a:srgbClr val="174D87"/>
+                </a:solidFill>
+                <a:latin typeface="Microsoft YaHei"/>
+                <a:ea typeface="Microsoft YaHei"/>
+                <a:cs typeface="Microsoft YaHei"/>
+              </a:defRPr>
+            </a:pPr>
+            <a:r>
+              <a:rPr sz="1650" b="1">
+                <a:solidFill>
+                  <a:srgbClr val="174D87"/>
+                </a:solidFill>
+                <a:latin typeface="Microsoft YaHei"/>
+                <a:ea typeface="Microsoft YaHei"/>
+                <a:cs typeface="Microsoft YaHei"/>
+              </a:rPr>
+              <a:t>持续迭代</a:t>
+            </a:r>
+          </a:p>
+        </p:txBody>
+      </p:sp>
+      <p:sp>
+        <p:nvSpPr>
+          <p:cNvPr id="37" name="PPAGENT_QA|within=parallel-card-6|role=body">
+            <a:extLst xmlns:a="http://schemas.openxmlformats.org/drawingml/2006/main">
+              <a:ext uri="{FF2B5EF4-FFF2-40B4-BE49-F238E27FC236}">
+                <a16:creationId xmlns:a16="http://schemas.microsoft.com/office/drawing/2014/main" id="{7076D4C8-1087-4831-B2DA-75032C6DA4E4}"/>
+              </a:ext>
+            </a:extLst>
+          </p:cNvPr>
+          <p:cNvSpPr>
+            <a:spLocks xmlns:a="http://schemas.openxmlformats.org/drawingml/2006/main" noGrp="1"/>
+          </p:cNvSpPr>
+          <p:nvPr/>
+        </p:nvSpPr>
+        <p:spPr>
+          <a:xfrm xmlns:a="http://schemas.openxmlformats.org/drawingml/2006/main">
+            <a:off x="10292443" y="3638550"/>
+            <a:ext cx="947057" cy="952500"/>
+          </a:xfrm>
+          <a:prstGeom xmlns:a="http://schemas.openxmlformats.org/drawingml/2006/main" prst="rect">
+            <a:avLst/>
+          </a:prstGeom>
+          <a:noFill xmlns:a="http://schemas.openxmlformats.org/drawingml/2006/main"/>
+          <a:ln xmlns:a="http://schemas.openxmlformats.org/drawingml/2006/main" w="0">
+            <a:noFill/>
+            <a:prstDash val="solid"/>
+          </a:ln>
+        </p:spPr>
+        <p:txBody>
+          <a:bodyPr xmlns:a="http://schemas.openxmlformats.org/drawingml/2006/main" lIns="0" tIns="0" rIns="0" bIns="0" anchor="t">
+            <a:normAutofit fontScale="100000"/>
+          </a:bodyPr>
+          <a:lstStyle xmlns:a="http://schemas.openxmlformats.org/drawingml/2006/main"/>
+          <a:p xmlns:a="http://schemas.openxmlformats.org/drawingml/2006/main">
+            <a:pPr algn="ctr">
+              <a:defRPr sz="1275" b="0">
+                <a:solidFill>
+                  <a:srgbClr val="607895"/>
+                </a:solidFill>
+                <a:latin typeface="Microsoft YaHei"/>
+                <a:ea typeface="Microsoft YaHei"/>
+                <a:cs typeface="Microsoft YaHei"/>
+              </a:defRPr>
+            </a:pPr>
+            <a:r>
+              <a:rPr sz="1275" b="0">
+                <a:solidFill>
+                  <a:srgbClr val="607895"/>
+                </a:solidFill>
+                <a:latin typeface="Microsoft YaHei"/>
+                <a:ea typeface="Microsoft YaHei"/>
+                <a:cs typeface="Microsoft YaHei"/>
+              </a:rPr>
+              <a:t>把一次成果沉淀为下一次可调用能力</a:t>
+            </a:r>
+          </a:p>
+        </p:txBody>
+      </p:sp>
+    </p:spTree>
+    <p:extLst>
+      <p:ext uri="{BB962C8B-B14F-4D97-AF65-F5344CB8AC3E}">
+        <p14:creationId xmlns:p14="http://schemas.microsoft.com/office/powerpoint/2010/main" val="1947159857"/>
       </p:ext>
     </p:extLst>
   </p:cSld>
